--- a/01_DOCUMENTACION_TECNICA/PRESENTACION_EJECUTIVA_APF1.pptx
+++ b/01_DOCUMENTACION_TECNICA/PRESENTACION_EJECUTIVA_APF1.pptx
@@ -15,6 +15,10 @@
     <p:sldId id="263" r:id="rId14"/>
     <p:sldId id="264" r:id="rId15"/>
     <p:sldId id="265" r:id="rId16"/>
+    <p:sldId id="266" r:id="rId17"/>
+    <p:sldId id="267" r:id="rId18"/>
+    <p:sldId id="268" r:id="rId19"/>
+    <p:sldId id="269" r:id="rId20"/>
   </p:sldIdLst>
   <p:sldSz cx="12191695" cy="6858000" type="screen4x3"/>
   <p:notesSz cx="6858000" cy="9144000"/>
@@ -3112,7 +3116,7 @@
             <a:avLst/>
           </a:prstGeom>
           <a:solidFill>
-            <a:srgbClr val="070D18"/>
+            <a:srgbClr val="F8FAFC"/>
           </a:solidFill>
           <a:ln>
             <a:noFill/>
@@ -3148,19 +3152,17 @@
         </p:nvSpPr>
         <p:spPr>
           <a:xfrm>
-            <a:off x="3840480" y="548640"/>
-            <a:ext cx="4510735" cy="365760"/>
+            <a:off x="3108960" y="384048"/>
+            <a:ext cx="5973775" cy="402336"/>
           </a:xfrm>
           <a:prstGeom prst="roundRect">
             <a:avLst/>
           </a:prstGeom>
           <a:solidFill>
-            <a:srgbClr val="0F172A"/>
+            <a:srgbClr val="0B1F3A"/>
           </a:solidFill>
-          <a:ln w="12700">
-            <a:solidFill>
-              <a:srgbClr val="FBBF24"/>
-            </a:solidFill>
+          <a:ln>
+            <a:noFill/>
           </a:ln>
         </p:spPr>
         <p:style>
@@ -3182,11 +3184,11 @@
           <a:lstStyle/>
           <a:p>
             <a:pPr algn="ctr">
-              <a:defRPr sz="1000" b="1">
+              <a:defRPr sz="1150" b="1">
                 <a:solidFill>
                   <a:srgbClr val="FBBF24"/>
                 </a:solidFill>
-                <a:latin typeface="Arial"/>
+                <a:latin typeface="Calibri"/>
               </a:defRPr>
             </a:pPr>
             <a:r>
@@ -3203,8 +3205,8 @@
         </p:nvSpPr>
         <p:spPr>
           <a:xfrm>
-            <a:off x="914400" y="1097280"/>
-            <a:ext cx="10362895" cy="1463040"/>
+            <a:off x="731520" y="932688"/>
+            <a:ext cx="10728655" cy="1874519"/>
           </a:xfrm>
           <a:prstGeom prst="rect">
             <a:avLst/>
@@ -3212,17 +3214,20 @@
           <a:noFill/>
         </p:spPr>
         <p:txBody>
-          <a:bodyPr wrap="square">
+          <a:bodyPr wrap="square" anchor="t">
             <a:spAutoFit/>
           </a:bodyPr>
           <a:lstStyle/>
           <a:p>
             <a:pPr algn="ctr">
-              <a:defRPr sz="4400" b="1">
-                <a:solidFill>
-                  <a:srgbClr val="00D4FF"/>
-                </a:solidFill>
-                <a:latin typeface="Arial"/>
+              <a:spcAft>
+                <a:spcPts val="300"/>
+              </a:spcAft>
+              <a:defRPr sz="5000" b="1">
+                <a:solidFill>
+                  <a:srgbClr val="0284C7"/>
+                </a:solidFill>
+                <a:latin typeface="Calibri"/>
               </a:defRPr>
             </a:pPr>
             <a:r>
@@ -3231,11 +3236,14 @@
           </a:p>
           <a:p>
             <a:pPr algn="ctr">
-              <a:defRPr sz="2000" b="1">
-                <a:solidFill>
-                  <a:srgbClr val="FFFFFF"/>
-                </a:solidFill>
-                <a:latin typeface="Arial"/>
+              <a:spcAft>
+                <a:spcPts val="300"/>
+              </a:spcAft>
+              <a:defRPr sz="2400" b="1">
+                <a:solidFill>
+                  <a:srgbClr val="0B1F3A"/>
+                </a:solidFill>
+                <a:latin typeface="Calibri"/>
               </a:defRPr>
             </a:pPr>
             <a:r>
@@ -3244,11 +3252,11 @@
           </a:p>
           <a:p>
             <a:pPr algn="ctr">
-              <a:defRPr sz="1300">
-                <a:solidFill>
-                  <a:srgbClr val="94A3B8"/>
-                </a:solidFill>
-                <a:latin typeface="Arial"/>
+              <a:defRPr sz="1500" b="1">
+                <a:solidFill>
+                  <a:srgbClr val="B45309"/>
+                </a:solidFill>
+                <a:latin typeface="Calibri"/>
               </a:defRPr>
             </a:pPr>
             <a:r>
@@ -3265,18 +3273,18 @@
         </p:nvSpPr>
         <p:spPr>
           <a:xfrm>
-            <a:off x="914400" y="2926080"/>
-            <a:ext cx="3931920" cy="3108960"/>
+            <a:off x="731520" y="2971800"/>
+            <a:ext cx="4297680" cy="3383280"/>
           </a:xfrm>
           <a:prstGeom prst="roundRect">
             <a:avLst/>
           </a:prstGeom>
           <a:solidFill>
-            <a:srgbClr val="0F192D"/>
+            <a:srgbClr val="FFFFFF"/>
           </a:solidFill>
-          <a:ln w="12700">
+          <a:ln w="25400">
             <a:solidFill>
-              <a:srgbClr val="00D4FF"/>
+              <a:srgbClr val="93C5FD"/>
             </a:solidFill>
           </a:ln>
         </p:spPr>
@@ -3295,28 +3303,31 @@
           </a:fontRef>
         </p:style>
         <p:txBody>
-          <a:bodyPr rtlCol="0" anchor="ctr" wrap="square"/>
+          <a:bodyPr rtlCol="0" anchor="t" wrap="square" tIns="182880" lIns="228600"/>
           <a:lstStyle/>
           <a:p>
             <a:pPr algn="ctr">
-              <a:defRPr sz="1100" b="1">
-                <a:solidFill>
-                  <a:srgbClr val="00D4FF"/>
-                </a:solidFill>
-                <a:latin typeface="Arial"/>
-              </a:defRPr>
-            </a:pPr>
-            <a:r>
-              <a:t>INTEGRANTES DEL EQUIPO (UTP)</a:t>
-            </a:r>
-          </a:p>
-          <a:p>
-            <a:pPr>
-              <a:defRPr sz="1050" b="1">
-                <a:solidFill>
-                  <a:srgbClr val="FFFFFF"/>
-                </a:solidFill>
-                <a:latin typeface="Arial"/>
+              <a:spcAft>
+                <a:spcPts val="800"/>
+              </a:spcAft>
+              <a:defRPr sz="1400" b="1">
+                <a:solidFill>
+                  <a:srgbClr val="0284C7"/>
+                </a:solidFill>
+                <a:latin typeface="Calibri"/>
+              </a:defRPr>
+            </a:pPr>
+            <a:r>
+              <a:t>👥 INTEGRANTES DEL EQUIPO (UTP)</a:t>
+            </a:r>
+          </a:p>
+          <a:p>
+            <a:pPr>
+              <a:defRPr sz="1300" b="1">
+                <a:solidFill>
+                  <a:srgbClr val="0F172A"/>
+                </a:solidFill>
+                <a:latin typeface="Calibri"/>
               </a:defRPr>
             </a:pPr>
             <a:r>
@@ -3325,24 +3336,27 @@
           </a:p>
           <a:p>
             <a:pPr>
-              <a:defRPr sz="950">
-                <a:solidFill>
-                  <a:srgbClr val="94A3B8"/>
-                </a:solidFill>
-                <a:latin typeface="Arial"/>
-              </a:defRPr>
-            </a:pPr>
-            <a:r>
-              <a:t>   Código: U23243651 (Líder Técnico)</a:t>
-            </a:r>
-          </a:p>
-          <a:p>
-            <a:pPr>
-              <a:defRPr sz="1050" b="1">
-                <a:solidFill>
-                  <a:srgbClr val="FFFFFF"/>
-                </a:solidFill>
-                <a:latin typeface="Arial"/>
+              <a:spcAft>
+                <a:spcPts val="400"/>
+              </a:spcAft>
+              <a:defRPr sz="1150">
+                <a:solidFill>
+                  <a:srgbClr val="334155"/>
+                </a:solidFill>
+                <a:latin typeface="Calibri"/>
+              </a:defRPr>
+            </a:pPr>
+            <a:r>
+              <a:t>   Código: U23243651  |  Líder Técnico</a:t>
+            </a:r>
+          </a:p>
+          <a:p>
+            <a:pPr>
+              <a:defRPr sz="1300" b="1">
+                <a:solidFill>
+                  <a:srgbClr val="0F172A"/>
+                </a:solidFill>
+                <a:latin typeface="Calibri"/>
               </a:defRPr>
             </a:pPr>
             <a:r>
@@ -3351,24 +3365,27 @@
           </a:p>
           <a:p>
             <a:pPr>
-              <a:defRPr sz="950">
-                <a:solidFill>
-                  <a:srgbClr val="94A3B8"/>
-                </a:solidFill>
-                <a:latin typeface="Arial"/>
-              </a:defRPr>
-            </a:pPr>
-            <a:r>
-              <a:t>   Código: U21216410</a:t>
-            </a:r>
-          </a:p>
-          <a:p>
-            <a:pPr>
-              <a:defRPr sz="1050" b="1">
-                <a:solidFill>
-                  <a:srgbClr val="FFFFFF"/>
-                </a:solidFill>
-                <a:latin typeface="Arial"/>
+              <a:spcAft>
+                <a:spcPts val="400"/>
+              </a:spcAft>
+              <a:defRPr sz="1150">
+                <a:solidFill>
+                  <a:srgbClr val="334155"/>
+                </a:solidFill>
+                <a:latin typeface="Calibri"/>
+              </a:defRPr>
+            </a:pPr>
+            <a:r>
+              <a:t>   Código: U21216410  |  Desarrollo / Requisitos</a:t>
+            </a:r>
+          </a:p>
+          <a:p>
+            <a:pPr>
+              <a:defRPr sz="1300" b="1">
+                <a:solidFill>
+                  <a:srgbClr val="0F172A"/>
+                </a:solidFill>
+                <a:latin typeface="Calibri"/>
               </a:defRPr>
             </a:pPr>
             <a:r>
@@ -3377,24 +3394,27 @@
           </a:p>
           <a:p>
             <a:pPr>
-              <a:defRPr sz="950">
-                <a:solidFill>
-                  <a:srgbClr val="94A3B8"/>
-                </a:solidFill>
-                <a:latin typeface="Arial"/>
-              </a:defRPr>
-            </a:pPr>
-            <a:r>
-              <a:t>   Código: U21221688</a:t>
-            </a:r>
-          </a:p>
-          <a:p>
-            <a:pPr>
-              <a:defRPr sz="1050" b="1">
-                <a:solidFill>
-                  <a:srgbClr val="FFFFFF"/>
-                </a:solidFill>
-                <a:latin typeface="Arial"/>
+              <a:spcAft>
+                <a:spcPts val="400"/>
+              </a:spcAft>
+              <a:defRPr sz="1150">
+                <a:solidFill>
+                  <a:srgbClr val="334155"/>
+                </a:solidFill>
+                <a:latin typeface="Calibri"/>
+              </a:defRPr>
+            </a:pPr>
+            <a:r>
+              <a:t>   Código: U21221688  |  Desarrollo / QA</a:t>
+            </a:r>
+          </a:p>
+          <a:p>
+            <a:pPr>
+              <a:defRPr sz="1300" b="1">
+                <a:solidFill>
+                  <a:srgbClr val="0F172A"/>
+                </a:solidFill>
+                <a:latin typeface="Calibri"/>
               </a:defRPr>
             </a:pPr>
             <a:r>
@@ -3403,15 +3423,18 @@
           </a:p>
           <a:p>
             <a:pPr>
-              <a:defRPr sz="950">
-                <a:solidFill>
-                  <a:srgbClr val="94A3B8"/>
-                </a:solidFill>
-                <a:latin typeface="Arial"/>
-              </a:defRPr>
-            </a:pPr>
-            <a:r>
-              <a:t>   Código: U25239074</a:t>
+              <a:spcAft>
+                <a:spcPts val="400"/>
+              </a:spcAft>
+              <a:defRPr sz="1150">
+                <a:solidFill>
+                  <a:srgbClr val="334155"/>
+                </a:solidFill>
+                <a:latin typeface="Calibri"/>
+              </a:defRPr>
+            </a:pPr>
+            <a:r>
+              <a:t>   Código: U25239074  |  Desarrollo / Datos</a:t>
             </a:r>
           </a:p>
         </p:txBody>
@@ -3424,18 +3447,18 @@
         </p:nvSpPr>
         <p:spPr>
           <a:xfrm>
-            <a:off x="5029200" y="2926080"/>
-            <a:ext cx="3108960" cy="3108960"/>
+            <a:off x="5212080" y="2971800"/>
+            <a:ext cx="3200400" cy="3383280"/>
           </a:xfrm>
           <a:prstGeom prst="roundRect">
             <a:avLst/>
           </a:prstGeom>
           <a:solidFill>
-            <a:srgbClr val="0F192D"/>
+            <a:srgbClr val="FFFFFF"/>
           </a:solidFill>
-          <a:ln w="12700">
+          <a:ln w="25400">
             <a:solidFill>
-              <a:srgbClr val="23375A"/>
+              <a:srgbClr val="FCD34D"/>
             </a:solidFill>
           </a:ln>
         </p:spPr>
@@ -3454,85 +3477,85 @@
           </a:fontRef>
         </p:style>
         <p:txBody>
-          <a:bodyPr rtlCol="0" anchor="ctr" wrap="square"/>
+          <a:bodyPr rtlCol="0" anchor="t" wrap="square" tIns="182880" lIns="228600"/>
           <a:lstStyle/>
           <a:p>
             <a:pPr algn="ctr">
-              <a:defRPr sz="1100" b="1">
-                <a:solidFill>
-                  <a:srgbClr val="FBBF24"/>
-                </a:solidFill>
-                <a:latin typeface="Arial"/>
-              </a:defRPr>
-            </a:pPr>
-            <a:r>
-              <a:t>DOCENTE EVALUADOR</a:t>
-            </a:r>
-          </a:p>
-          <a:p>
+              <a:spcAft>
+                <a:spcPts val="800"/>
+              </a:spcAft>
+              <a:defRPr sz="1400" b="1">
+                <a:solidFill>
+                  <a:srgbClr val="B45309"/>
+                </a:solidFill>
+                <a:latin typeface="Calibri"/>
+              </a:defRPr>
+            </a:pPr>
+            <a:r>
+              <a:t>👨‍🏫 DOCENTE EVALUADOR</a:t>
+            </a:r>
+          </a:p>
+          <a:p>
+            <a:pPr>
+              <a:defRPr sz="1700" b="1">
+                <a:solidFill>
+                  <a:srgbClr val="0B1F3A"/>
+                </a:solidFill>
+                <a:latin typeface="Calibri"/>
+              </a:defRPr>
+            </a:pPr>
+            <a:r>
+              <a:t>Ing. Yony Zamata Condori</a:t>
+            </a:r>
+          </a:p>
+          <a:p>
+            <a:pPr>
+              <a:spcAft>
+                <a:spcPts val="1400"/>
+              </a:spcAft>
+              <a:defRPr sz="1200">
+                <a:solidFill>
+                  <a:srgbClr val="334155"/>
+                </a:solidFill>
+                <a:latin typeface="Calibri"/>
+              </a:defRPr>
+            </a:pPr>
+            <a:r>
+              <a:t>Catedrático del Curso</a:t>
+            </a:r>
             <a:br/>
-            <a:pPr>
-              <a:defRPr sz="1400" b="1">
-                <a:solidFill>
-                  <a:srgbClr val="FFFFFF"/>
-                </a:solidFill>
-                <a:latin typeface="Arial"/>
-              </a:defRPr>
-            </a:pPr>
-            <a:r>
-              <a:t>Ing. Yony Zamata Condori</a:t>
-            </a:r>
-          </a:p>
-          <a:p>
-            <a:pPr>
-              <a:defRPr sz="1000">
-                <a:solidFill>
-                  <a:srgbClr val="94A3B8"/>
-                </a:solidFill>
-                <a:latin typeface="Arial"/>
-              </a:defRPr>
-            </a:pPr>
-            <a:r>
-              <a:t>Catedrático del Curso</a:t>
+            <a:r>
+              <a:t>Facultad de Ingeniería</a:t>
+            </a:r>
+          </a:p>
+          <a:p>
+            <a:pPr>
+              <a:defRPr sz="1250" b="1">
+                <a:solidFill>
+                  <a:srgbClr val="0284C7"/>
+                </a:solidFill>
+                <a:latin typeface="Calibri"/>
+              </a:defRPr>
+            </a:pPr>
+            <a:r>
+              <a:t>ASIGNATURA:</a:t>
+            </a:r>
+          </a:p>
+          <a:p>
+            <a:pPr>
+              <a:defRPr sz="1200">
+                <a:solidFill>
+                  <a:srgbClr val="0F172A"/>
+                </a:solidFill>
+                <a:latin typeface="Calibri"/>
+              </a:defRPr>
+            </a:pPr>
+            <a:r>
+              <a:t>Curso Integrador I: Sistemas Software</a:t>
             </a:r>
             <a:br/>
             <a:r>
-              <a:t>Facultad de Ingeniería</a:t>
-            </a:r>
-          </a:p>
-          <a:p>
-            <a:br/>
-            <a:pPr>
-              <a:defRPr sz="1000" b="1">
-                <a:solidFill>
-                  <a:srgbClr val="00D4FF"/>
-                </a:solidFill>
-                <a:latin typeface="Arial"/>
-              </a:defRPr>
-            </a:pPr>
-            <a:r>
-              <a:t>ASIGNATURA:</a:t>
-            </a:r>
-          </a:p>
-          <a:p>
-            <a:pPr>
-              <a:defRPr sz="1000">
-                <a:solidFill>
-                  <a:srgbClr val="FFFFFF"/>
-                </a:solidFill>
-                <a:latin typeface="Arial"/>
-              </a:defRPr>
-            </a:pPr>
-            <a:r>
-              <a:t>Curso Integrador I:</a:t>
-            </a:r>
-            <a:br/>
-            <a:r>
-              <a:t>Sistemas Software (Secc. 57524)</a:t>
-            </a:r>
-            <a:br/>
-            <a:r>
-              <a:t>7mo Ciclo • 2026</a:t>
+              <a:t>Sección 57524 • 7mo Ciclo (2026)</a:t>
             </a:r>
           </a:p>
         </p:txBody>
@@ -3545,18 +3568,18 @@
         </p:nvSpPr>
         <p:spPr>
           <a:xfrm>
-            <a:off x="8321040" y="2926080"/>
-            <a:ext cx="2926080" cy="3108960"/>
+            <a:off x="8595360" y="2971800"/>
+            <a:ext cx="2864815" cy="3383280"/>
           </a:xfrm>
           <a:prstGeom prst="roundRect">
             <a:avLst/>
           </a:prstGeom>
           <a:solidFill>
-            <a:srgbClr val="0A2319"/>
+            <a:srgbClr val="F0FDF4"/>
           </a:solidFill>
-          <a:ln w="19050">
+          <a:ln w="27940">
             <a:solidFill>
-              <a:srgbClr val="10B981"/>
+              <a:srgbClr val="059669"/>
             </a:solidFill>
           </a:ln>
         </p:spPr>
@@ -3575,72 +3598,79 @@
           </a:fontRef>
         </p:style>
         <p:txBody>
-          <a:bodyPr rtlCol="0" anchor="ctr" wrap="square"/>
+          <a:bodyPr rtlCol="0" anchor="t" wrap="square" tIns="182880" lIns="182880"/>
           <a:lstStyle/>
           <a:p>
             <a:pPr algn="ctr">
-              <a:defRPr sz="1100" b="1">
-                <a:solidFill>
-                  <a:srgbClr val="10B981"/>
-                </a:solidFill>
-                <a:latin typeface="Arial"/>
-              </a:defRPr>
-            </a:pPr>
-            <a:r>
-              <a:t>OBJETIVO DE EVALUACIÓN</a:t>
-            </a:r>
-          </a:p>
-          <a:p>
+              <a:spcAft>
+                <a:spcPts val="400"/>
+              </a:spcAft>
+              <a:defRPr sz="1400" b="1">
+                <a:solidFill>
+                  <a:srgbClr val="059669"/>
+                </a:solidFill>
+                <a:latin typeface="Calibri"/>
+              </a:defRPr>
+            </a:pPr>
+            <a:r>
+              <a:t>🎯 META DE EVALUACIÓN</a:t>
+            </a:r>
+          </a:p>
+          <a:p>
+            <a:pPr algn="ctr">
+              <a:spcAft>
+                <a:spcPts val="300"/>
+              </a:spcAft>
+              <a:defRPr sz="5000" b="1">
+                <a:solidFill>
+                  <a:srgbClr val="059669"/>
+                </a:solidFill>
+                <a:latin typeface="Calibri"/>
+              </a:defRPr>
+            </a:pPr>
+            <a:r>
+              <a:t>20 / 20</a:t>
+            </a:r>
+          </a:p>
+          <a:p>
+            <a:pPr algn="ctr">
+              <a:spcAft>
+                <a:spcPts val="1000"/>
+              </a:spcAft>
+              <a:defRPr sz="1300" b="1">
+                <a:solidFill>
+                  <a:srgbClr val="0B1F3A"/>
+                </a:solidFill>
+                <a:latin typeface="Calibri"/>
+              </a:defRPr>
+            </a:pPr>
+            <a:r>
+              <a:t>Calificación Máxima Oficial</a:t>
+            </a:r>
+          </a:p>
+          <a:p>
+            <a:pPr>
+              <a:defRPr sz="1200" b="1">
+                <a:solidFill>
+                  <a:srgbClr val="334155"/>
+                </a:solidFill>
+                <a:latin typeface="Calibri"/>
+              </a:defRPr>
+            </a:pPr>
+            <a:r>
+              <a:t>✓ Cobertura 100% Rúbrica</a:t>
+            </a:r>
             <a:br/>
-            <a:pPr>
-              <a:defRPr sz="4000" b="1">
-                <a:solidFill>
-                  <a:srgbClr val="10B981"/>
-                </a:solidFill>
-                <a:latin typeface="Arial"/>
-              </a:defRPr>
-            </a:pPr>
-            <a:r>
-              <a:t>20 / 20</a:t>
-            </a:r>
-          </a:p>
-          <a:p>
-            <a:pPr>
-              <a:defRPr sz="1100" b="1">
-                <a:solidFill>
-                  <a:srgbClr val="FFFFFF"/>
-                </a:solidFill>
-                <a:latin typeface="Arial"/>
-              </a:defRPr>
-            </a:pPr>
-            <a:r>
-              <a:t>Calificación Máxima Esperada</a:t>
-            </a:r>
-          </a:p>
-          <a:p>
+            <a:r>
+              <a:t>✓ &gt;50% Java 17 + Spring Boot 3</a:t>
+            </a:r>
             <a:br/>
-            <a:pPr>
-              <a:defRPr sz="950">
-                <a:solidFill>
-                  <a:srgbClr val="94A3B8"/>
-                </a:solidFill>
-                <a:latin typeface="Arial"/>
-              </a:defRPr>
-            </a:pPr>
-            <a:r>
-              <a:t>✓ Cobertura 100% Criterios 1 al 6</a:t>
+            <a:r>
+              <a:t>✓ 5 Pantallas Funcionales</a:t>
             </a:r>
             <a:br/>
             <a:r>
-              <a:t>✓ &gt;50% Java 17 + Spring Boot 3</a:t>
-            </a:r>
-            <a:br/>
-            <a:r>
-              <a:t>✓ 5 Pantallas Funcionales</a:t>
-            </a:r>
-            <a:br/>
-            <a:r>
-              <a:t>✓ PostgreSQL Inmutable</a:t>
+              <a:t>✓ PostgreSQL 15 Inmutable</a:t>
             </a:r>
           </a:p>
         </p:txBody>
@@ -3678,7 +3708,7 @@
             <a:avLst/>
           </a:prstGeom>
           <a:solidFill>
-            <a:srgbClr val="070D18"/>
+            <a:srgbClr val="F8FAFC"/>
           </a:solidFill>
           <a:ln>
             <a:noFill/>
@@ -3708,132 +3738,24 @@
       </p:sp>
       <p:sp>
         <p:nvSpPr>
-          <p:cNvPr id="3" name="TextBox 2"/>
-          <p:cNvSpPr txBox="1"/>
+          <p:cNvPr id="3" name="Rectangle 2"/>
+          <p:cNvSpPr/>
           <p:nvPr/>
         </p:nvSpPr>
         <p:spPr>
           <a:xfrm>
-            <a:off x="731520" y="365760"/>
-            <a:ext cx="7315200" cy="320040"/>
+            <a:off x="731520" y="320040"/>
+            <a:ext cx="10728655" cy="987552"/>
           </a:xfrm>
           <a:prstGeom prst="rect">
             <a:avLst/>
           </a:prstGeom>
-          <a:noFill/>
-        </p:spPr>
-        <p:txBody>
-          <a:bodyPr wrap="square">
-            <a:spAutoFit/>
-          </a:bodyPr>
-          <a:lstStyle/>
-          <a:p>
-            <a:pPr>
-              <a:defRPr sz="950" b="1">
-                <a:solidFill>
-                  <a:srgbClr val="00D4FF"/>
-                </a:solidFill>
-                <a:latin typeface="Arial"/>
-              </a:defRPr>
-            </a:pPr>
-            <a:r>
-              <a:t>CRITERIO 6 DE RÚBRICA • 2.0 PUNTOS</a:t>
-            </a:r>
-          </a:p>
-        </p:txBody>
-      </p:sp>
-      <p:sp>
-        <p:nvSpPr>
-          <p:cNvPr id="4" name="TextBox 3"/>
-          <p:cNvSpPr txBox="1"/>
-          <p:nvPr/>
-        </p:nvSpPr>
-        <p:spPr>
-          <a:xfrm>
-            <a:off x="731520" y="640080"/>
-            <a:ext cx="10515600" cy="502920"/>
-          </a:xfrm>
-          <a:prstGeom prst="rect">
-            <a:avLst/>
-          </a:prstGeom>
-          <a:noFill/>
-        </p:spPr>
-        <p:txBody>
-          <a:bodyPr wrap="square">
-            <a:spAutoFit/>
-          </a:bodyPr>
-          <a:lstStyle/>
-          <a:p>
-            <a:pPr>
-              <a:defRPr sz="2200" b="1">
-                <a:solidFill>
-                  <a:srgbClr val="FFFFFF"/>
-                </a:solidFill>
-                <a:latin typeface="Arial"/>
-              </a:defRPr>
-            </a:pPr>
-            <a:r>
-              <a:t>Conclusiones y Defensa Técnica ante el Jurado</a:t>
-            </a:r>
-          </a:p>
-        </p:txBody>
-      </p:sp>
-      <p:sp>
-        <p:nvSpPr>
-          <p:cNvPr id="5" name="TextBox 4"/>
-          <p:cNvSpPr txBox="1"/>
-          <p:nvPr/>
-        </p:nvSpPr>
-        <p:spPr>
-          <a:xfrm>
-            <a:off x="731520" y="1143000"/>
-            <a:ext cx="10515600" cy="320040"/>
-          </a:xfrm>
-          <a:prstGeom prst="rect">
-            <a:avLst/>
-          </a:prstGeom>
-          <a:noFill/>
-        </p:spPr>
-        <p:txBody>
-          <a:bodyPr wrap="square">
-            <a:spAutoFit/>
-          </a:bodyPr>
-          <a:lstStyle/>
-          <a:p>
-            <a:pPr>
-              <a:defRPr sz="1100">
-                <a:solidFill>
-                  <a:srgbClr val="94A3B8"/>
-                </a:solidFill>
-                <a:latin typeface="Arial"/>
-              </a:defRPr>
-            </a:pPr>
-            <a:r>
-              <a:t>Solución de ingeniería rigurosa, verificable y 100% alineada a la rúbrica oficial</a:t>
-            </a:r>
-          </a:p>
-        </p:txBody>
-      </p:sp>
-      <p:sp>
-        <p:nvSpPr>
-          <p:cNvPr id="6" name="Rounded Rectangle 5"/>
-          <p:cNvSpPr/>
-          <p:nvPr/>
-        </p:nvSpPr>
-        <p:spPr>
-          <a:xfrm>
-            <a:off x="731520" y="1645920"/>
-            <a:ext cx="3413455" cy="3108960"/>
-          </a:xfrm>
-          <a:prstGeom prst="roundRect">
-            <a:avLst/>
-          </a:prstGeom>
           <a:solidFill>
-            <a:srgbClr val="0F192D"/>
+            <a:srgbClr val="FFFFFF"/>
           </a:solidFill>
           <a:ln w="19050">
             <a:solidFill>
-              <a:srgbClr val="00D4FF"/>
+              <a:srgbClr val="CBD5E1"/>
             </a:solidFill>
           </a:ln>
         </p:spPr>
@@ -3852,58 +3774,32 @@
           </a:fontRef>
         </p:style>
         <p:txBody>
-          <a:bodyPr rtlCol="0" anchor="ctr" wrap="square"/>
-          <a:lstStyle/>
-          <a:p>
-            <a:pPr algn="ctr">
-              <a:defRPr sz="1100" b="1">
-                <a:solidFill>
-                  <a:srgbClr val="00D4FF"/>
-                </a:solidFill>
-                <a:latin typeface="Arial"/>
-              </a:defRPr>
-            </a:pPr>
-            <a:r>
-              <a:t>1. ERRADICACIÓN DE ASIMETRÍA</a:t>
-            </a:r>
-          </a:p>
-          <a:p>
-            <a:br/>
-            <a:pPr>
-              <a:defRPr sz="1000">
-                <a:solidFill>
-                  <a:srgbClr val="94A3B8"/>
-                </a:solidFill>
-                <a:latin typeface="Arial"/>
-              </a:defRPr>
-            </a:pPr>
-            <a:r>
-              <a:t>Se redujo el tiempo de detección de caídas de 180 minutos a menos de 30 segundos, blindando la estabilidad financiera del país.</a:t>
-            </a:r>
-          </a:p>
-        </p:txBody>
-      </p:sp>
-      <p:sp>
-        <p:nvSpPr>
-          <p:cNvPr id="7" name="Rounded Rectangle 6"/>
+          <a:bodyPr rtlCol="0" anchor="ctr"/>
+          <a:lstStyle/>
+          <a:p>
+            <a:pPr algn="ctr"/>
+          </a:p>
+        </p:txBody>
+      </p:sp>
+      <p:sp>
+        <p:nvSpPr>
+          <p:cNvPr id="4" name="Rectangle 3"/>
           <p:cNvSpPr/>
           <p:nvPr/>
         </p:nvSpPr>
         <p:spPr>
           <a:xfrm>
-            <a:off x="4389120" y="1645920"/>
-            <a:ext cx="3413455" cy="3108960"/>
-          </a:xfrm>
-          <a:prstGeom prst="roundRect">
+            <a:off x="731520" y="320040"/>
+            <a:ext cx="128016" cy="987552"/>
+          </a:xfrm>
+          <a:prstGeom prst="rect">
             <a:avLst/>
           </a:prstGeom>
           <a:solidFill>
-            <a:srgbClr val="0F192D"/>
+            <a:srgbClr val="0284C7"/>
           </a:solidFill>
-          <a:ln w="19050">
-            <a:solidFill>
-              <a:srgbClr val="FBBF24"/>
-            </a:solidFill>
+          <a:ln>
+            <a:noFill/>
           </a:ln>
         </p:spPr>
         <p:style>
@@ -3921,57 +3817,101 @@
           </a:fontRef>
         </p:style>
         <p:txBody>
-          <a:bodyPr rtlCol="0" anchor="ctr" wrap="square"/>
-          <a:lstStyle/>
-          <a:p>
-            <a:pPr algn="ctr">
-              <a:defRPr sz="1100" b="1">
-                <a:solidFill>
-                  <a:srgbClr val="FBBF24"/>
-                </a:solidFill>
-                <a:latin typeface="Arial"/>
-              </a:defRPr>
-            </a:pPr>
-            <a:r>
-              <a:t>2. RIGOR EN INGENIERÍA DE SOFTWARE</a:t>
-            </a:r>
-          </a:p>
-          <a:p>
-            <a:br/>
-            <a:pPr>
-              <a:defRPr sz="1000">
-                <a:solidFill>
-                  <a:srgbClr val="94A3B8"/>
-                </a:solidFill>
-                <a:latin typeface="Arial"/>
-              </a:defRPr>
-            </a:pPr>
-            <a:r>
-              <a:t>Aplicación de Clean Architecture (Hexagonal), principios SOLID, inmutabilidad matemática con triggers PostgreSQL y pruebas automatizadas TDD.</a:t>
-            </a:r>
-          </a:p>
-        </p:txBody>
-      </p:sp>
-      <p:sp>
-        <p:nvSpPr>
-          <p:cNvPr id="8" name="Rounded Rectangle 7"/>
+          <a:bodyPr rtlCol="0" anchor="ctr"/>
+          <a:lstStyle/>
+          <a:p>
+            <a:pPr algn="ctr"/>
+          </a:p>
+        </p:txBody>
+      </p:sp>
+      <p:sp>
+        <p:nvSpPr>
+          <p:cNvPr id="5" name="TextBox 4"/>
+          <p:cNvSpPr txBox="1"/>
+          <p:nvPr/>
+        </p:nvSpPr>
+        <p:spPr>
+          <a:xfrm>
+            <a:off x="1051560" y="347472"/>
+            <a:ext cx="10149840" cy="914400"/>
+          </a:xfrm>
+          <a:prstGeom prst="rect">
+            <a:avLst/>
+          </a:prstGeom>
+          <a:noFill/>
+        </p:spPr>
+        <p:txBody>
+          <a:bodyPr wrap="square" lIns="0" tIns="0" rIns="0" bIns="0" anchor="t">
+            <a:spAutoFit/>
+          </a:bodyPr>
+          <a:lstStyle/>
+          <a:p>
+            <a:pPr>
+              <a:spcAft>
+                <a:spcPts val="200"/>
+              </a:spcAft>
+              <a:defRPr sz="1150" b="1">
+                <a:solidFill>
+                  <a:srgbClr val="0284C7"/>
+                </a:solidFill>
+                <a:latin typeface="Calibri"/>
+              </a:defRPr>
+            </a:pPr>
+            <a:r>
+              <a:t>CRITERIO 5 DE RÚBRICA • 4.0 PUNTOS</a:t>
+            </a:r>
+          </a:p>
+          <a:p>
+            <a:pPr>
+              <a:spcAft>
+                <a:spcPts val="200"/>
+              </a:spcAft>
+              <a:defRPr sz="2200" b="1">
+                <a:solidFill>
+                  <a:srgbClr val="0B1F3A"/>
+                </a:solidFill>
+                <a:latin typeface="Calibri"/>
+              </a:defRPr>
+            </a:pPr>
+            <a:r>
+              <a:t>Arquitectura Hexagonal en Java 17 y PostgreSQL Inmutable</a:t>
+            </a:r>
+          </a:p>
+          <a:p>
+            <a:pPr>
+              <a:defRPr sz="1200">
+                <a:solidFill>
+                  <a:srgbClr val="64748B"/>
+                </a:solidFill>
+                <a:latin typeface="Calibri"/>
+              </a:defRPr>
+            </a:pPr>
+            <a:r>
+              <a:t>Clean Architecture con principios SOLID e inmutabilidad garantizada a nivel de motor de base de datos</a:t>
+            </a:r>
+          </a:p>
+        </p:txBody>
+      </p:sp>
+      <p:sp>
+        <p:nvSpPr>
+          <p:cNvPr id="6" name="Rounded Rectangle 5"/>
           <p:cNvSpPr/>
           <p:nvPr/>
         </p:nvSpPr>
         <p:spPr>
           <a:xfrm>
-            <a:off x="8046720" y="1645920"/>
-            <a:ext cx="3413455" cy="3108960"/>
+            <a:off x="731520" y="1417320"/>
+            <a:ext cx="10728655" cy="4160520"/>
           </a:xfrm>
           <a:prstGeom prst="roundRect">
             <a:avLst/>
           </a:prstGeom>
           <a:solidFill>
-            <a:srgbClr val="0F192D"/>
+            <a:srgbClr val="0F172A"/>
           </a:solidFill>
-          <a:ln w="19050">
+          <a:ln w="22860">
             <a:solidFill>
-              <a:srgbClr val="10B981"/>
+              <a:srgbClr val="60A5FA"/>
             </a:solidFill>
           </a:ln>
         </p:spPr>
@@ -3990,57 +3930,57 @@
           </a:fontRef>
         </p:style>
         <p:txBody>
-          <a:bodyPr rtlCol="0" anchor="ctr" wrap="square"/>
-          <a:lstStyle/>
-          <a:p>
-            <a:pPr algn="ctr">
-              <a:defRPr sz="1100" b="1">
-                <a:solidFill>
-                  <a:srgbClr val="10B981"/>
-                </a:solidFill>
-                <a:latin typeface="Arial"/>
-              </a:defRPr>
-            </a:pPr>
-            <a:r>
-              <a:t>3. BASE SÓLIDA PARA LA ETAPA 02</a:t>
-            </a:r>
-          </a:p>
-          <a:p>
-            <a:br/>
-            <a:pPr>
-              <a:defRPr sz="1000">
-                <a:solidFill>
-                  <a:srgbClr val="94A3B8"/>
-                </a:solidFill>
-                <a:latin typeface="Arial"/>
-              </a:defRPr>
-            </a:pPr>
-            <a:r>
-              <a:t>Los cimientos del APF1 dejan la arquitectura preparada para el dashboard gerencial de KPIs (MTTR/MTTD) y reportes en los Sprints 4 al 6.</a:t>
-            </a:r>
-          </a:p>
-        </p:txBody>
-      </p:sp>
-      <p:sp>
-        <p:nvSpPr>
-          <p:cNvPr id="9" name="Rounded Rectangle 8"/>
+          <a:bodyPr rtlCol="0" anchor="ctr"/>
+          <a:lstStyle/>
+          <a:p>
+            <a:pPr algn="ctr"/>
+          </a:p>
+        </p:txBody>
+      </p:sp>
+      <p:pic>
+        <p:nvPicPr>
+          <p:cNvPr id="7" name="Picture 6" descr="figura6_arquitectura_hexagonal.png"/>
+          <p:cNvPicPr>
+            <a:picLocks noChangeAspect="1"/>
+          </p:cNvPicPr>
+          <p:nvPr/>
+        </p:nvPicPr>
+        <p:blipFill>
+          <a:blip r:embed="rId2"/>
+          <a:stretch>
+            <a:fillRect/>
+          </a:stretch>
+        </p:blipFill>
+        <p:spPr>
+          <a:xfrm>
+            <a:off x="1517904" y="1545336"/>
+            <a:ext cx="9144000" cy="3990109"/>
+          </a:xfrm>
+          <a:prstGeom prst="rect">
+            <a:avLst/>
+          </a:prstGeom>
+        </p:spPr>
+      </p:pic>
+      <p:sp>
+        <p:nvSpPr>
+          <p:cNvPr id="8" name="Rounded Rectangle 7"/>
           <p:cNvSpPr/>
           <p:nvPr/>
         </p:nvSpPr>
         <p:spPr>
           <a:xfrm>
-            <a:off x="731520" y="5029200"/>
-            <a:ext cx="10728655" cy="1188720"/>
+            <a:off x="731520" y="5715000"/>
+            <a:ext cx="3447288" cy="777240"/>
           </a:xfrm>
           <a:prstGeom prst="roundRect">
             <a:avLst/>
           </a:prstGeom>
           <a:solidFill>
-            <a:srgbClr val="142341"/>
+            <a:srgbClr val="FFFFFF"/>
           </a:solidFill>
-          <a:ln w="19050">
+          <a:ln w="25400">
             <a:solidFill>
-              <a:srgbClr val="FBBF24"/>
+              <a:srgbClr val="93C5FD"/>
             </a:solidFill>
           </a:ln>
         </p:spPr>
@@ -4059,15 +3999,1920 @@
           </a:fontRef>
         </p:style>
         <p:txBody>
+          <a:bodyPr rtlCol="0" anchor="t" wrap="square" tIns="91440" lIns="164592"/>
+          <a:lstStyle/>
+          <a:p>
+            <a:pPr algn="ctr">
+              <a:defRPr sz="1250" b="1">
+                <a:solidFill>
+                  <a:srgbClr val="0B1F3A"/>
+                </a:solidFill>
+                <a:latin typeface="Calibri"/>
+              </a:defRPr>
+            </a:pPr>
+            <a:r>
+              <a:t>DOMINIO JAVA 17 PURO</a:t>
+            </a:r>
+          </a:p>
+          <a:p>
+            <a:pPr>
+              <a:defRPr sz="1150">
+                <a:solidFill>
+                  <a:srgbClr val="334155"/>
+                </a:solidFill>
+                <a:latin typeface="Calibri"/>
+              </a:defRPr>
+            </a:pPr>
+            <a:r>
+              <a:t>Entidades desacopladas de frameworks. Puertos IIncidenteService y repositorios.</a:t>
+            </a:r>
+          </a:p>
+        </p:txBody>
+      </p:sp>
+      <p:sp>
+        <p:nvSpPr>
+          <p:cNvPr id="9" name="Rounded Rectangle 8"/>
+          <p:cNvSpPr/>
+          <p:nvPr/>
+        </p:nvSpPr>
+        <p:spPr>
+          <a:xfrm>
+            <a:off x="4361688" y="5715000"/>
+            <a:ext cx="3447288" cy="777240"/>
+          </a:xfrm>
+          <a:prstGeom prst="roundRect">
+            <a:avLst/>
+          </a:prstGeom>
+          <a:solidFill>
+            <a:srgbClr val="FFFFFF"/>
+          </a:solidFill>
+          <a:ln w="25400">
+            <a:solidFill>
+              <a:srgbClr val="FCD34D"/>
+            </a:solidFill>
+          </a:ln>
+        </p:spPr>
+        <p:style>
+          <a:lnRef idx="1">
+            <a:schemeClr val="accent1"/>
+          </a:lnRef>
+          <a:fillRef idx="3">
+            <a:schemeClr val="accent1"/>
+          </a:fillRef>
+          <a:effectRef idx="2">
+            <a:schemeClr val="accent1"/>
+          </a:effectRef>
+          <a:fontRef idx="minor">
+            <a:schemeClr val="lt1"/>
+          </a:fontRef>
+        </p:style>
+        <p:txBody>
+          <a:bodyPr rtlCol="0" anchor="t" wrap="square" tIns="91440" lIns="164592"/>
+          <a:lstStyle/>
+          <a:p>
+            <a:pPr algn="ctr">
+              <a:defRPr sz="1250" b="1">
+                <a:solidFill>
+                  <a:srgbClr val="0B1F3A"/>
+                </a:solidFill>
+                <a:latin typeface="Calibri"/>
+              </a:defRPr>
+            </a:pPr>
+            <a:r>
+              <a:t>TRIGGER POSTGRESQL INMUTABLE</a:t>
+            </a:r>
+          </a:p>
+          <a:p>
+            <a:pPr>
+              <a:defRPr sz="1150">
+                <a:solidFill>
+                  <a:srgbClr val="334155"/>
+                </a:solidFill>
+                <a:latin typeface="Calibri"/>
+              </a:defRPr>
+            </a:pPr>
+            <a:r>
+              <a:t>trg_prohibir_mutacion_historial bloquea UPDATE/DELETE con RAISE EXCEPTION.</a:t>
+            </a:r>
+          </a:p>
+        </p:txBody>
+      </p:sp>
+      <p:sp>
+        <p:nvSpPr>
+          <p:cNvPr id="10" name="Rounded Rectangle 9"/>
+          <p:cNvSpPr/>
+          <p:nvPr/>
+        </p:nvSpPr>
+        <p:spPr>
+          <a:xfrm>
+            <a:off x="7991856" y="5715000"/>
+            <a:ext cx="3447288" cy="777240"/>
+          </a:xfrm>
+          <a:prstGeom prst="roundRect">
+            <a:avLst/>
+          </a:prstGeom>
+          <a:solidFill>
+            <a:srgbClr val="FFFFFF"/>
+          </a:solidFill>
+          <a:ln w="25400">
+            <a:solidFill>
+              <a:srgbClr val="6EE7B7"/>
+            </a:solidFill>
+          </a:ln>
+        </p:spPr>
+        <p:style>
+          <a:lnRef idx="1">
+            <a:schemeClr val="accent1"/>
+          </a:lnRef>
+          <a:fillRef idx="3">
+            <a:schemeClr val="accent1"/>
+          </a:fillRef>
+          <a:effectRef idx="2">
+            <a:schemeClr val="accent1"/>
+          </a:effectRef>
+          <a:fontRef idx="minor">
+            <a:schemeClr val="lt1"/>
+          </a:fontRef>
+        </p:style>
+        <p:txBody>
+          <a:bodyPr rtlCol="0" anchor="t" wrap="square" tIns="91440" lIns="164592"/>
+          <a:lstStyle/>
+          <a:p>
+            <a:pPr algn="ctr">
+              <a:defRPr sz="1250" b="1">
+                <a:solidFill>
+                  <a:srgbClr val="0B1F3A"/>
+                </a:solidFill>
+                <a:latin typeface="Calibri"/>
+              </a:defRPr>
+            </a:pPr>
+            <a:r>
+              <a:t>INTEGRIDAD CRIPTOGRÁFICA</a:t>
+            </a:r>
+          </a:p>
+          <a:p>
+            <a:pPr>
+              <a:defRPr sz="1150">
+                <a:solidFill>
+                  <a:srgbClr val="334155"/>
+                </a:solidFill>
+                <a:latin typeface="Calibri"/>
+              </a:defRPr>
+            </a:pPr>
+            <a:r>
+              <a:t>Compilador normativo SFT sella cada archivo con firma digital SHA-256.</a:t>
+            </a:r>
+          </a:p>
+        </p:txBody>
+      </p:sp>
+    </p:spTree>
+  </p:cSld>
+  <p:clrMapOvr>
+    <a:masterClrMapping/>
+  </p:clrMapOvr>
+</p:sld>
+</file>
+
+<file path=ppt/slides/slide11.xml><?xml version="1.0" encoding="utf-8"?>
+<p:sld xmlns:a="http://schemas.openxmlformats.org/drawingml/2006/main" xmlns:p="http://schemas.openxmlformats.org/presentationml/2006/main" xmlns:r="http://schemas.openxmlformats.org/officeDocument/2006/relationships">
+  <p:cSld>
+    <p:spTree>
+      <p:nvGrpSpPr>
+        <p:cNvPr id="1" name=""/>
+        <p:cNvGrpSpPr/>
+        <p:nvPr/>
+      </p:nvGrpSpPr>
+      <p:grpSpPr/>
+      <p:sp>
+        <p:nvSpPr>
+          <p:cNvPr id="2" name="Rectangle 1"/>
+          <p:cNvSpPr/>
+          <p:nvPr/>
+        </p:nvSpPr>
+        <p:spPr>
+          <a:xfrm>
+            <a:off x="0" y="0"/>
+            <a:ext cx="12191695" cy="6858000"/>
+          </a:xfrm>
+          <a:prstGeom prst="rect">
+            <a:avLst/>
+          </a:prstGeom>
+          <a:solidFill>
+            <a:srgbClr val="F8FAFC"/>
+          </a:solidFill>
+          <a:ln>
+            <a:noFill/>
+          </a:ln>
+        </p:spPr>
+        <p:style>
+          <a:lnRef idx="1">
+            <a:schemeClr val="accent1"/>
+          </a:lnRef>
+          <a:fillRef idx="3">
+            <a:schemeClr val="accent1"/>
+          </a:fillRef>
+          <a:effectRef idx="2">
+            <a:schemeClr val="accent1"/>
+          </a:effectRef>
+          <a:fontRef idx="minor">
+            <a:schemeClr val="lt1"/>
+          </a:fontRef>
+        </p:style>
+        <p:txBody>
           <a:bodyPr rtlCol="0" anchor="ctr"/>
           <a:lstStyle/>
           <a:p>
+            <a:pPr algn="ctr"/>
+          </a:p>
+        </p:txBody>
+      </p:sp>
+      <p:sp>
+        <p:nvSpPr>
+          <p:cNvPr id="3" name="Rectangle 2"/>
+          <p:cNvSpPr/>
+          <p:nvPr/>
+        </p:nvSpPr>
+        <p:spPr>
+          <a:xfrm>
+            <a:off x="731520" y="320040"/>
+            <a:ext cx="10728655" cy="987552"/>
+          </a:xfrm>
+          <a:prstGeom prst="rect">
+            <a:avLst/>
+          </a:prstGeom>
+          <a:solidFill>
+            <a:srgbClr val="FFFFFF"/>
+          </a:solidFill>
+          <a:ln w="19050">
+            <a:solidFill>
+              <a:srgbClr val="CBD5E1"/>
+            </a:solidFill>
+          </a:ln>
+        </p:spPr>
+        <p:style>
+          <a:lnRef idx="1">
+            <a:schemeClr val="accent1"/>
+          </a:lnRef>
+          <a:fillRef idx="3">
+            <a:schemeClr val="accent1"/>
+          </a:fillRef>
+          <a:effectRef idx="2">
+            <a:schemeClr val="accent1"/>
+          </a:effectRef>
+          <a:fontRef idx="minor">
+            <a:schemeClr val="lt1"/>
+          </a:fontRef>
+        </p:style>
+        <p:txBody>
+          <a:bodyPr rtlCol="0" anchor="ctr"/>
+          <a:lstStyle/>
+          <a:p>
+            <a:pPr algn="ctr"/>
+          </a:p>
+        </p:txBody>
+      </p:sp>
+      <p:sp>
+        <p:nvSpPr>
+          <p:cNvPr id="4" name="Rectangle 3"/>
+          <p:cNvSpPr/>
+          <p:nvPr/>
+        </p:nvSpPr>
+        <p:spPr>
+          <a:xfrm>
+            <a:off x="731520" y="320040"/>
+            <a:ext cx="128016" cy="987552"/>
+          </a:xfrm>
+          <a:prstGeom prst="rect">
+            <a:avLst/>
+          </a:prstGeom>
+          <a:solidFill>
+            <a:srgbClr val="0284C7"/>
+          </a:solidFill>
+          <a:ln>
+            <a:noFill/>
+          </a:ln>
+        </p:spPr>
+        <p:style>
+          <a:lnRef idx="1">
+            <a:schemeClr val="accent1"/>
+          </a:lnRef>
+          <a:fillRef idx="3">
+            <a:schemeClr val="accent1"/>
+          </a:fillRef>
+          <a:effectRef idx="2">
+            <a:schemeClr val="accent1"/>
+          </a:effectRef>
+          <a:fontRef idx="minor">
+            <a:schemeClr val="lt1"/>
+          </a:fontRef>
+        </p:style>
+        <p:txBody>
+          <a:bodyPr rtlCol="0" anchor="ctr"/>
+          <a:lstStyle/>
+          <a:p>
+            <a:pPr algn="ctr"/>
+          </a:p>
+        </p:txBody>
+      </p:sp>
+      <p:sp>
+        <p:nvSpPr>
+          <p:cNvPr id="5" name="TextBox 4"/>
+          <p:cNvSpPr txBox="1"/>
+          <p:nvPr/>
+        </p:nvSpPr>
+        <p:spPr>
+          <a:xfrm>
+            <a:off x="1051560" y="347472"/>
+            <a:ext cx="10149840" cy="914400"/>
+          </a:xfrm>
+          <a:prstGeom prst="rect">
+            <a:avLst/>
+          </a:prstGeom>
+          <a:noFill/>
+        </p:spPr>
+        <p:txBody>
+          <a:bodyPr wrap="square" lIns="0" tIns="0" rIns="0" bIns="0" anchor="t">
+            <a:spAutoFit/>
+          </a:bodyPr>
+          <a:lstStyle/>
+          <a:p>
+            <a:pPr>
+              <a:spcAft>
+                <a:spcPts val="200"/>
+              </a:spcAft>
+              <a:defRPr sz="1150" b="1">
+                <a:solidFill>
+                  <a:srgbClr val="0284C7"/>
+                </a:solidFill>
+                <a:latin typeface="Calibri"/>
+              </a:defRPr>
+            </a:pPr>
+            <a:r>
+              <a:t>CRITERIO 6 DE RÚBRICA • 2.0 PUNTOS</a:t>
+            </a:r>
+          </a:p>
+          <a:p>
+            <a:pPr>
+              <a:spcAft>
+                <a:spcPts val="200"/>
+              </a:spcAft>
+              <a:defRPr sz="2200" b="1">
+                <a:solidFill>
+                  <a:srgbClr val="0B1F3A"/>
+                </a:solidFill>
+                <a:latin typeface="Calibri"/>
+              </a:defRPr>
+            </a:pPr>
+            <a:r>
+              <a:t>Demostración Práctica en Vivo: Consola NOC Web</a:t>
+            </a:r>
+          </a:p>
+          <a:p>
+            <a:pPr>
+              <a:defRPr sz="1200">
+                <a:solidFill>
+                  <a:srgbClr val="64748B"/>
+                </a:solidFill>
+                <a:latin typeface="Calibri"/>
+              </a:defRPr>
+            </a:pPr>
+            <a:r>
+              <a:t>Verificación en tiempo real de los requerimientos funcionales y telemetría de pagos interoperables</a:t>
+            </a:r>
+          </a:p>
+        </p:txBody>
+      </p:sp>
+      <p:sp>
+        <p:nvSpPr>
+          <p:cNvPr id="6" name="Rounded Rectangle 5"/>
+          <p:cNvSpPr/>
+          <p:nvPr/>
+        </p:nvSpPr>
+        <p:spPr>
+          <a:xfrm>
+            <a:off x="731520" y="1417320"/>
+            <a:ext cx="10728655" cy="4160520"/>
+          </a:xfrm>
+          <a:prstGeom prst="roundRect">
+            <a:avLst/>
+          </a:prstGeom>
+          <a:solidFill>
+            <a:srgbClr val="0F172A"/>
+          </a:solidFill>
+          <a:ln w="22860">
+            <a:solidFill>
+              <a:srgbClr val="38BDF8"/>
+            </a:solidFill>
+          </a:ln>
+        </p:spPr>
+        <p:style>
+          <a:lnRef idx="1">
+            <a:schemeClr val="accent1"/>
+          </a:lnRef>
+          <a:fillRef idx="3">
+            <a:schemeClr val="accent1"/>
+          </a:fillRef>
+          <a:effectRef idx="2">
+            <a:schemeClr val="accent1"/>
+          </a:effectRef>
+          <a:fontRef idx="minor">
+            <a:schemeClr val="lt1"/>
+          </a:fontRef>
+        </p:style>
+        <p:txBody>
+          <a:bodyPr rtlCol="0" anchor="ctr"/>
+          <a:lstStyle/>
+          <a:p>
+            <a:pPr algn="ctr"/>
+          </a:p>
+        </p:txBody>
+      </p:sp>
+      <p:pic>
+        <p:nvPicPr>
+          <p:cNvPr id="7" name="Picture 6" descr="figura7_dashboard_noc_web.png"/>
+          <p:cNvPicPr>
+            <a:picLocks noChangeAspect="1"/>
+          </p:cNvPicPr>
+          <p:nvPr/>
+        </p:nvPicPr>
+        <p:blipFill>
+          <a:blip r:embed="rId2"/>
+          <a:stretch>
+            <a:fillRect/>
+          </a:stretch>
+        </p:blipFill>
+        <p:spPr>
+          <a:xfrm>
+            <a:off x="2523744" y="1490472"/>
+            <a:ext cx="7132320" cy="4011930"/>
+          </a:xfrm>
+          <a:prstGeom prst="rect">
+            <a:avLst/>
+          </a:prstGeom>
+        </p:spPr>
+      </p:pic>
+      <p:sp>
+        <p:nvSpPr>
+          <p:cNvPr id="8" name="Rounded Rectangle 7"/>
+          <p:cNvSpPr/>
+          <p:nvPr/>
+        </p:nvSpPr>
+        <p:spPr>
+          <a:xfrm>
+            <a:off x="731520" y="5715000"/>
+            <a:ext cx="3447288" cy="777240"/>
+          </a:xfrm>
+          <a:prstGeom prst="roundRect">
+            <a:avLst/>
+          </a:prstGeom>
+          <a:solidFill>
+            <a:srgbClr val="FFFFFF"/>
+          </a:solidFill>
+          <a:ln w="25400">
+            <a:solidFill>
+              <a:srgbClr val="93C5FD"/>
+            </a:solidFill>
+          </a:ln>
+        </p:spPr>
+        <p:style>
+          <a:lnRef idx="1">
+            <a:schemeClr val="accent1"/>
+          </a:lnRef>
+          <a:fillRef idx="3">
+            <a:schemeClr val="accent1"/>
+          </a:fillRef>
+          <a:effectRef idx="2">
+            <a:schemeClr val="accent1"/>
+          </a:effectRef>
+          <a:fontRef idx="minor">
+            <a:schemeClr val="lt1"/>
+          </a:fontRef>
+        </p:style>
+        <p:txBody>
+          <a:bodyPr rtlCol="0" anchor="t" wrap="square" tIns="91440" lIns="164592"/>
+          <a:lstStyle/>
+          <a:p>
             <a:pPr algn="ctr">
-              <a:defRPr sz="1600" b="1">
-                <a:solidFill>
-                  <a:srgbClr val="FBBF24"/>
-                </a:solidFill>
-                <a:latin typeface="Arial"/>
+              <a:defRPr sz="1250" b="1">
+                <a:solidFill>
+                  <a:srgbClr val="0B1F3A"/>
+                </a:solidFill>
+                <a:latin typeface="Calibri"/>
+              </a:defRPr>
+            </a:pPr>
+            <a:r>
+              <a:t>1. SESIÓN AD CORPORATIVA</a:t>
+            </a:r>
+          </a:p>
+          <a:p>
+            <a:pPr>
+              <a:defRPr sz="1150">
+                <a:solidFill>
+                  <a:srgbClr val="334155"/>
+                </a:solidFill>
+                <a:latin typeface="Calibri"/>
+              </a:defRPr>
+            </a:pPr>
+            <a:r>
+              <a:t>Login único con dominio AD\frank.vargas (Rol NOC_LEAD).</a:t>
+            </a:r>
+          </a:p>
+        </p:txBody>
+      </p:sp>
+      <p:sp>
+        <p:nvSpPr>
+          <p:cNvPr id="9" name="Rounded Rectangle 8"/>
+          <p:cNvSpPr/>
+          <p:nvPr/>
+        </p:nvSpPr>
+        <p:spPr>
+          <a:xfrm>
+            <a:off x="4361688" y="5715000"/>
+            <a:ext cx="3447288" cy="777240"/>
+          </a:xfrm>
+          <a:prstGeom prst="roundRect">
+            <a:avLst/>
+          </a:prstGeom>
+          <a:solidFill>
+            <a:srgbClr val="FFFFFF"/>
+          </a:solidFill>
+          <a:ln w="25400">
+            <a:solidFill>
+              <a:srgbClr val="FCD34D"/>
+            </a:solidFill>
+          </a:ln>
+        </p:spPr>
+        <p:style>
+          <a:lnRef idx="1">
+            <a:schemeClr val="accent1"/>
+          </a:lnRef>
+          <a:fillRef idx="3">
+            <a:schemeClr val="accent1"/>
+          </a:fillRef>
+          <a:effectRef idx="2">
+            <a:schemeClr val="accent1"/>
+          </a:effectRef>
+          <a:fontRef idx="minor">
+            <a:schemeClr val="lt1"/>
+          </a:fontRef>
+        </p:style>
+        <p:txBody>
+          <a:bodyPr rtlCol="0" anchor="t" wrap="square" tIns="91440" lIns="164592"/>
+          <a:lstStyle/>
+          <a:p>
+            <a:pPr algn="ctr">
+              <a:defRPr sz="1250" b="1">
+                <a:solidFill>
+                  <a:srgbClr val="0B1F3A"/>
+                </a:solidFill>
+                <a:latin typeface="Calibri"/>
+              </a:defRPr>
+            </a:pPr>
+            <a:r>
+              <a:t>2. TELEMETRÍA EN VIVO</a:t>
+            </a:r>
+          </a:p>
+          <a:p>
+            <a:pPr>
+              <a:defRPr sz="1150">
+                <a:solidFill>
+                  <a:srgbClr val="334155"/>
+                </a:solidFill>
+                <a:latin typeface="Calibri"/>
+              </a:defRPr>
+            </a:pPr>
+            <a:r>
+              <a:t>Sondeo de Yape, Plim, Tunki y CCE con semáforos activos.</a:t>
+            </a:r>
+          </a:p>
+        </p:txBody>
+      </p:sp>
+      <p:sp>
+        <p:nvSpPr>
+          <p:cNvPr id="10" name="Rounded Rectangle 9"/>
+          <p:cNvSpPr/>
+          <p:nvPr/>
+        </p:nvSpPr>
+        <p:spPr>
+          <a:xfrm>
+            <a:off x="7991856" y="5715000"/>
+            <a:ext cx="3447288" cy="777240"/>
+          </a:xfrm>
+          <a:prstGeom prst="roundRect">
+            <a:avLst/>
+          </a:prstGeom>
+          <a:solidFill>
+            <a:srgbClr val="FFFFFF"/>
+          </a:solidFill>
+          <a:ln w="25400">
+            <a:solidFill>
+              <a:srgbClr val="6EE7B7"/>
+            </a:solidFill>
+          </a:ln>
+        </p:spPr>
+        <p:style>
+          <a:lnRef idx="1">
+            <a:schemeClr val="accent1"/>
+          </a:lnRef>
+          <a:fillRef idx="3">
+            <a:schemeClr val="accent1"/>
+          </a:fillRef>
+          <a:effectRef idx="2">
+            <a:schemeClr val="accent1"/>
+          </a:effectRef>
+          <a:fontRef idx="minor">
+            <a:schemeClr val="lt1"/>
+          </a:fontRef>
+        </p:style>
+        <p:txBody>
+          <a:bodyPr rtlCol="0" anchor="t" wrap="square" tIns="91440" lIns="164592"/>
+          <a:lstStyle/>
+          <a:p>
+            <a:pPr algn="ctr">
+              <a:defRPr sz="1250" b="1">
+                <a:solidFill>
+                  <a:srgbClr val="0B1F3A"/>
+                </a:solidFill>
+                <a:latin typeface="Calibri"/>
+              </a:defRPr>
+            </a:pPr>
+            <a:r>
+              <a:t>3. SIMULACIÓN &amp; REPORTE SFT</a:t>
+            </a:r>
+          </a:p>
+          <a:p>
+            <a:pPr>
+              <a:defRPr sz="1150">
+                <a:solidFill>
+                  <a:srgbClr val="334155"/>
+                </a:solidFill>
+                <a:latin typeface="Calibri"/>
+              </a:defRPr>
+            </a:pPr>
+            <a:r>
+              <a:t>Inyección de caída 503 y descarga de archivo normativo SHA-256.</a:t>
+            </a:r>
+          </a:p>
+        </p:txBody>
+      </p:sp>
+    </p:spTree>
+  </p:cSld>
+  <p:clrMapOvr>
+    <a:masterClrMapping/>
+  </p:clrMapOvr>
+</p:sld>
+</file>
+
+<file path=ppt/slides/slide12.xml><?xml version="1.0" encoding="utf-8"?>
+<p:sld xmlns:a="http://schemas.openxmlformats.org/drawingml/2006/main" xmlns:p="http://schemas.openxmlformats.org/presentationml/2006/main" xmlns:r="http://schemas.openxmlformats.org/officeDocument/2006/relationships">
+  <p:cSld>
+    <p:spTree>
+      <p:nvGrpSpPr>
+        <p:cNvPr id="1" name=""/>
+        <p:cNvGrpSpPr/>
+        <p:nvPr/>
+      </p:nvGrpSpPr>
+      <p:grpSpPr/>
+      <p:sp>
+        <p:nvSpPr>
+          <p:cNvPr id="2" name="Rectangle 1"/>
+          <p:cNvSpPr/>
+          <p:nvPr/>
+        </p:nvSpPr>
+        <p:spPr>
+          <a:xfrm>
+            <a:off x="0" y="0"/>
+            <a:ext cx="12191695" cy="6858000"/>
+          </a:xfrm>
+          <a:prstGeom prst="rect">
+            <a:avLst/>
+          </a:prstGeom>
+          <a:solidFill>
+            <a:srgbClr val="F8FAFC"/>
+          </a:solidFill>
+          <a:ln>
+            <a:noFill/>
+          </a:ln>
+        </p:spPr>
+        <p:style>
+          <a:lnRef idx="1">
+            <a:schemeClr val="accent1"/>
+          </a:lnRef>
+          <a:fillRef idx="3">
+            <a:schemeClr val="accent1"/>
+          </a:fillRef>
+          <a:effectRef idx="2">
+            <a:schemeClr val="accent1"/>
+          </a:effectRef>
+          <a:fontRef idx="minor">
+            <a:schemeClr val="lt1"/>
+          </a:fontRef>
+        </p:style>
+        <p:txBody>
+          <a:bodyPr rtlCol="0" anchor="ctr"/>
+          <a:lstStyle/>
+          <a:p>
+            <a:pPr algn="ctr"/>
+          </a:p>
+        </p:txBody>
+      </p:sp>
+      <p:sp>
+        <p:nvSpPr>
+          <p:cNvPr id="3" name="Rectangle 2"/>
+          <p:cNvSpPr/>
+          <p:nvPr/>
+        </p:nvSpPr>
+        <p:spPr>
+          <a:xfrm>
+            <a:off x="731520" y="320040"/>
+            <a:ext cx="10728655" cy="987552"/>
+          </a:xfrm>
+          <a:prstGeom prst="rect">
+            <a:avLst/>
+          </a:prstGeom>
+          <a:solidFill>
+            <a:srgbClr val="FFFFFF"/>
+          </a:solidFill>
+          <a:ln w="19050">
+            <a:solidFill>
+              <a:srgbClr val="CBD5E1"/>
+            </a:solidFill>
+          </a:ln>
+        </p:spPr>
+        <p:style>
+          <a:lnRef idx="1">
+            <a:schemeClr val="accent1"/>
+          </a:lnRef>
+          <a:fillRef idx="3">
+            <a:schemeClr val="accent1"/>
+          </a:fillRef>
+          <a:effectRef idx="2">
+            <a:schemeClr val="accent1"/>
+          </a:effectRef>
+          <a:fontRef idx="minor">
+            <a:schemeClr val="lt1"/>
+          </a:fontRef>
+        </p:style>
+        <p:txBody>
+          <a:bodyPr rtlCol="0" anchor="ctr"/>
+          <a:lstStyle/>
+          <a:p>
+            <a:pPr algn="ctr"/>
+          </a:p>
+        </p:txBody>
+      </p:sp>
+      <p:sp>
+        <p:nvSpPr>
+          <p:cNvPr id="4" name="Rectangle 3"/>
+          <p:cNvSpPr/>
+          <p:nvPr/>
+        </p:nvSpPr>
+        <p:spPr>
+          <a:xfrm>
+            <a:off x="731520" y="320040"/>
+            <a:ext cx="128016" cy="987552"/>
+          </a:xfrm>
+          <a:prstGeom prst="rect">
+            <a:avLst/>
+          </a:prstGeom>
+          <a:solidFill>
+            <a:srgbClr val="0284C7"/>
+          </a:solidFill>
+          <a:ln>
+            <a:noFill/>
+          </a:ln>
+        </p:spPr>
+        <p:style>
+          <a:lnRef idx="1">
+            <a:schemeClr val="accent1"/>
+          </a:lnRef>
+          <a:fillRef idx="3">
+            <a:schemeClr val="accent1"/>
+          </a:fillRef>
+          <a:effectRef idx="2">
+            <a:schemeClr val="accent1"/>
+          </a:effectRef>
+          <a:fontRef idx="minor">
+            <a:schemeClr val="lt1"/>
+          </a:fontRef>
+        </p:style>
+        <p:txBody>
+          <a:bodyPr rtlCol="0" anchor="ctr"/>
+          <a:lstStyle/>
+          <a:p>
+            <a:pPr algn="ctr"/>
+          </a:p>
+        </p:txBody>
+      </p:sp>
+      <p:sp>
+        <p:nvSpPr>
+          <p:cNvPr id="5" name="TextBox 4"/>
+          <p:cNvSpPr txBox="1"/>
+          <p:nvPr/>
+        </p:nvSpPr>
+        <p:spPr>
+          <a:xfrm>
+            <a:off x="1051560" y="347472"/>
+            <a:ext cx="10149840" cy="914400"/>
+          </a:xfrm>
+          <a:prstGeom prst="rect">
+            <a:avLst/>
+          </a:prstGeom>
+          <a:noFill/>
+        </p:spPr>
+        <p:txBody>
+          <a:bodyPr wrap="square" lIns="0" tIns="0" rIns="0" bIns="0" anchor="t">
+            <a:spAutoFit/>
+          </a:bodyPr>
+          <a:lstStyle/>
+          <a:p>
+            <a:pPr>
+              <a:spcAft>
+                <a:spcPts val="200"/>
+              </a:spcAft>
+              <a:defRPr sz="1150" b="1">
+                <a:solidFill>
+                  <a:srgbClr val="0284C7"/>
+                </a:solidFill>
+                <a:latin typeface="Calibri"/>
+              </a:defRPr>
+            </a:pPr>
+            <a:r>
+              <a:t>CRITERIO 6 DE RÚBRICA • 2.0 PUNTOS</a:t>
+            </a:r>
+          </a:p>
+          <a:p>
+            <a:pPr>
+              <a:spcAft>
+                <a:spcPts val="200"/>
+              </a:spcAft>
+              <a:defRPr sz="2200" b="1">
+                <a:solidFill>
+                  <a:srgbClr val="0B1F3A"/>
+                </a:solidFill>
+                <a:latin typeface="Calibri"/>
+              </a:defRPr>
+            </a:pPr>
+            <a:r>
+              <a:t>Suite de Pruebas Automatizadas Backend (JUnit 5 &amp; Mockito)</a:t>
+            </a:r>
+          </a:p>
+          <a:p>
+            <a:pPr>
+              <a:defRPr sz="1200">
+                <a:solidFill>
+                  <a:srgbClr val="64748B"/>
+                </a:solidFill>
+                <a:latin typeface="Calibri"/>
+              </a:defRPr>
+            </a:pPr>
+            <a:r>
+              <a:t>Validación rigurosa de lógica de dominio, reglas de negocio y compilador SFT con 100% de éxito</a:t>
+            </a:r>
+          </a:p>
+        </p:txBody>
+      </p:sp>
+      <p:sp>
+        <p:nvSpPr>
+          <p:cNvPr id="6" name="Rounded Rectangle 5"/>
+          <p:cNvSpPr/>
+          <p:nvPr/>
+        </p:nvSpPr>
+        <p:spPr>
+          <a:xfrm>
+            <a:off x="731520" y="1508760"/>
+            <a:ext cx="5212080" cy="4892040"/>
+          </a:xfrm>
+          <a:prstGeom prst="roundRect">
+            <a:avLst/>
+          </a:prstGeom>
+          <a:solidFill>
+            <a:srgbClr val="FFFFFF"/>
+          </a:solidFill>
+          <a:ln w="25400">
+            <a:solidFill>
+              <a:srgbClr val="93C5FD"/>
+            </a:solidFill>
+          </a:ln>
+        </p:spPr>
+        <p:style>
+          <a:lnRef idx="1">
+            <a:schemeClr val="accent1"/>
+          </a:lnRef>
+          <a:fillRef idx="3">
+            <a:schemeClr val="accent1"/>
+          </a:fillRef>
+          <a:effectRef idx="2">
+            <a:schemeClr val="accent1"/>
+          </a:effectRef>
+          <a:fontRef idx="minor">
+            <a:schemeClr val="lt1"/>
+          </a:fontRef>
+        </p:style>
+        <p:txBody>
+          <a:bodyPr rtlCol="0" anchor="t" wrap="square" tIns="182880" lIns="228600"/>
+          <a:lstStyle/>
+          <a:p>
+            <a:pPr algn="ctr">
+              <a:spcAft>
+                <a:spcPts val="800"/>
+              </a:spcAft>
+              <a:defRPr sz="1500" b="1">
+                <a:solidFill>
+                  <a:srgbClr val="0284C7"/>
+                </a:solidFill>
+                <a:latin typeface="Calibri"/>
+              </a:defRPr>
+            </a:pPr>
+            <a:r>
+              <a:t>🧪 8 PRUEBAS UNITARIAS DE INTEGRACIÓN</a:t>
+            </a:r>
+          </a:p>
+          <a:p>
+            <a:pPr>
+              <a:defRPr sz="1200" b="1">
+                <a:solidFill>
+                  <a:srgbClr val="0F172A"/>
+                </a:solidFill>
+                <a:latin typeface="Calibri"/>
+              </a:defRPr>
+            </a:pPr>
+            <a:r>
+              <a:t>✓ 1. IncidenteServiceTest.crearIncidente()</a:t>
+            </a:r>
+          </a:p>
+          <a:p>
+            <a:pPr>
+              <a:spcAft>
+                <a:spcPts val="200"/>
+              </a:spcAft>
+              <a:defRPr sz="1100">
+                <a:solidFill>
+                  <a:srgbClr val="334155"/>
+                </a:solidFill>
+                <a:latin typeface="Calibri"/>
+              </a:defRPr>
+            </a:pPr>
+            <a:r>
+              <a:t>   Valida creación de incidente y regla RN-01.</a:t>
+            </a:r>
+          </a:p>
+          <a:p>
+            <a:pPr>
+              <a:defRPr sz="1200" b="1">
+                <a:solidFill>
+                  <a:srgbClr val="0F172A"/>
+                </a:solidFill>
+                <a:latin typeface="Calibri"/>
+              </a:defRPr>
+            </a:pPr>
+            <a:r>
+              <a:t>✓ 2. IncidenteServiceTest.actualizarEstado()</a:t>
+            </a:r>
+          </a:p>
+          <a:p>
+            <a:pPr>
+              <a:spcAft>
+                <a:spcPts val="200"/>
+              </a:spcAft>
+              <a:defRPr sz="1100">
+                <a:solidFill>
+                  <a:srgbClr val="334155"/>
+                </a:solidFill>
+                <a:latin typeface="Calibri"/>
+              </a:defRPr>
+            </a:pPr>
+            <a:r>
+              <a:t>   Valida transiciones de la máquina de estados.</a:t>
+            </a:r>
+          </a:p>
+          <a:p>
+            <a:pPr>
+              <a:defRPr sz="1200" b="1">
+                <a:solidFill>
+                  <a:srgbClr val="0F172A"/>
+                </a:solidFill>
+                <a:latin typeface="Calibri"/>
+              </a:defRPr>
+            </a:pPr>
+            <a:r>
+              <a:t>✓ 3. IncidenteValidationTest.validarCampos()</a:t>
+            </a:r>
+          </a:p>
+          <a:p>
+            <a:pPr>
+              <a:spcAft>
+                <a:spcPts val="200"/>
+              </a:spcAft>
+              <a:defRPr sz="1100">
+                <a:solidFill>
+                  <a:srgbClr val="334155"/>
+                </a:solidFill>
+                <a:latin typeface="Calibri"/>
+              </a:defRPr>
+            </a:pPr>
+            <a:r>
+              <a:t>   Valida que descripción y severidad no sean nulos.</a:t>
+            </a:r>
+          </a:p>
+          <a:p>
+            <a:pPr>
+              <a:defRPr sz="1200" b="1">
+                <a:solidFill>
+                  <a:srgbClr val="0F172A"/>
+                </a:solidFill>
+                <a:latin typeface="Calibri"/>
+              </a:defRPr>
+            </a:pPr>
+            <a:r>
+              <a:t>✓ 4. SftCompilerTest.compilarArchivoSft()</a:t>
+            </a:r>
+          </a:p>
+          <a:p>
+            <a:pPr>
+              <a:spcAft>
+                <a:spcPts val="200"/>
+              </a:spcAft>
+              <a:defRPr sz="1100">
+                <a:solidFill>
+                  <a:srgbClr val="334155"/>
+                </a:solidFill>
+                <a:latin typeface="Calibri"/>
+              </a:defRPr>
+            </a:pPr>
+            <a:r>
+              <a:t>   Verifica estructura cabecera 01, detalle 02, pie 03.</a:t>
+            </a:r>
+          </a:p>
+          <a:p>
+            <a:pPr>
+              <a:defRPr sz="1200" b="1">
+                <a:solidFill>
+                  <a:srgbClr val="0F172A"/>
+                </a:solidFill>
+                <a:latin typeface="Calibri"/>
+              </a:defRPr>
+            </a:pPr>
+            <a:r>
+              <a:t>✓ 5. SftCompilerTest.verificarHashSha256()</a:t>
+            </a:r>
+          </a:p>
+          <a:p>
+            <a:pPr>
+              <a:spcAft>
+                <a:spcPts val="200"/>
+              </a:spcAft>
+              <a:defRPr sz="1100">
+                <a:solidFill>
+                  <a:srgbClr val="334155"/>
+                </a:solidFill>
+                <a:latin typeface="Calibri"/>
+              </a:defRPr>
+            </a:pPr>
+            <a:r>
+              <a:t>   Comprueba digest de 64 hex en el pie del archivo.</a:t>
+            </a:r>
+          </a:p>
+          <a:p>
+            <a:pPr>
+              <a:defRPr sz="1200" b="1">
+                <a:solidFill>
+                  <a:srgbClr val="0F172A"/>
+                </a:solidFill>
+                <a:latin typeface="Calibri"/>
+              </a:defRPr>
+            </a:pPr>
+            <a:r>
+              <a:t>✓ 6. TelemetryWorkerTest.procesarFalla()</a:t>
+            </a:r>
+          </a:p>
+          <a:p>
+            <a:pPr>
+              <a:spcAft>
+                <a:spcPts val="200"/>
+              </a:spcAft>
+              <a:defRPr sz="1100">
+                <a:solidFill>
+                  <a:srgbClr val="334155"/>
+                </a:solidFill>
+                <a:latin typeface="Calibri"/>
+              </a:defRPr>
+            </a:pPr>
+            <a:r>
+              <a:t>   Simula error 503 y auto-generación de ticket.</a:t>
+            </a:r>
+          </a:p>
+          <a:p>
+            <a:pPr>
+              <a:defRPr sz="1200" b="1">
+                <a:solidFill>
+                  <a:srgbClr val="0F172A"/>
+                </a:solidFill>
+                <a:latin typeface="Calibri"/>
+              </a:defRPr>
+            </a:pPr>
+            <a:r>
+              <a:t>✓ 7. TelemetryWorkerTest.sondeoExitoso()</a:t>
+            </a:r>
+          </a:p>
+          <a:p>
+            <a:pPr>
+              <a:spcAft>
+                <a:spcPts val="200"/>
+              </a:spcAft>
+              <a:defRPr sz="1100">
+                <a:solidFill>
+                  <a:srgbClr val="334155"/>
+                </a:solidFill>
+                <a:latin typeface="Calibri"/>
+              </a:defRPr>
+            </a:pPr>
+            <a:r>
+              <a:t>   Verifica actualización de latencia sin crear ticket.</a:t>
+            </a:r>
+          </a:p>
+          <a:p>
+            <a:pPr>
+              <a:defRPr sz="1200" b="1">
+                <a:solidFill>
+                  <a:srgbClr val="0F172A"/>
+                </a:solidFill>
+                <a:latin typeface="Calibri"/>
+              </a:defRPr>
+            </a:pPr>
+            <a:r>
+              <a:t>✓ 8. SecurityAuthTest.validarSesionAD()</a:t>
+            </a:r>
+          </a:p>
+          <a:p>
+            <a:pPr>
+              <a:spcAft>
+                <a:spcPts val="200"/>
+              </a:spcAft>
+              <a:defRPr sz="1100">
+                <a:solidFill>
+                  <a:srgbClr val="334155"/>
+                </a:solidFill>
+                <a:latin typeface="Calibri"/>
+              </a:defRPr>
+            </a:pPr>
+            <a:r>
+              <a:t>   Valida autenticación única corporativa LDAP.</a:t>
+            </a:r>
+          </a:p>
+        </p:txBody>
+      </p:sp>
+      <p:sp>
+        <p:nvSpPr>
+          <p:cNvPr id="7" name="Rounded Rectangle 6"/>
+          <p:cNvSpPr/>
+          <p:nvPr/>
+        </p:nvSpPr>
+        <p:spPr>
+          <a:xfrm>
+            <a:off x="6217920" y="1508760"/>
+            <a:ext cx="5242255" cy="4892040"/>
+          </a:xfrm>
+          <a:prstGeom prst="roundRect">
+            <a:avLst/>
+          </a:prstGeom>
+          <a:solidFill>
+            <a:srgbClr val="FFFFFF"/>
+          </a:solidFill>
+          <a:ln w="25400">
+            <a:solidFill>
+              <a:srgbClr val="6EE7B7"/>
+            </a:solidFill>
+          </a:ln>
+        </p:spPr>
+        <p:style>
+          <a:lnRef idx="1">
+            <a:schemeClr val="accent1"/>
+          </a:lnRef>
+          <a:fillRef idx="3">
+            <a:schemeClr val="accent1"/>
+          </a:fillRef>
+          <a:effectRef idx="2">
+            <a:schemeClr val="accent1"/>
+          </a:effectRef>
+          <a:fontRef idx="minor">
+            <a:schemeClr val="lt1"/>
+          </a:fontRef>
+        </p:style>
+        <p:txBody>
+          <a:bodyPr rtlCol="0" anchor="t" wrap="square" tIns="182880" lIns="228600"/>
+          <a:lstStyle/>
+          <a:p>
+            <a:pPr algn="ctr">
+              <a:spcAft>
+                <a:spcPts val="800"/>
+              </a:spcAft>
+              <a:defRPr sz="1500" b="1">
+                <a:solidFill>
+                  <a:srgbClr val="059669"/>
+                </a:solidFill>
+                <a:latin typeface="Calibri"/>
+              </a:defRPr>
+            </a:pPr>
+            <a:r>
+              <a:t>📊 MÉTRICAS DE CALIDAD Y EJECUCIÓN MAVEN</a:t>
+            </a:r>
+          </a:p>
+          <a:p>
+            <a:pPr>
+              <a:spcAft>
+                <a:spcPts val="200"/>
+              </a:spcAft>
+              <a:defRPr sz="1300" b="1">
+                <a:solidFill>
+                  <a:srgbClr val="0B1F3A"/>
+                </a:solidFill>
+                <a:latin typeface="Calibri"/>
+              </a:defRPr>
+            </a:pPr>
+            <a:r>
+              <a:t>• Resultado del Build Oficial Maven:</a:t>
+            </a:r>
+          </a:p>
+          <a:p>
+            <a:pPr>
+              <a:spcAft>
+                <a:spcPts val="600"/>
+              </a:spcAft>
+              <a:defRPr sz="1200">
+                <a:solidFill>
+                  <a:srgbClr val="334155"/>
+                </a:solidFill>
+                <a:latin typeface="Calibri"/>
+              </a:defRPr>
+            </a:pPr>
+            <a:r>
+              <a:t>[INFO] BUILD SUCCESS</a:t>
+            </a:r>
+            <a:br/>
+            <a:r>
+              <a:t>[INFO] Total time: 4.823 s</a:t>
+            </a:r>
+            <a:br/>
+            <a:r>
+              <a:t>[INFO] Tests run: 8, Failures: 0, Errors: 0, Skipped: 0</a:t>
+            </a:r>
+          </a:p>
+          <a:p>
+            <a:pPr>
+              <a:spcAft>
+                <a:spcPts val="200"/>
+              </a:spcAft>
+              <a:defRPr sz="1300" b="1">
+                <a:solidFill>
+                  <a:srgbClr val="0B1F3A"/>
+                </a:solidFill>
+                <a:latin typeface="Calibri"/>
+              </a:defRPr>
+            </a:pPr>
+            <a:r>
+              <a:t>• Cobertura de Código en Capa de Dominio:</a:t>
+            </a:r>
+          </a:p>
+          <a:p>
+            <a:pPr>
+              <a:spcAft>
+                <a:spcPts val="600"/>
+              </a:spcAft>
+              <a:defRPr sz="1200">
+                <a:solidFill>
+                  <a:srgbClr val="334155"/>
+                </a:solidFill>
+                <a:latin typeface="Calibri"/>
+              </a:defRPr>
+            </a:pPr>
+            <a:r>
+              <a:t>&gt; 85% de cobertura de ramas y líneas evaluado con JaCoCo.</a:t>
+            </a:r>
+          </a:p>
+          <a:p>
+            <a:pPr>
+              <a:spcAft>
+                <a:spcPts val="200"/>
+              </a:spcAft>
+              <a:defRPr sz="1300" b="1">
+                <a:solidFill>
+                  <a:srgbClr val="0B1F3A"/>
+                </a:solidFill>
+                <a:latin typeface="Calibri"/>
+              </a:defRPr>
+            </a:pPr>
+            <a:r>
+              <a:t>• Aislamiento de Capas:</a:t>
+            </a:r>
+          </a:p>
+          <a:p>
+            <a:pPr>
+              <a:spcAft>
+                <a:spcPts val="600"/>
+              </a:spcAft>
+              <a:defRPr sz="1200">
+                <a:solidFill>
+                  <a:srgbClr val="334155"/>
+                </a:solidFill>
+                <a:latin typeface="Calibri"/>
+              </a:defRPr>
+            </a:pPr>
+            <a:r>
+              <a:t>Los tests unitarios utilizan mocks de Mockito sobre los puertos, garantizando que el dominio Java 17 no requiera base de datos levantada para ejecutarse.</a:t>
+            </a:r>
+          </a:p>
+          <a:p>
+            <a:pPr>
+              <a:spcAft>
+                <a:spcPts val="200"/>
+              </a:spcAft>
+              <a:defRPr sz="1300" b="1">
+                <a:solidFill>
+                  <a:srgbClr val="0B1F3A"/>
+                </a:solidFill>
+                <a:latin typeface="Calibri"/>
+              </a:defRPr>
+            </a:pPr>
+            <a:r>
+              <a:t>• Integración Continua (CI):</a:t>
+            </a:r>
+          </a:p>
+          <a:p>
+            <a:pPr>
+              <a:spcAft>
+                <a:spcPts val="600"/>
+              </a:spcAft>
+              <a:defRPr sz="1200">
+                <a:solidFill>
+                  <a:srgbClr val="334155"/>
+                </a:solidFill>
+                <a:latin typeface="Calibri"/>
+              </a:defRPr>
+            </a:pPr>
+            <a:r>
+              <a:t>La suite de pruebas corre automáticamente en cada commit a la rama main de GitHub.</a:t>
+            </a:r>
+          </a:p>
+        </p:txBody>
+      </p:sp>
+    </p:spTree>
+  </p:cSld>
+  <p:clrMapOvr>
+    <a:masterClrMapping/>
+  </p:clrMapOvr>
+</p:sld>
+</file>
+
+<file path=ppt/slides/slide13.xml><?xml version="1.0" encoding="utf-8"?>
+<p:sld xmlns:a="http://schemas.openxmlformats.org/drawingml/2006/main" xmlns:p="http://schemas.openxmlformats.org/presentationml/2006/main" xmlns:r="http://schemas.openxmlformats.org/officeDocument/2006/relationships">
+  <p:cSld>
+    <p:spTree>
+      <p:nvGrpSpPr>
+        <p:cNvPr id="1" name=""/>
+        <p:cNvGrpSpPr/>
+        <p:nvPr/>
+      </p:nvGrpSpPr>
+      <p:grpSpPr/>
+      <p:sp>
+        <p:nvSpPr>
+          <p:cNvPr id="2" name="Rectangle 1"/>
+          <p:cNvSpPr/>
+          <p:nvPr/>
+        </p:nvSpPr>
+        <p:spPr>
+          <a:xfrm>
+            <a:off x="0" y="0"/>
+            <a:ext cx="12191695" cy="6858000"/>
+          </a:xfrm>
+          <a:prstGeom prst="rect">
+            <a:avLst/>
+          </a:prstGeom>
+          <a:solidFill>
+            <a:srgbClr val="F8FAFC"/>
+          </a:solidFill>
+          <a:ln>
+            <a:noFill/>
+          </a:ln>
+        </p:spPr>
+        <p:style>
+          <a:lnRef idx="1">
+            <a:schemeClr val="accent1"/>
+          </a:lnRef>
+          <a:fillRef idx="3">
+            <a:schemeClr val="accent1"/>
+          </a:fillRef>
+          <a:effectRef idx="2">
+            <a:schemeClr val="accent1"/>
+          </a:effectRef>
+          <a:fontRef idx="minor">
+            <a:schemeClr val="lt1"/>
+          </a:fontRef>
+        </p:style>
+        <p:txBody>
+          <a:bodyPr rtlCol="0" anchor="ctr"/>
+          <a:lstStyle/>
+          <a:p>
+            <a:pPr algn="ctr"/>
+          </a:p>
+        </p:txBody>
+      </p:sp>
+      <p:sp>
+        <p:nvSpPr>
+          <p:cNvPr id="3" name="Rectangle 2"/>
+          <p:cNvSpPr/>
+          <p:nvPr/>
+        </p:nvSpPr>
+        <p:spPr>
+          <a:xfrm>
+            <a:off x="731520" y="320040"/>
+            <a:ext cx="10728655" cy="987552"/>
+          </a:xfrm>
+          <a:prstGeom prst="rect">
+            <a:avLst/>
+          </a:prstGeom>
+          <a:solidFill>
+            <a:srgbClr val="FFFFFF"/>
+          </a:solidFill>
+          <a:ln w="19050">
+            <a:solidFill>
+              <a:srgbClr val="CBD5E1"/>
+            </a:solidFill>
+          </a:ln>
+        </p:spPr>
+        <p:style>
+          <a:lnRef idx="1">
+            <a:schemeClr val="accent1"/>
+          </a:lnRef>
+          <a:fillRef idx="3">
+            <a:schemeClr val="accent1"/>
+          </a:fillRef>
+          <a:effectRef idx="2">
+            <a:schemeClr val="accent1"/>
+          </a:effectRef>
+          <a:fontRef idx="minor">
+            <a:schemeClr val="lt1"/>
+          </a:fontRef>
+        </p:style>
+        <p:txBody>
+          <a:bodyPr rtlCol="0" anchor="ctr"/>
+          <a:lstStyle/>
+          <a:p>
+            <a:pPr algn="ctr"/>
+          </a:p>
+        </p:txBody>
+      </p:sp>
+      <p:sp>
+        <p:nvSpPr>
+          <p:cNvPr id="4" name="Rectangle 3"/>
+          <p:cNvSpPr/>
+          <p:nvPr/>
+        </p:nvSpPr>
+        <p:spPr>
+          <a:xfrm>
+            <a:off x="731520" y="320040"/>
+            <a:ext cx="128016" cy="987552"/>
+          </a:xfrm>
+          <a:prstGeom prst="rect">
+            <a:avLst/>
+          </a:prstGeom>
+          <a:solidFill>
+            <a:srgbClr val="0284C7"/>
+          </a:solidFill>
+          <a:ln>
+            <a:noFill/>
+          </a:ln>
+        </p:spPr>
+        <p:style>
+          <a:lnRef idx="1">
+            <a:schemeClr val="accent1"/>
+          </a:lnRef>
+          <a:fillRef idx="3">
+            <a:schemeClr val="accent1"/>
+          </a:fillRef>
+          <a:effectRef idx="2">
+            <a:schemeClr val="accent1"/>
+          </a:effectRef>
+          <a:fontRef idx="minor">
+            <a:schemeClr val="lt1"/>
+          </a:fontRef>
+        </p:style>
+        <p:txBody>
+          <a:bodyPr rtlCol="0" anchor="ctr"/>
+          <a:lstStyle/>
+          <a:p>
+            <a:pPr algn="ctr"/>
+          </a:p>
+        </p:txBody>
+      </p:sp>
+      <p:sp>
+        <p:nvSpPr>
+          <p:cNvPr id="5" name="TextBox 4"/>
+          <p:cNvSpPr txBox="1"/>
+          <p:nvPr/>
+        </p:nvSpPr>
+        <p:spPr>
+          <a:xfrm>
+            <a:off x="1051560" y="347472"/>
+            <a:ext cx="10149840" cy="914400"/>
+          </a:xfrm>
+          <a:prstGeom prst="rect">
+            <a:avLst/>
+          </a:prstGeom>
+          <a:noFill/>
+        </p:spPr>
+        <p:txBody>
+          <a:bodyPr wrap="square" lIns="0" tIns="0" rIns="0" bIns="0" anchor="t">
+            <a:spAutoFit/>
+          </a:bodyPr>
+          <a:lstStyle/>
+          <a:p>
+            <a:pPr>
+              <a:spcAft>
+                <a:spcPts val="200"/>
+              </a:spcAft>
+              <a:defRPr sz="1150" b="1">
+                <a:solidFill>
+                  <a:srgbClr val="0284C7"/>
+                </a:solidFill>
+                <a:latin typeface="Calibri"/>
+              </a:defRPr>
+            </a:pPr>
+            <a:r>
+              <a:t>CIERRE ACADÉMICO</a:t>
+            </a:r>
+          </a:p>
+          <a:p>
+            <a:pPr>
+              <a:spcAft>
+                <a:spcPts val="200"/>
+              </a:spcAft>
+              <a:defRPr sz="2200" b="1">
+                <a:solidFill>
+                  <a:srgbClr val="0B1F3A"/>
+                </a:solidFill>
+                <a:latin typeface="Calibri"/>
+              </a:defRPr>
+            </a:pPr>
+            <a:r>
+              <a:t>Conclusiones del Proyecto y Hoja de Ruta Etapa 02</a:t>
+            </a:r>
+          </a:p>
+          <a:p>
+            <a:pPr>
+              <a:defRPr sz="1200">
+                <a:solidFill>
+                  <a:srgbClr val="64748B"/>
+                </a:solidFill>
+                <a:latin typeface="Calibri"/>
+              </a:defRPr>
+            </a:pPr>
+            <a:r>
+              <a:t>Cumplimiento del 100% de los criterios de rúbrica y preparación para el Avance Final (APF2)</a:t>
+            </a:r>
+          </a:p>
+        </p:txBody>
+      </p:sp>
+      <p:sp>
+        <p:nvSpPr>
+          <p:cNvPr id="6" name="Rounded Rectangle 5"/>
+          <p:cNvSpPr/>
+          <p:nvPr/>
+        </p:nvSpPr>
+        <p:spPr>
+          <a:xfrm>
+            <a:off x="731520" y="1508760"/>
+            <a:ext cx="3413455" cy="4892040"/>
+          </a:xfrm>
+          <a:prstGeom prst="roundRect">
+            <a:avLst/>
+          </a:prstGeom>
+          <a:solidFill>
+            <a:srgbClr val="FFFFFF"/>
+          </a:solidFill>
+          <a:ln w="27940">
+            <a:solidFill>
+              <a:srgbClr val="93C5FD"/>
+            </a:solidFill>
+          </a:ln>
+        </p:spPr>
+        <p:style>
+          <a:lnRef idx="1">
+            <a:schemeClr val="accent1"/>
+          </a:lnRef>
+          <a:fillRef idx="3">
+            <a:schemeClr val="accent1"/>
+          </a:fillRef>
+          <a:effectRef idx="2">
+            <a:schemeClr val="accent1"/>
+          </a:effectRef>
+          <a:fontRef idx="minor">
+            <a:schemeClr val="lt1"/>
+          </a:fontRef>
+        </p:style>
+        <p:txBody>
+          <a:bodyPr rtlCol="0" anchor="t" wrap="square" tIns="182880" lIns="182880"/>
+          <a:lstStyle/>
+          <a:p>
+            <a:pPr algn="ctr">
+              <a:spcAft>
+                <a:spcPts val="800"/>
+              </a:spcAft>
+              <a:defRPr sz="1500" b="1">
+                <a:solidFill>
+                  <a:srgbClr val="0B1F3A"/>
+                </a:solidFill>
+                <a:latin typeface="Calibri"/>
+              </a:defRPr>
+            </a:pPr>
+            <a:r>
+              <a:t>1. ERRADICACIÓN DE ASIMETRÍA</a:t>
+            </a:r>
+          </a:p>
+          <a:p>
+            <a:pPr>
+              <a:defRPr sz="1300">
+                <a:solidFill>
+                  <a:srgbClr val="334155"/>
+                </a:solidFill>
+                <a:latin typeface="Calibri"/>
+              </a:defRPr>
+            </a:pPr>
+            <a:r>
+              <a:t>Se redujo el tiempo de detección de contingencias de 180 minutos a menos de 30 segundos, salvaguardando la estabilidad del Sistema Nacional de Pagos ante caídas masivas de Yape o Plim.</a:t>
+            </a:r>
+          </a:p>
+        </p:txBody>
+      </p:sp>
+      <p:sp>
+        <p:nvSpPr>
+          <p:cNvPr id="7" name="Rounded Rectangle 6"/>
+          <p:cNvSpPr/>
+          <p:nvPr/>
+        </p:nvSpPr>
+        <p:spPr>
+          <a:xfrm>
+            <a:off x="4389120" y="1508760"/>
+            <a:ext cx="3413455" cy="4892040"/>
+          </a:xfrm>
+          <a:prstGeom prst="roundRect">
+            <a:avLst/>
+          </a:prstGeom>
+          <a:solidFill>
+            <a:srgbClr val="FFFFFF"/>
+          </a:solidFill>
+          <a:ln w="27940">
+            <a:solidFill>
+              <a:srgbClr val="FCD34D"/>
+            </a:solidFill>
+          </a:ln>
+        </p:spPr>
+        <p:style>
+          <a:lnRef idx="1">
+            <a:schemeClr val="accent1"/>
+          </a:lnRef>
+          <a:fillRef idx="3">
+            <a:schemeClr val="accent1"/>
+          </a:fillRef>
+          <a:effectRef idx="2">
+            <a:schemeClr val="accent1"/>
+          </a:effectRef>
+          <a:fontRef idx="minor">
+            <a:schemeClr val="lt1"/>
+          </a:fontRef>
+        </p:style>
+        <p:txBody>
+          <a:bodyPr rtlCol="0" anchor="t" wrap="square" tIns="182880" lIns="182880"/>
+          <a:lstStyle/>
+          <a:p>
+            <a:pPr algn="ctr">
+              <a:spcAft>
+                <a:spcPts val="800"/>
+              </a:spcAft>
+              <a:defRPr sz="1500" b="1">
+                <a:solidFill>
+                  <a:srgbClr val="0B1F3A"/>
+                </a:solidFill>
+                <a:latin typeface="Calibri"/>
+              </a:defRPr>
+            </a:pPr>
+            <a:r>
+              <a:t>2. RIGOR EN INGENIERÍA DE SOFTWARE</a:t>
+            </a:r>
+          </a:p>
+          <a:p>
+            <a:pPr>
+              <a:defRPr sz="1300">
+                <a:solidFill>
+                  <a:srgbClr val="334155"/>
+                </a:solidFill>
+                <a:latin typeface="Calibri"/>
+              </a:defRPr>
+            </a:pPr>
+            <a:r>
+              <a:t>Implementación limpia de Arquitectura Hexagonal en Java 17 con Spring Boot 3, inmutabilidad matemática en PostgreSQL y cobertura exhaustiva de pruebas unitarias TDD.</a:t>
+            </a:r>
+          </a:p>
+        </p:txBody>
+      </p:sp>
+      <p:sp>
+        <p:nvSpPr>
+          <p:cNvPr id="8" name="Rounded Rectangle 7"/>
+          <p:cNvSpPr/>
+          <p:nvPr/>
+        </p:nvSpPr>
+        <p:spPr>
+          <a:xfrm>
+            <a:off x="8046720" y="1508760"/>
+            <a:ext cx="3413455" cy="4892040"/>
+          </a:xfrm>
+          <a:prstGeom prst="roundRect">
+            <a:avLst/>
+          </a:prstGeom>
+          <a:solidFill>
+            <a:srgbClr val="FFFFFF"/>
+          </a:solidFill>
+          <a:ln w="27940">
+            <a:solidFill>
+              <a:srgbClr val="6EE7B7"/>
+            </a:solidFill>
+          </a:ln>
+        </p:spPr>
+        <p:style>
+          <a:lnRef idx="1">
+            <a:schemeClr val="accent1"/>
+          </a:lnRef>
+          <a:fillRef idx="3">
+            <a:schemeClr val="accent1"/>
+          </a:fillRef>
+          <a:effectRef idx="2">
+            <a:schemeClr val="accent1"/>
+          </a:effectRef>
+          <a:fontRef idx="minor">
+            <a:schemeClr val="lt1"/>
+          </a:fontRef>
+        </p:style>
+        <p:txBody>
+          <a:bodyPr rtlCol="0" anchor="t" wrap="square" tIns="182880" lIns="182880"/>
+          <a:lstStyle/>
+          <a:p>
+            <a:pPr algn="ctr">
+              <a:spcAft>
+                <a:spcPts val="800"/>
+              </a:spcAft>
+              <a:defRPr sz="1500" b="1">
+                <a:solidFill>
+                  <a:srgbClr val="0B1F3A"/>
+                </a:solidFill>
+                <a:latin typeface="Calibri"/>
+              </a:defRPr>
+            </a:pPr>
+            <a:r>
+              <a:t>3. BASE SÓLIDA PARA LA ETAPA 02</a:t>
+            </a:r>
+          </a:p>
+          <a:p>
+            <a:pPr>
+              <a:defRPr sz="1300">
+                <a:solidFill>
+                  <a:srgbClr val="334155"/>
+                </a:solidFill>
+                <a:latin typeface="Calibri"/>
+              </a:defRPr>
+            </a:pPr>
+            <a:r>
+              <a:t>Los cimientos del APF1 permiten desplegar en los Sprints 4 al 6 el dashboard gerencial de métricas MTTR/MTTD, el portal de descargo bancario y la integración final con el SFTP del BCRP.</a:t>
+            </a:r>
+          </a:p>
+        </p:txBody>
+      </p:sp>
+    </p:spTree>
+  </p:cSld>
+  <p:clrMapOvr>
+    <a:masterClrMapping/>
+  </p:clrMapOvr>
+</p:sld>
+</file>
+
+<file path=ppt/slides/slide14.xml><?xml version="1.0" encoding="utf-8"?>
+<p:sld xmlns:a="http://schemas.openxmlformats.org/drawingml/2006/main" xmlns:p="http://schemas.openxmlformats.org/presentationml/2006/main" xmlns:r="http://schemas.openxmlformats.org/officeDocument/2006/relationships">
+  <p:cSld>
+    <p:spTree>
+      <p:nvGrpSpPr>
+        <p:cNvPr id="1" name=""/>
+        <p:cNvGrpSpPr/>
+        <p:nvPr/>
+      </p:nvGrpSpPr>
+      <p:grpSpPr/>
+      <p:sp>
+        <p:nvSpPr>
+          <p:cNvPr id="2" name="Rectangle 1"/>
+          <p:cNvSpPr/>
+          <p:nvPr/>
+        </p:nvSpPr>
+        <p:spPr>
+          <a:xfrm>
+            <a:off x="0" y="0"/>
+            <a:ext cx="12191695" cy="6858000"/>
+          </a:xfrm>
+          <a:prstGeom prst="rect">
+            <a:avLst/>
+          </a:prstGeom>
+          <a:solidFill>
+            <a:srgbClr val="F8FAFC"/>
+          </a:solidFill>
+          <a:ln>
+            <a:noFill/>
+          </a:ln>
+        </p:spPr>
+        <p:style>
+          <a:lnRef idx="1">
+            <a:schemeClr val="accent1"/>
+          </a:lnRef>
+          <a:fillRef idx="3">
+            <a:schemeClr val="accent1"/>
+          </a:fillRef>
+          <a:effectRef idx="2">
+            <a:schemeClr val="accent1"/>
+          </a:effectRef>
+          <a:fontRef idx="minor">
+            <a:schemeClr val="lt1"/>
+          </a:fontRef>
+        </p:style>
+        <p:txBody>
+          <a:bodyPr rtlCol="0" anchor="ctr"/>
+          <a:lstStyle/>
+          <a:p>
+            <a:pPr algn="ctr"/>
+          </a:p>
+        </p:txBody>
+      </p:sp>
+      <p:sp>
+        <p:nvSpPr>
+          <p:cNvPr id="3" name="Rounded Rectangle 2"/>
+          <p:cNvSpPr/>
+          <p:nvPr/>
+        </p:nvSpPr>
+        <p:spPr>
+          <a:xfrm>
+            <a:off x="1371600" y="1097280"/>
+            <a:ext cx="9448495" cy="4663440"/>
+          </a:xfrm>
+          <a:prstGeom prst="roundRect">
+            <a:avLst/>
+          </a:prstGeom>
+          <a:solidFill>
+            <a:srgbClr val="FFFFFF"/>
+          </a:solidFill>
+          <a:ln w="31750">
+            <a:solidFill>
+              <a:srgbClr val="B45309"/>
+            </a:solidFill>
+          </a:ln>
+        </p:spPr>
+        <p:style>
+          <a:lnRef idx="1">
+            <a:schemeClr val="accent1"/>
+          </a:lnRef>
+          <a:fillRef idx="3">
+            <a:schemeClr val="accent1"/>
+          </a:fillRef>
+          <a:effectRef idx="2">
+            <a:schemeClr val="accent1"/>
+          </a:effectRef>
+          <a:fontRef idx="minor">
+            <a:schemeClr val="lt1"/>
+          </a:fontRef>
+        </p:style>
+        <p:txBody>
+          <a:bodyPr rtlCol="0" anchor="t" wrap="square" tIns="365760"/>
+          <a:lstStyle/>
+          <a:p>
+            <a:pPr algn="ctr">
+              <a:spcAft>
+                <a:spcPts val="1400"/>
+              </a:spcAft>
+              <a:defRPr sz="1400" b="1">
+                <a:solidFill>
+                  <a:srgbClr val="0B1F3A"/>
+                </a:solidFill>
+                <a:latin typeface="Calibri"/>
+              </a:defRPr>
+            </a:pPr>
+            <a:r>
+              <a:t>UNIVERSIDAD TECNOLÓGICA DEL PERÚ</a:t>
+            </a:r>
+          </a:p>
+          <a:p>
+            <a:pPr algn="ctr">
+              <a:spcAft>
+                <a:spcPts val="1200"/>
+              </a:spcAft>
+              <a:defRPr sz="3800" b="1">
+                <a:solidFill>
+                  <a:srgbClr val="B45309"/>
+                </a:solidFill>
+                <a:latin typeface="Calibri"/>
               </a:defRPr>
             </a:pPr>
             <a:r>
@@ -4076,15 +5921,71 @@
           </a:p>
           <a:p>
             <a:pPr algn="ctr">
-              <a:defRPr sz="1100">
-                <a:solidFill>
-                  <a:srgbClr val="FFFFFF"/>
-                </a:solidFill>
-                <a:latin typeface="Arial"/>
-              </a:defRPr>
-            </a:pPr>
-            <a:r>
-              <a:t>Quedamos a su entera disposición, profesor Ing. Yony Zamata Condori, para responder con el mayor gusto sus consultas técnicas.</a:t>
+              <a:spcAft>
+                <a:spcPts val="600"/>
+              </a:spcAft>
+              <a:defRPr sz="1900" b="1">
+                <a:solidFill>
+                  <a:srgbClr val="0284C7"/>
+                </a:solidFill>
+                <a:latin typeface="Calibri"/>
+              </a:defRPr>
+            </a:pPr>
+            <a:r>
+              <a:t>SIGIR - BCRP: Sistema de Gestión de Incidentes Regulatorios para Pagos Digitales</a:t>
+            </a:r>
+          </a:p>
+          <a:p>
+            <a:pPr algn="ctr">
+              <a:spcAft>
+                <a:spcPts val="2000"/>
+              </a:spcAft>
+              <a:defRPr sz="1400">
+                <a:solidFill>
+                  <a:srgbClr val="64748B"/>
+                </a:solidFill>
+                <a:latin typeface="Calibri"/>
+              </a:defRPr>
+            </a:pPr>
+            <a:r>
+              <a:t>Prototipo de Telemetría y Supervisión Continua de Pagos Interoperables (APF1)</a:t>
+            </a:r>
+          </a:p>
+          <a:p>
+            <a:pPr algn="ctr">
+              <a:spcAft>
+                <a:spcPts val="1600"/>
+              </a:spcAft>
+              <a:defRPr sz="1500" b="1">
+                <a:solidFill>
+                  <a:srgbClr val="0F172A"/>
+                </a:solidFill>
+                <a:latin typeface="Calibri"/>
+              </a:defRPr>
+            </a:pPr>
+            <a:r>
+              <a:t>Quedamos a su entera disposición, profesor Ing. Yony Zamata Condori,</a:t>
+            </a:r>
+            <a:br/>
+            <a:r>
+              <a:t>para responder a satisfacción todas las preguntas técnicas del jurado.</a:t>
+            </a:r>
+          </a:p>
+          <a:p>
+            <a:pPr algn="ctr">
+              <a:defRPr sz="1300" b="1">
+                <a:solidFill>
+                  <a:srgbClr val="334155"/>
+                </a:solidFill>
+                <a:latin typeface="Calibri"/>
+              </a:defRPr>
+            </a:pPr>
+            <a:r>
+              <a:t>Frank Vargas (Líder Técnico)  •  Fernando Romero  •  Joel Olaya  •  Luis Tapia</a:t>
+            </a:r>
+            <a:br/>
+            <a:r>
+              <a:t>Sección 57524 • 2026</a:t>
             </a:r>
           </a:p>
         </p:txBody>
@@ -4122,7 +6023,7 @@
             <a:avLst/>
           </a:prstGeom>
           <a:solidFill>
-            <a:srgbClr val="070D18"/>
+            <a:srgbClr val="F8FAFC"/>
           </a:solidFill>
           <a:ln>
             <a:noFill/>
@@ -4152,132 +6053,24 @@
       </p:sp>
       <p:sp>
         <p:nvSpPr>
-          <p:cNvPr id="3" name="TextBox 2"/>
-          <p:cNvSpPr txBox="1"/>
+          <p:cNvPr id="3" name="Rectangle 2"/>
+          <p:cNvSpPr/>
           <p:nvPr/>
         </p:nvSpPr>
         <p:spPr>
           <a:xfrm>
-            <a:off x="731520" y="365760"/>
-            <a:ext cx="7315200" cy="320040"/>
+            <a:off x="731520" y="320040"/>
+            <a:ext cx="10728655" cy="987552"/>
           </a:xfrm>
           <a:prstGeom prst="rect">
             <a:avLst/>
           </a:prstGeom>
-          <a:noFill/>
-        </p:spPr>
-        <p:txBody>
-          <a:bodyPr wrap="square">
-            <a:spAutoFit/>
-          </a:bodyPr>
-          <a:lstStyle/>
-          <a:p>
-            <a:pPr>
-              <a:defRPr sz="950" b="1">
-                <a:solidFill>
-                  <a:srgbClr val="00D4FF"/>
-                </a:solidFill>
-                <a:latin typeface="Arial"/>
-              </a:defRPr>
-            </a:pPr>
-            <a:r>
-              <a:t>CRITERIO 1 DE RÚBRICA • 3.0 PUNTOS</a:t>
-            </a:r>
-          </a:p>
-        </p:txBody>
-      </p:sp>
-      <p:sp>
-        <p:nvSpPr>
-          <p:cNvPr id="4" name="TextBox 3"/>
-          <p:cNvSpPr txBox="1"/>
-          <p:nvPr/>
-        </p:nvSpPr>
-        <p:spPr>
-          <a:xfrm>
-            <a:off x="731520" y="640080"/>
-            <a:ext cx="10515600" cy="502920"/>
-          </a:xfrm>
-          <a:prstGeom prst="rect">
-            <a:avLst/>
-          </a:prstGeom>
-          <a:noFill/>
-        </p:spPr>
-        <p:txBody>
-          <a:bodyPr wrap="square">
-            <a:spAutoFit/>
-          </a:bodyPr>
-          <a:lstStyle/>
-          <a:p>
-            <a:pPr>
-              <a:defRPr sz="2200" b="1">
-                <a:solidFill>
-                  <a:srgbClr val="FFFFFF"/>
-                </a:solidFill>
-                <a:latin typeface="Arial"/>
-              </a:defRPr>
-            </a:pPr>
-            <a:r>
-              <a:t>Contexto Institucional del BCRP y 5 Aspectos Estratégicos</a:t>
-            </a:r>
-          </a:p>
-        </p:txBody>
-      </p:sp>
-      <p:sp>
-        <p:nvSpPr>
-          <p:cNvPr id="5" name="TextBox 4"/>
-          <p:cNvSpPr txBox="1"/>
-          <p:nvPr/>
-        </p:nvSpPr>
-        <p:spPr>
-          <a:xfrm>
-            <a:off x="731520" y="1143000"/>
-            <a:ext cx="10515600" cy="320040"/>
-          </a:xfrm>
-          <a:prstGeom prst="rect">
-            <a:avLst/>
-          </a:prstGeom>
-          <a:noFill/>
-        </p:spPr>
-        <p:txBody>
-          <a:bodyPr wrap="square">
-            <a:spAutoFit/>
-          </a:bodyPr>
-          <a:lstStyle/>
-          <a:p>
-            <a:pPr>
-              <a:defRPr sz="1100">
-                <a:solidFill>
-                  <a:srgbClr val="94A3B8"/>
-                </a:solidFill>
-                <a:latin typeface="Arial"/>
-              </a:defRPr>
-            </a:pPr>
-            <a:r>
-              <a:t>Delimitación del alcance según Ley N° 26123 y Ley N° 29440 (Sistema Nacional de Pagos)</a:t>
-            </a:r>
-          </a:p>
-        </p:txBody>
-      </p:sp>
-      <p:sp>
-        <p:nvSpPr>
-          <p:cNvPr id="6" name="Rounded Rectangle 5"/>
-          <p:cNvSpPr/>
-          <p:nvPr/>
-        </p:nvSpPr>
-        <p:spPr>
-          <a:xfrm>
-            <a:off x="731520" y="1645920"/>
-            <a:ext cx="2066543" cy="4389120"/>
-          </a:xfrm>
-          <a:prstGeom prst="roundRect">
-            <a:avLst/>
-          </a:prstGeom>
           <a:solidFill>
-            <a:srgbClr val="0F192D"/>
+            <a:srgbClr val="FFFFFF"/>
           </a:solidFill>
-          <a:ln w="12700">
+          <a:ln w="19050">
             <a:solidFill>
-              <a:srgbClr val="23375A"/>
+              <a:srgbClr val="CBD5E1"/>
             </a:solidFill>
           </a:ln>
         </p:spPr>
@@ -4296,76 +6089,32 @@
           </a:fontRef>
         </p:style>
         <p:txBody>
-          <a:bodyPr rtlCol="0" anchor="ctr" wrap="square"/>
-          <a:lstStyle/>
-          <a:p>
-            <a:pPr algn="ctr">
-              <a:defRPr sz="1200" b="1">
-                <a:solidFill>
-                  <a:srgbClr val="FFFFFF"/>
-                </a:solidFill>
-                <a:latin typeface="Arial"/>
-              </a:defRPr>
-            </a:pPr>
-            <a:r>
-              <a:t>1. VISIÓN</a:t>
-            </a:r>
-          </a:p>
-          <a:p>
-            <a:br/>
-            <a:pPr>
-              <a:defRPr sz="1050" b="1">
-                <a:solidFill>
-                  <a:srgbClr val="FFFFFF"/>
-                </a:solidFill>
-                <a:latin typeface="Arial"/>
-              </a:defRPr>
-            </a:pPr>
-            <a:r>
-              <a:t>Banco central moderno y con credibilidad internacional.</a:t>
-            </a:r>
-          </a:p>
-          <a:p>
-            <a:br/>
-            <a:pPr>
-              <a:defRPr sz="950">
-                <a:solidFill>
-                  <a:srgbClr val="94A3B8"/>
-                </a:solidFill>
-                <a:latin typeface="Arial"/>
-              </a:defRPr>
-            </a:pPr>
-            <a:r>
-              <a:t>Requisito TIC:</a:t>
-            </a:r>
-            <a:br/>
-            <a:r>
-              <a:t>Supervisión digital con telemetría en tiempo real, erradicando hojas de cálculo y llamadas manuales.</a:t>
-            </a:r>
-          </a:p>
-        </p:txBody>
-      </p:sp>
-      <p:sp>
-        <p:nvSpPr>
-          <p:cNvPr id="7" name="Rounded Rectangle 6"/>
+          <a:bodyPr rtlCol="0" anchor="ctr"/>
+          <a:lstStyle/>
+          <a:p>
+            <a:pPr algn="ctr"/>
+          </a:p>
+        </p:txBody>
+      </p:sp>
+      <p:sp>
+        <p:nvSpPr>
+          <p:cNvPr id="4" name="Rectangle 3"/>
           <p:cNvSpPr/>
           <p:nvPr/>
         </p:nvSpPr>
         <p:spPr>
           <a:xfrm>
-            <a:off x="2935223" y="1645920"/>
-            <a:ext cx="2066543" cy="4389120"/>
-          </a:xfrm>
-          <a:prstGeom prst="roundRect">
+            <a:off x="731520" y="320040"/>
+            <a:ext cx="128016" cy="987552"/>
+          </a:xfrm>
+          <a:prstGeom prst="rect">
             <a:avLst/>
           </a:prstGeom>
           <a:solidFill>
-            <a:srgbClr val="0F192D"/>
+            <a:srgbClr val="0284C7"/>
           </a:solidFill>
-          <a:ln w="12700">
-            <a:solidFill>
-              <a:srgbClr val="23375A"/>
-            </a:solidFill>
+          <a:ln>
+            <a:noFill/>
           </a:ln>
         </p:spPr>
         <p:style>
@@ -4383,75 +6132,101 @@
           </a:fontRef>
         </p:style>
         <p:txBody>
-          <a:bodyPr rtlCol="0" anchor="ctr" wrap="square"/>
-          <a:lstStyle/>
-          <a:p>
-            <a:pPr algn="ctr">
-              <a:defRPr sz="1200" b="1">
-                <a:solidFill>
-                  <a:srgbClr val="FFFFFF"/>
-                </a:solidFill>
-                <a:latin typeface="Arial"/>
-              </a:defRPr>
-            </a:pPr>
-            <a:r>
-              <a:t>2. MISIÓN</a:t>
-            </a:r>
-          </a:p>
-          <a:p>
-            <a:br/>
-            <a:pPr>
-              <a:defRPr sz="1050" b="1">
-                <a:solidFill>
-                  <a:srgbClr val="FFFFFF"/>
-                </a:solidFill>
-                <a:latin typeface="Arial"/>
-              </a:defRPr>
-            </a:pPr>
-            <a:r>
-              <a:t>Preservar estabilidad monetaria y regular pagos.</a:t>
-            </a:r>
-          </a:p>
-          <a:p>
-            <a:br/>
-            <a:pPr>
-              <a:defRPr sz="950">
-                <a:solidFill>
-                  <a:srgbClr val="94A3B8"/>
-                </a:solidFill>
-                <a:latin typeface="Arial"/>
-              </a:defRPr>
-            </a:pPr>
-            <a:r>
-              <a:t>Requisito TIC:</a:t>
-            </a:r>
-            <a:br/>
-            <a:r>
-              <a:t>Datos telemétricos puros, transparentes e inmutables sin asimetría informativa.</a:t>
-            </a:r>
-          </a:p>
-        </p:txBody>
-      </p:sp>
-      <p:sp>
-        <p:nvSpPr>
-          <p:cNvPr id="8" name="Rounded Rectangle 7"/>
+          <a:bodyPr rtlCol="0" anchor="ctr"/>
+          <a:lstStyle/>
+          <a:p>
+            <a:pPr algn="ctr"/>
+          </a:p>
+        </p:txBody>
+      </p:sp>
+      <p:sp>
+        <p:nvSpPr>
+          <p:cNvPr id="5" name="TextBox 4"/>
+          <p:cNvSpPr txBox="1"/>
+          <p:nvPr/>
+        </p:nvSpPr>
+        <p:spPr>
+          <a:xfrm>
+            <a:off x="1051560" y="347472"/>
+            <a:ext cx="10149840" cy="914400"/>
+          </a:xfrm>
+          <a:prstGeom prst="rect">
+            <a:avLst/>
+          </a:prstGeom>
+          <a:noFill/>
+        </p:spPr>
+        <p:txBody>
+          <a:bodyPr wrap="square" lIns="0" tIns="0" rIns="0" bIns="0" anchor="t">
+            <a:spAutoFit/>
+          </a:bodyPr>
+          <a:lstStyle/>
+          <a:p>
+            <a:pPr>
+              <a:spcAft>
+                <a:spcPts val="200"/>
+              </a:spcAft>
+              <a:defRPr sz="1150" b="1">
+                <a:solidFill>
+                  <a:srgbClr val="0284C7"/>
+                </a:solidFill>
+                <a:latin typeface="Calibri"/>
+              </a:defRPr>
+            </a:pPr>
+            <a:r>
+              <a:t>CRITERIO 1 DE RÚBRICA • 3.0 PUNTOS</a:t>
+            </a:r>
+          </a:p>
+          <a:p>
+            <a:pPr>
+              <a:spcAft>
+                <a:spcPts val="200"/>
+              </a:spcAft>
+              <a:defRPr sz="2200" b="1">
+                <a:solidFill>
+                  <a:srgbClr val="0B1F3A"/>
+                </a:solidFill>
+                <a:latin typeface="Calibri"/>
+              </a:defRPr>
+            </a:pPr>
+            <a:r>
+              <a:t>Contexto Institucional del BCRP y 5 Aspectos Estratégicos</a:t>
+            </a:r>
+          </a:p>
+          <a:p>
+            <a:pPr>
+              <a:defRPr sz="1200">
+                <a:solidFill>
+                  <a:srgbClr val="64748B"/>
+                </a:solidFill>
+                <a:latin typeface="Calibri"/>
+              </a:defRPr>
+            </a:pPr>
+            <a:r>
+              <a:t>Delimitación formal del alcance según Ley N° 26123 y Ley N° 29440 (Sistema Nacional de Pagos)</a:t>
+            </a:r>
+          </a:p>
+        </p:txBody>
+      </p:sp>
+      <p:sp>
+        <p:nvSpPr>
+          <p:cNvPr id="6" name="Rounded Rectangle 5"/>
           <p:cNvSpPr/>
           <p:nvPr/>
         </p:nvSpPr>
         <p:spPr>
           <a:xfrm>
-            <a:off x="5138926" y="1645920"/>
-            <a:ext cx="2066543" cy="4389120"/>
+            <a:off x="731520" y="1508760"/>
+            <a:ext cx="3413455" cy="2286000"/>
           </a:xfrm>
           <a:prstGeom prst="roundRect">
             <a:avLst/>
           </a:prstGeom>
           <a:solidFill>
-            <a:srgbClr val="142341"/>
+            <a:srgbClr val="FFFFFF"/>
           </a:solidFill>
-          <a:ln w="19050">
+          <a:ln w="25400">
             <a:solidFill>
-              <a:srgbClr val="00D4FF"/>
+              <a:srgbClr val="93C5FD"/>
             </a:solidFill>
           </a:ln>
         </p:spPr>
@@ -4470,75 +6245,75 @@
           </a:fontRef>
         </p:style>
         <p:txBody>
-          <a:bodyPr rtlCol="0" anchor="ctr" wrap="square"/>
+          <a:bodyPr rtlCol="0" anchor="t" wrap="square" tIns="164592" lIns="201168" rIns="201168"/>
           <a:lstStyle/>
           <a:p>
             <a:pPr algn="ctr">
-              <a:defRPr sz="1200" b="1">
-                <a:solidFill>
-                  <a:srgbClr val="00D4FF"/>
-                </a:solidFill>
-                <a:latin typeface="Arial"/>
-              </a:defRPr>
-            </a:pPr>
-            <a:r>
-              <a:t>3. ENTORNO</a:t>
-            </a:r>
-          </a:p>
-          <a:p>
-            <a:br/>
-            <a:pPr>
-              <a:defRPr sz="1050" b="1">
-                <a:solidFill>
-                  <a:srgbClr val="FFFFFF"/>
-                </a:solidFill>
-                <a:latin typeface="Arial"/>
-              </a:defRPr>
-            </a:pPr>
-            <a:r>
-              <a:t>+15 Millones de transacciones diarias.</a:t>
-            </a:r>
-          </a:p>
-          <a:p>
-            <a:br/>
-            <a:pPr>
-              <a:defRPr sz="950">
-                <a:solidFill>
-                  <a:srgbClr val="94A3B8"/>
-                </a:solidFill>
-                <a:latin typeface="Arial"/>
-              </a:defRPr>
-            </a:pPr>
-            <a:r>
-              <a:t>Requisito TIC:</a:t>
-            </a:r>
-            <a:br/>
-            <a:r>
-              <a:t>Interoperabilidad masiva entre Yape, Plim, Cajas y CCE. Circular BCRP N° 0011-2023.</a:t>
-            </a:r>
-          </a:p>
-        </p:txBody>
-      </p:sp>
-      <p:sp>
-        <p:nvSpPr>
-          <p:cNvPr id="9" name="Rounded Rectangle 8"/>
+              <a:spcAft>
+                <a:spcPts val="400"/>
+              </a:spcAft>
+              <a:defRPr sz="1500" b="1">
+                <a:solidFill>
+                  <a:srgbClr val="0B1F3A"/>
+                </a:solidFill>
+                <a:latin typeface="Calibri"/>
+              </a:defRPr>
+            </a:pPr>
+            <a:r>
+              <a:t>1. VISIÓN DEL BCRP</a:t>
+            </a:r>
+          </a:p>
+          <a:p>
+            <a:pPr>
+              <a:spcAft>
+                <a:spcPts val="600"/>
+              </a:spcAft>
+              <a:defRPr sz="1300" b="1">
+                <a:solidFill>
+                  <a:srgbClr val="0F172A"/>
+                </a:solidFill>
+                <a:latin typeface="Calibri"/>
+              </a:defRPr>
+            </a:pPr>
+            <a:r>
+              <a:t>Banco central moderno, eficiente y con credibilidad internacional.</a:t>
+            </a:r>
+          </a:p>
+          <a:p>
+            <a:pPr>
+              <a:defRPr sz="1200">
+                <a:solidFill>
+                  <a:srgbClr val="334155"/>
+                </a:solidFill>
+                <a:latin typeface="Calibri"/>
+              </a:defRPr>
+            </a:pPr>
+            <a:r>
+              <a:t>Impacto Tecnológico: Supervisión telemétrica continua en tiempo real, eliminando hojas de cálculo y reportes manuales tardíos.</a:t>
+            </a:r>
+          </a:p>
+        </p:txBody>
+      </p:sp>
+      <p:sp>
+        <p:nvSpPr>
+          <p:cNvPr id="7" name="Rounded Rectangle 6"/>
           <p:cNvSpPr/>
           <p:nvPr/>
         </p:nvSpPr>
         <p:spPr>
           <a:xfrm>
-            <a:off x="7342629" y="1645920"/>
-            <a:ext cx="2066543" cy="4389120"/>
+            <a:off x="4388205" y="1508760"/>
+            <a:ext cx="3413455" cy="2286000"/>
           </a:xfrm>
           <a:prstGeom prst="roundRect">
             <a:avLst/>
           </a:prstGeom>
           <a:solidFill>
-            <a:srgbClr val="0F192D"/>
+            <a:srgbClr val="FFFFFF"/>
           </a:solidFill>
-          <a:ln w="12700">
+          <a:ln w="25400">
             <a:solidFill>
-              <a:srgbClr val="23375A"/>
+              <a:srgbClr val="CBD5E1"/>
             </a:solidFill>
           </a:ln>
         </p:spPr>
@@ -4557,75 +6332,75 @@
           </a:fontRef>
         </p:style>
         <p:txBody>
-          <a:bodyPr rtlCol="0" anchor="ctr" wrap="square"/>
+          <a:bodyPr rtlCol="0" anchor="t" wrap="square" tIns="164592" lIns="201168" rIns="201168"/>
           <a:lstStyle/>
           <a:p>
             <a:pPr algn="ctr">
-              <a:defRPr sz="1200" b="1">
-                <a:solidFill>
-                  <a:srgbClr val="FFFFFF"/>
-                </a:solidFill>
-                <a:latin typeface="Arial"/>
-              </a:defRPr>
-            </a:pPr>
-            <a:r>
-              <a:t>4. ESTRATEGIAS</a:t>
-            </a:r>
-          </a:p>
-          <a:p>
-            <a:br/>
-            <a:pPr>
-              <a:defRPr sz="1050" b="1">
-                <a:solidFill>
-                  <a:srgbClr val="FFFFFF"/>
-                </a:solidFill>
-                <a:latin typeface="Arial"/>
-              </a:defRPr>
-            </a:pPr>
-            <a:r>
-              <a:t>Resiliencia operativa del sistema de pagos.</a:t>
-            </a:r>
-          </a:p>
-          <a:p>
-            <a:br/>
-            <a:pPr>
-              <a:defRPr sz="950">
-                <a:solidFill>
-                  <a:srgbClr val="94A3B8"/>
-                </a:solidFill>
-                <a:latin typeface="Arial"/>
-              </a:defRPr>
-            </a:pPr>
-            <a:r>
-              <a:t>Requisito TIC:</a:t>
-            </a:r>
-            <a:br/>
-            <a:r>
-              <a:t>Detección y tipificación autónoma de contingencias en menos de 30 segundos.</a:t>
-            </a:r>
-          </a:p>
-        </p:txBody>
-      </p:sp>
-      <p:sp>
-        <p:nvSpPr>
-          <p:cNvPr id="10" name="Rounded Rectangle 9"/>
+              <a:spcAft>
+                <a:spcPts val="400"/>
+              </a:spcAft>
+              <a:defRPr sz="1500" b="1">
+                <a:solidFill>
+                  <a:srgbClr val="0B1F3A"/>
+                </a:solidFill>
+                <a:latin typeface="Calibri"/>
+              </a:defRPr>
+            </a:pPr>
+            <a:r>
+              <a:t>2. MISIÓN INSTITUCIONAL</a:t>
+            </a:r>
+          </a:p>
+          <a:p>
+            <a:pPr>
+              <a:spcAft>
+                <a:spcPts val="600"/>
+              </a:spcAft>
+              <a:defRPr sz="1300" b="1">
+                <a:solidFill>
+                  <a:srgbClr val="0F172A"/>
+                </a:solidFill>
+                <a:latin typeface="Calibri"/>
+              </a:defRPr>
+            </a:pPr>
+            <a:r>
+              <a:t>Preservar estabilidad monetaria y regular el sistema de pagos.</a:t>
+            </a:r>
+          </a:p>
+          <a:p>
+            <a:pPr>
+              <a:defRPr sz="1200">
+                <a:solidFill>
+                  <a:srgbClr val="334155"/>
+                </a:solidFill>
+                <a:latin typeface="Calibri"/>
+              </a:defRPr>
+            </a:pPr>
+            <a:r>
+              <a:t>Impacto Tecnológico: Disponibilidad de datos telemétricos puros e inmutables, erradicando asimetría informativa con los bancos.</a:t>
+            </a:r>
+          </a:p>
+        </p:txBody>
+      </p:sp>
+      <p:sp>
+        <p:nvSpPr>
+          <p:cNvPr id="8" name="Rounded Rectangle 7"/>
           <p:cNvSpPr/>
           <p:nvPr/>
         </p:nvSpPr>
         <p:spPr>
           <a:xfrm>
-            <a:off x="9546332" y="1645920"/>
-            <a:ext cx="2066543" cy="4389120"/>
+            <a:off x="8044890" y="1508760"/>
+            <a:ext cx="3413455" cy="2286000"/>
           </a:xfrm>
           <a:prstGeom prst="roundRect">
             <a:avLst/>
           </a:prstGeom>
           <a:solidFill>
-            <a:srgbClr val="142341"/>
+            <a:srgbClr val="FFFFFF"/>
           </a:solidFill>
-          <a:ln w="19050">
+          <a:ln w="25400">
             <a:solidFill>
-              <a:srgbClr val="FBBF24"/>
+              <a:srgbClr val="FCD34D"/>
             </a:solidFill>
           </a:ln>
         </p:spPr>
@@ -4644,51 +6419,241 @@
           </a:fontRef>
         </p:style>
         <p:txBody>
-          <a:bodyPr rtlCol="0" anchor="ctr" wrap="square"/>
+          <a:bodyPr rtlCol="0" anchor="t" wrap="square" tIns="164592" lIns="201168" rIns="201168"/>
           <a:lstStyle/>
           <a:p>
             <a:pPr algn="ctr">
-              <a:defRPr sz="1200" b="1">
-                <a:solidFill>
-                  <a:srgbClr val="FBBF24"/>
-                </a:solidFill>
-                <a:latin typeface="Arial"/>
-              </a:defRPr>
-            </a:pPr>
-            <a:r>
-              <a:t>5. PLANES PEI</a:t>
-            </a:r>
-          </a:p>
-          <a:p>
+              <a:spcAft>
+                <a:spcPts val="400"/>
+              </a:spcAft>
+              <a:defRPr sz="1500" b="1">
+                <a:solidFill>
+                  <a:srgbClr val="0B1F3A"/>
+                </a:solidFill>
+                <a:latin typeface="Calibri"/>
+              </a:defRPr>
+            </a:pPr>
+            <a:r>
+              <a:t>3. ENTORNO INTEROPERABLE</a:t>
+            </a:r>
+          </a:p>
+          <a:p>
+            <a:pPr>
+              <a:spcAft>
+                <a:spcPts val="600"/>
+              </a:spcAft>
+              <a:defRPr sz="1300" b="1">
+                <a:solidFill>
+                  <a:srgbClr val="0284C7"/>
+                </a:solidFill>
+                <a:latin typeface="Calibri"/>
+              </a:defRPr>
+            </a:pPr>
+            <a:r>
+              <a:t>Ecosistema masivo con +15 Millones de transacciones diarias.</a:t>
+            </a:r>
+          </a:p>
+          <a:p>
+            <a:pPr>
+              <a:defRPr sz="1200">
+                <a:solidFill>
+                  <a:srgbClr val="334155"/>
+                </a:solidFill>
+                <a:latin typeface="Calibri"/>
+              </a:defRPr>
+            </a:pPr>
+            <a:r>
+              <a:t>Impacto Tecnológico: Interconexión Yape, Plim, Cajas Municipales y CCE bajo la Circular BCRP N° 0011-2023.</a:t>
+            </a:r>
+          </a:p>
+        </p:txBody>
+      </p:sp>
+      <p:sp>
+        <p:nvSpPr>
+          <p:cNvPr id="9" name="Rounded Rectangle 8"/>
+          <p:cNvSpPr/>
+          <p:nvPr/>
+        </p:nvSpPr>
+        <p:spPr>
+          <a:xfrm>
+            <a:off x="731520" y="3977639"/>
+            <a:ext cx="5242255" cy="2423160"/>
+          </a:xfrm>
+          <a:prstGeom prst="roundRect">
+            <a:avLst/>
+          </a:prstGeom>
+          <a:solidFill>
+            <a:srgbClr val="FFFFFF"/>
+          </a:solidFill>
+          <a:ln w="25400">
+            <a:solidFill>
+              <a:srgbClr val="6EE7B7"/>
+            </a:solidFill>
+          </a:ln>
+        </p:spPr>
+        <p:style>
+          <a:lnRef idx="1">
+            <a:schemeClr val="accent1"/>
+          </a:lnRef>
+          <a:fillRef idx="3">
+            <a:schemeClr val="accent1"/>
+          </a:fillRef>
+          <a:effectRef idx="2">
+            <a:schemeClr val="accent1"/>
+          </a:effectRef>
+          <a:fontRef idx="minor">
+            <a:schemeClr val="lt1"/>
+          </a:fontRef>
+        </p:style>
+        <p:txBody>
+          <a:bodyPr rtlCol="0" anchor="t" wrap="square" tIns="164592" lIns="201168" rIns="201168"/>
+          <a:lstStyle/>
+          <a:p>
+            <a:pPr algn="ctr">
+              <a:spcAft>
+                <a:spcPts val="400"/>
+              </a:spcAft>
+              <a:defRPr sz="1500" b="1">
+                <a:solidFill>
+                  <a:srgbClr val="0B1F3A"/>
+                </a:solidFill>
+                <a:latin typeface="Calibri"/>
+              </a:defRPr>
+            </a:pPr>
+            <a:r>
+              <a:t>4. ESTRATEGIAS DE RESILIENCIA OPERATIVA</a:t>
+            </a:r>
+          </a:p>
+          <a:p>
+            <a:pPr>
+              <a:spcAft>
+                <a:spcPts val="600"/>
+              </a:spcAft>
+              <a:defRPr sz="1300" b="1">
+                <a:solidFill>
+                  <a:srgbClr val="0F172A"/>
+                </a:solidFill>
+                <a:latin typeface="Calibri"/>
+              </a:defRPr>
+            </a:pPr>
+            <a:r>
+              <a:t>Monitoreo continuo de switches de pago para mitigar riesgos sistémicos.</a:t>
+            </a:r>
+          </a:p>
+          <a:p>
+            <a:pPr>
+              <a:defRPr sz="1200">
+                <a:solidFill>
+                  <a:srgbClr val="334155"/>
+                </a:solidFill>
+                <a:latin typeface="Calibri"/>
+              </a:defRPr>
+            </a:pPr>
+            <a:r>
+              <a:t>• Detección autónoma de anomalías HTTP 5xx y timeouts en menos de 30 segundos.</a:t>
+            </a:r>
             <a:br/>
-            <a:pPr>
-              <a:defRPr sz="1050" b="1">
-                <a:solidFill>
-                  <a:srgbClr val="FFFFFF"/>
-                </a:solidFill>
-                <a:latin typeface="Arial"/>
-              </a:defRPr>
-            </a:pPr>
-            <a:r>
-              <a:t>Plan Estratégico PEI 2022-2026.</a:t>
-            </a:r>
-          </a:p>
-          <a:p>
+            <a:r>
+              <a:t>• Reglas automáticas que impiden la duplicidad de tickets ante caídas masivas.</a:t>
+            </a:r>
             <a:br/>
-            <a:pPr>
-              <a:defRPr sz="950">
-                <a:solidFill>
-                  <a:srgbClr val="94A3B8"/>
-                </a:solidFill>
-                <a:latin typeface="Arial"/>
-              </a:defRPr>
-            </a:pPr>
-            <a:r>
-              <a:t>Requisito TIC:</a:t>
+            <a:r>
+              <a:t>• Consola unificada de semáforos en tiempo real para la Sala NOC del BCRP.</a:t>
+            </a:r>
+          </a:p>
+        </p:txBody>
+      </p:sp>
+      <p:sp>
+        <p:nvSpPr>
+          <p:cNvPr id="10" name="Rounded Rectangle 9"/>
+          <p:cNvSpPr/>
+          <p:nvPr/>
+        </p:nvSpPr>
+        <p:spPr>
+          <a:xfrm>
+            <a:off x="6217005" y="3977639"/>
+            <a:ext cx="5242255" cy="2423160"/>
+          </a:xfrm>
+          <a:prstGeom prst="roundRect">
+            <a:avLst/>
+          </a:prstGeom>
+          <a:solidFill>
+            <a:srgbClr val="FFFFFF"/>
+          </a:solidFill>
+          <a:ln w="25400">
+            <a:solidFill>
+              <a:srgbClr val="93C5FD"/>
+            </a:solidFill>
+          </a:ln>
+        </p:spPr>
+        <p:style>
+          <a:lnRef idx="1">
+            <a:schemeClr val="accent1"/>
+          </a:lnRef>
+          <a:fillRef idx="3">
+            <a:schemeClr val="accent1"/>
+          </a:fillRef>
+          <a:effectRef idx="2">
+            <a:schemeClr val="accent1"/>
+          </a:effectRef>
+          <a:fontRef idx="minor">
+            <a:schemeClr val="lt1"/>
+          </a:fontRef>
+        </p:style>
+        <p:txBody>
+          <a:bodyPr rtlCol="0" anchor="t" wrap="square" tIns="164592" lIns="201168" rIns="201168"/>
+          <a:lstStyle/>
+          <a:p>
+            <a:pPr algn="ctr">
+              <a:spcAft>
+                <a:spcPts val="400"/>
+              </a:spcAft>
+              <a:defRPr sz="1500" b="1">
+                <a:solidFill>
+                  <a:srgbClr val="0B1F3A"/>
+                </a:solidFill>
+                <a:latin typeface="Calibri"/>
+              </a:defRPr>
+            </a:pPr>
+            <a:r>
+              <a:t>5. PLANES ESTRATÉGICOS PEI 2022-2026</a:t>
+            </a:r>
+          </a:p>
+          <a:p>
+            <a:pPr>
+              <a:spcAft>
+                <a:spcPts val="600"/>
+              </a:spcAft>
+              <a:defRPr sz="1300" b="1">
+                <a:solidFill>
+                  <a:srgbClr val="0F172A"/>
+                </a:solidFill>
+                <a:latin typeface="Calibri"/>
+              </a:defRPr>
+            </a:pPr>
+            <a:r>
+              <a:t>Alineación integral con los Objetivos Estratégicos Institucionales del BCRP.</a:t>
+            </a:r>
+          </a:p>
+          <a:p>
+            <a:pPr>
+              <a:defRPr sz="1200">
+                <a:solidFill>
+                  <a:srgbClr val="334155"/>
+                </a:solidFill>
+                <a:latin typeface="Calibri"/>
+              </a:defRPr>
+            </a:pPr>
+            <a:r>
+              <a:t>• OEI 04: Modernizar y garantizar la seguridad de las plataformas de pagos digitales.</a:t>
             </a:r>
             <a:br/>
             <a:r>
-              <a:t>Cumplimiento de objetivos OEI 04 (pagos), OEI 10 (innovación), OEI 12 y OEI 14 (riesgos TIC).</a:t>
+              <a:t>• OEI 10: Fomentar la innovación tecnológica y adopción de estándares modernos.</a:t>
+            </a:r>
+            <a:br/>
+            <a:r>
+              <a:t>• OEI 14: Fortalecer la gestión de ciberseguridad y continuidad operativa del Estado.</a:t>
             </a:r>
           </a:p>
         </p:txBody>
@@ -4726,7 +6691,7 @@
             <a:avLst/>
           </a:prstGeom>
           <a:solidFill>
-            <a:srgbClr val="070D18"/>
+            <a:srgbClr val="F8FAFC"/>
           </a:solidFill>
           <a:ln>
             <a:noFill/>
@@ -4756,132 +6721,24 @@
       </p:sp>
       <p:sp>
         <p:nvSpPr>
-          <p:cNvPr id="3" name="TextBox 2"/>
-          <p:cNvSpPr txBox="1"/>
+          <p:cNvPr id="3" name="Rectangle 2"/>
+          <p:cNvSpPr/>
           <p:nvPr/>
         </p:nvSpPr>
         <p:spPr>
           <a:xfrm>
-            <a:off x="731520" y="365760"/>
-            <a:ext cx="7315200" cy="320040"/>
+            <a:off x="731520" y="320040"/>
+            <a:ext cx="10728655" cy="987552"/>
           </a:xfrm>
           <a:prstGeom prst="rect">
             <a:avLst/>
           </a:prstGeom>
-          <a:noFill/>
-        </p:spPr>
-        <p:txBody>
-          <a:bodyPr wrap="square">
-            <a:spAutoFit/>
-          </a:bodyPr>
-          <a:lstStyle/>
-          <a:p>
-            <a:pPr>
-              <a:defRPr sz="950" b="1">
-                <a:solidFill>
-                  <a:srgbClr val="00D4FF"/>
-                </a:solidFill>
-                <a:latin typeface="Arial"/>
-              </a:defRPr>
-            </a:pPr>
-            <a:r>
-              <a:t>CRITERIO 1 DE RÚBRICA • 3.0 PUNTOS</a:t>
-            </a:r>
-          </a:p>
-        </p:txBody>
-      </p:sp>
-      <p:sp>
-        <p:nvSpPr>
-          <p:cNvPr id="4" name="TextBox 3"/>
-          <p:cNvSpPr txBox="1"/>
-          <p:nvPr/>
-        </p:nvSpPr>
-        <p:spPr>
-          <a:xfrm>
-            <a:off x="731520" y="640080"/>
-            <a:ext cx="10515600" cy="502920"/>
-          </a:xfrm>
-          <a:prstGeom prst="rect">
-            <a:avLst/>
-          </a:prstGeom>
-          <a:noFill/>
-        </p:spPr>
-        <p:txBody>
-          <a:bodyPr wrap="square">
-            <a:spAutoFit/>
-          </a:bodyPr>
-          <a:lstStyle/>
-          <a:p>
-            <a:pPr>
-              <a:defRPr sz="2200" b="1">
-                <a:solidFill>
-                  <a:srgbClr val="FFFFFF"/>
-                </a:solidFill>
-                <a:latin typeface="Arial"/>
-              </a:defRPr>
-            </a:pPr>
-            <a:r>
-              <a:t>Business Model Canvas (BMC) de Supervisión Regulatoria</a:t>
-            </a:r>
-          </a:p>
-        </p:txBody>
-      </p:sp>
-      <p:sp>
-        <p:nvSpPr>
-          <p:cNvPr id="5" name="TextBox 4"/>
-          <p:cNvSpPr txBox="1"/>
-          <p:nvPr/>
-        </p:nvSpPr>
-        <p:spPr>
-          <a:xfrm>
-            <a:off x="731520" y="1143000"/>
-            <a:ext cx="10515600" cy="320040"/>
-          </a:xfrm>
-          <a:prstGeom prst="rect">
-            <a:avLst/>
-          </a:prstGeom>
-          <a:noFill/>
-        </p:spPr>
-        <p:txBody>
-          <a:bodyPr wrap="square">
-            <a:spAutoFit/>
-          </a:bodyPr>
-          <a:lstStyle/>
-          <a:p>
-            <a:pPr>
-              <a:defRPr sz="1100">
-                <a:solidFill>
-                  <a:srgbClr val="94A3B8"/>
-                </a:solidFill>
-                <a:latin typeface="Arial"/>
-              </a:defRPr>
-            </a:pPr>
-            <a:r>
-              <a:t>Modelo de generación de valor público articulado como plataforma tecnológica para el Estado Peruano</a:t>
-            </a:r>
-          </a:p>
-        </p:txBody>
-      </p:sp>
-      <p:sp>
-        <p:nvSpPr>
-          <p:cNvPr id="6" name="Rounded Rectangle 5"/>
-          <p:cNvSpPr/>
-          <p:nvPr/>
-        </p:nvSpPr>
-        <p:spPr>
-          <a:xfrm>
-            <a:off x="731520" y="1645920"/>
-            <a:ext cx="2057400" cy="2926080"/>
-          </a:xfrm>
-          <a:prstGeom prst="roundRect">
-            <a:avLst/>
-          </a:prstGeom>
           <a:solidFill>
-            <a:srgbClr val="0F192D"/>
+            <a:srgbClr val="FFFFFF"/>
           </a:solidFill>
-          <a:ln w="12700">
+          <a:ln w="19050">
             <a:solidFill>
-              <a:srgbClr val="23375A"/>
+              <a:srgbClr val="CBD5E1"/>
             </a:solidFill>
           </a:ln>
         </p:spPr>
@@ -4900,69 +6757,32 @@
           </a:fontRef>
         </p:style>
         <p:txBody>
-          <a:bodyPr rtlCol="0" anchor="ctr" wrap="square"/>
-          <a:lstStyle/>
-          <a:p>
-            <a:pPr algn="ctr">
-              <a:defRPr sz="1050" b="1">
-                <a:solidFill>
-                  <a:srgbClr val="00D4FF"/>
-                </a:solidFill>
-                <a:latin typeface="Arial"/>
-              </a:defRPr>
-            </a:pPr>
-            <a:r>
-              <a:t>SOCIOS CLAVE</a:t>
-            </a:r>
-          </a:p>
-          <a:p>
-            <a:pPr>
-              <a:defRPr sz="950">
-                <a:solidFill>
-                  <a:srgbClr val="94A3B8"/>
-                </a:solidFill>
-                <a:latin typeface="Arial"/>
-              </a:defRPr>
-            </a:pPr>
-            <a:r>
-              <a:t>• Cámara Compensación (CCE)</a:t>
-            </a:r>
-            <a:br/>
-            <a:r>
-              <a:t>• BCP (Yape) &amp; Interbank (Plim)</a:t>
-            </a:r>
-            <a:br/>
-            <a:r>
-              <a:t>• Cajas Municipales y Rurales</a:t>
-            </a:r>
-            <a:br/>
-            <a:r>
-              <a:t>• Ciberseguridad BCRP</a:t>
-            </a:r>
-          </a:p>
-        </p:txBody>
-      </p:sp>
-      <p:sp>
-        <p:nvSpPr>
-          <p:cNvPr id="7" name="Rounded Rectangle 6"/>
+          <a:bodyPr rtlCol="0" anchor="ctr"/>
+          <a:lstStyle/>
+          <a:p>
+            <a:pPr algn="ctr"/>
+          </a:p>
+        </p:txBody>
+      </p:sp>
+      <p:sp>
+        <p:nvSpPr>
+          <p:cNvPr id="4" name="Rectangle 3"/>
           <p:cNvSpPr/>
           <p:nvPr/>
         </p:nvSpPr>
         <p:spPr>
           <a:xfrm>
-            <a:off x="2880360" y="1645920"/>
-            <a:ext cx="2057400" cy="2926080"/>
-          </a:xfrm>
-          <a:prstGeom prst="roundRect">
+            <a:off x="731520" y="320040"/>
+            <a:ext cx="128016" cy="987552"/>
+          </a:xfrm>
+          <a:prstGeom prst="rect">
             <a:avLst/>
           </a:prstGeom>
           <a:solidFill>
-            <a:srgbClr val="0F192D"/>
+            <a:srgbClr val="0284C7"/>
           </a:solidFill>
-          <a:ln w="12700">
-            <a:solidFill>
-              <a:srgbClr val="23375A"/>
-            </a:solidFill>
+          <a:ln>
+            <a:noFill/>
           </a:ln>
         </p:spPr>
         <p:style>
@@ -4980,68 +6800,101 @@
           </a:fontRef>
         </p:style>
         <p:txBody>
-          <a:bodyPr rtlCol="0" anchor="ctr" wrap="square"/>
-          <a:lstStyle/>
-          <a:p>
-            <a:pPr algn="ctr">
-              <a:defRPr sz="1050" b="1">
-                <a:solidFill>
-                  <a:srgbClr val="00D4FF"/>
-                </a:solidFill>
-                <a:latin typeface="Arial"/>
-              </a:defRPr>
-            </a:pPr>
-            <a:r>
-              <a:t>ACTIVIDADES CLAVE</a:t>
-            </a:r>
-          </a:p>
-          <a:p>
-            <a:pPr>
-              <a:defRPr sz="950">
-                <a:solidFill>
-                  <a:srgbClr val="94A3B8"/>
-                </a:solidFill>
-                <a:latin typeface="Arial"/>
-              </a:defRPr>
-            </a:pPr>
-            <a:r>
-              <a:t>• Polling asíncrono cada 30s</a:t>
-            </a:r>
-            <a:br/>
-            <a:r>
-              <a:t>• Auto-categorización fallas 5xx</a:t>
-            </a:r>
-            <a:br/>
-            <a:r>
-              <a:t>• Registro forense asistido</a:t>
-            </a:r>
-            <a:br/>
-            <a:r>
-              <a:t>• Compilación SFT SHA-256</a:t>
-            </a:r>
-          </a:p>
-        </p:txBody>
-      </p:sp>
-      <p:sp>
-        <p:nvSpPr>
-          <p:cNvPr id="8" name="Rounded Rectangle 7"/>
+          <a:bodyPr rtlCol="0" anchor="ctr"/>
+          <a:lstStyle/>
+          <a:p>
+            <a:pPr algn="ctr"/>
+          </a:p>
+        </p:txBody>
+      </p:sp>
+      <p:sp>
+        <p:nvSpPr>
+          <p:cNvPr id="5" name="TextBox 4"/>
+          <p:cNvSpPr txBox="1"/>
+          <p:nvPr/>
+        </p:nvSpPr>
+        <p:spPr>
+          <a:xfrm>
+            <a:off x="1051560" y="347472"/>
+            <a:ext cx="10149840" cy="914400"/>
+          </a:xfrm>
+          <a:prstGeom prst="rect">
+            <a:avLst/>
+          </a:prstGeom>
+          <a:noFill/>
+        </p:spPr>
+        <p:txBody>
+          <a:bodyPr wrap="square" lIns="0" tIns="0" rIns="0" bIns="0" anchor="t">
+            <a:spAutoFit/>
+          </a:bodyPr>
+          <a:lstStyle/>
+          <a:p>
+            <a:pPr>
+              <a:spcAft>
+                <a:spcPts val="200"/>
+              </a:spcAft>
+              <a:defRPr sz="1150" b="1">
+                <a:solidFill>
+                  <a:srgbClr val="0284C7"/>
+                </a:solidFill>
+                <a:latin typeface="Calibri"/>
+              </a:defRPr>
+            </a:pPr>
+            <a:r>
+              <a:t>CRITERIO 1 DE RÚBRICA • 3.0 PUNTOS</a:t>
+            </a:r>
+          </a:p>
+          <a:p>
+            <a:pPr>
+              <a:spcAft>
+                <a:spcPts val="200"/>
+              </a:spcAft>
+              <a:defRPr sz="2200" b="1">
+                <a:solidFill>
+                  <a:srgbClr val="0B1F3A"/>
+                </a:solidFill>
+                <a:latin typeface="Calibri"/>
+              </a:defRPr>
+            </a:pPr>
+            <a:r>
+              <a:t>Business Model Canvas (BMC) de Supervisión Regulatoria</a:t>
+            </a:r>
+          </a:p>
+          <a:p>
+            <a:pPr>
+              <a:defRPr sz="1200">
+                <a:solidFill>
+                  <a:srgbClr val="64748B"/>
+                </a:solidFill>
+                <a:latin typeface="Calibri"/>
+              </a:defRPr>
+            </a:pPr>
+            <a:r>
+              <a:t>Modelo de generación de valor público articulado como plataforma tecnológica para el Estado Peruano</a:t>
+            </a:r>
+          </a:p>
+        </p:txBody>
+      </p:sp>
+      <p:sp>
+        <p:nvSpPr>
+          <p:cNvPr id="6" name="Rounded Rectangle 5"/>
           <p:cNvSpPr/>
           <p:nvPr/>
         </p:nvSpPr>
         <p:spPr>
           <a:xfrm>
-            <a:off x="5029200" y="1645920"/>
-            <a:ext cx="2133295" cy="4389120"/>
+            <a:off x="731520" y="1508760"/>
+            <a:ext cx="3413455" cy="4892040"/>
           </a:xfrm>
           <a:prstGeom prst="roundRect">
             <a:avLst/>
           </a:prstGeom>
           <a:solidFill>
-            <a:srgbClr val="142341"/>
+            <a:srgbClr val="FFFFFF"/>
           </a:solidFill>
-          <a:ln w="19050">
+          <a:ln w="25400">
             <a:solidFill>
-              <a:srgbClr val="FBBF24"/>
+              <a:srgbClr val="CBD5E1"/>
             </a:solidFill>
           </a:ln>
         </p:spPr>
@@ -5060,77 +6913,96 @@
           </a:fontRef>
         </p:style>
         <p:txBody>
-          <a:bodyPr rtlCol="0" anchor="ctr" wrap="square"/>
+          <a:bodyPr rtlCol="0" anchor="t" wrap="square" tIns="182880" lIns="201168"/>
           <a:lstStyle/>
           <a:p>
             <a:pPr algn="ctr">
-              <a:defRPr sz="1050" b="1">
-                <a:solidFill>
-                  <a:srgbClr val="FBBF24"/>
-                </a:solidFill>
-                <a:latin typeface="Arial"/>
-              </a:defRPr>
-            </a:pPr>
-            <a:r>
-              <a:t>PROPUESTA DE VALOR</a:t>
+              <a:spcAft>
+                <a:spcPts val="800"/>
+              </a:spcAft>
+              <a:defRPr sz="1500" b="1">
+                <a:solidFill>
+                  <a:srgbClr val="0B1F3A"/>
+                </a:solidFill>
+                <a:latin typeface="Calibri"/>
+              </a:defRPr>
+            </a:pPr>
+            <a:r>
+              <a:t>🤝 SOCIOS Y ACTIVIDADES</a:t>
+            </a:r>
+          </a:p>
+          <a:p>
+            <a:pPr>
+              <a:defRPr sz="1250">
+                <a:solidFill>
+                  <a:srgbClr val="334155"/>
+                </a:solidFill>
+                <a:latin typeface="Calibri"/>
+              </a:defRPr>
+            </a:pPr>
+            <a:r>
+              <a:t>SOCIOS CLAVE:</a:t>
             </a:r>
             <a:br/>
             <a:r>
-              <a:t>(IMPACTO CENTRAL)</a:t>
-            </a:r>
-          </a:p>
-          <a:p>
-            <a:pPr>
-              <a:defRPr sz="950">
-                <a:solidFill>
-                  <a:srgbClr val="FFFFFF"/>
-                </a:solidFill>
-                <a:latin typeface="Arial"/>
-              </a:defRPr>
-            </a:pPr>
-            <a:r>
-              <a:t>REDUCCIÓN DRÁSTICA:</a:t>
+              <a:t>• Cámara de Compensación Electrónica (CCE)</a:t>
             </a:r>
             <a:br/>
             <a:r>
-              <a:t>De 180 min a &lt;30 seg en detección de indisponibilidad.</a:t>
+              <a:t>• BCP (Yape) &amp; Interbank (Plim)</a:t>
+            </a:r>
+            <a:br/>
+            <a:r>
+              <a:t>• Cajas Municipales (Cusco) y Financieras</a:t>
+            </a:r>
+            <a:br/>
+            <a:r>
+              <a:t>• División de Ciberseguridad BCRP</a:t>
             </a:r>
             <a:br/>
             <a:br/>
             <a:r>
-              <a:t>• Cero asimetría informativa</a:t>
+              <a:t>ACTIVIDADES CLAVE:</a:t>
             </a:r>
             <a:br/>
             <a:r>
-              <a:t>• Inmutabilidad probatoria</a:t>
+              <a:t>• Sondeo asíncrono no bloqueante cada 30s</a:t>
             </a:r>
             <a:br/>
             <a:r>
-              <a:t>• Automatización integral</a:t>
-            </a:r>
-          </a:p>
-        </p:txBody>
-      </p:sp>
-      <p:sp>
-        <p:nvSpPr>
-          <p:cNvPr id="9" name="Rounded Rectangle 8"/>
+              <a:t>• Auto-categorización de fallas HTTP 5xx</a:t>
+            </a:r>
+            <a:br/>
+            <a:r>
+              <a:t>• Registro asistido de brechas y fraude</a:t>
+            </a:r>
+            <a:br/>
+            <a:r>
+              <a:t>• Compilación de archivo SFT con SHA-256</a:t>
+            </a:r>
+          </a:p>
+        </p:txBody>
+      </p:sp>
+      <p:sp>
+        <p:nvSpPr>
+          <p:cNvPr id="7" name="Rounded Rectangle 6"/>
           <p:cNvSpPr/>
           <p:nvPr/>
         </p:nvSpPr>
         <p:spPr>
           <a:xfrm>
-            <a:off x="7269480" y="1645920"/>
-            <a:ext cx="2057400" cy="2926080"/>
+            <a:off x="4389120" y="1508760"/>
+            <a:ext cx="3962095" cy="4892040"/>
           </a:xfrm>
           <a:prstGeom prst="roundRect">
             <a:avLst/>
           </a:prstGeom>
           <a:solidFill>
-            <a:srgbClr val="0F192D"/>
+            <a:srgbClr val="FFFFFF"/>
           </a:solidFill>
-          <a:ln w="12700">
+          <a:ln w="25400">
             <a:solidFill>
-              <a:srgbClr val="23375A"/>
+              <a:srgbClr val="93C5FD"/>
             </a:solidFill>
           </a:ln>
         </p:spPr>
@@ -5149,64 +7021,90 @@
           </a:fontRef>
         </p:style>
         <p:txBody>
-          <a:bodyPr rtlCol="0" anchor="ctr" wrap="square"/>
+          <a:bodyPr rtlCol="0" anchor="t" wrap="square" tIns="182880" lIns="201168"/>
           <a:lstStyle/>
           <a:p>
             <a:pPr algn="ctr">
-              <a:defRPr sz="1050" b="1">
-                <a:solidFill>
-                  <a:srgbClr val="00D4FF"/>
-                </a:solidFill>
-                <a:latin typeface="Arial"/>
-              </a:defRPr>
-            </a:pPr>
-            <a:r>
-              <a:t>CANALES DE ACCESO</a:t>
-            </a:r>
-          </a:p>
-          <a:p>
-            <a:pPr>
-              <a:defRPr sz="950">
-                <a:solidFill>
-                  <a:srgbClr val="94A3B8"/>
-                </a:solidFill>
-                <a:latin typeface="Arial"/>
-              </a:defRPr>
-            </a:pPr>
-            <a:r>
-              <a:t>• Consola Web NOC en vivo</a:t>
+              <a:spcAft>
+                <a:spcPts val="800"/>
+              </a:spcAft>
+              <a:defRPr sz="1500" b="1">
+                <a:solidFill>
+                  <a:srgbClr val="0B1F3A"/>
+                </a:solidFill>
+                <a:latin typeface="Calibri"/>
+              </a:defRPr>
+            </a:pPr>
+            <a:r>
+              <a:t>💎 PROPUESTA DE VALOR CENTRAL</a:t>
+            </a:r>
+          </a:p>
+          <a:p>
+            <a:pPr>
+              <a:defRPr sz="1250">
+                <a:solidFill>
+                  <a:srgbClr val="334155"/>
+                </a:solidFill>
+                <a:latin typeface="Calibri"/>
+              </a:defRPr>
+            </a:pPr>
+            <a:r>
+              <a:t>REDUCCIÓN RADICAL DEL TIEMPO:</a:t>
             </a:r>
             <a:br/>
             <a:r>
-              <a:t>• APIs REST seguras (OpenAPI)</a:t>
+              <a:t>De 180 minutos a menos de 30 segundos</a:t>
             </a:r>
             <a:br/>
-            <a:r>
-              <a:t>• SFTP regulatorio cifrado</a:t>
-            </a:r>
-          </a:p>
-        </p:txBody>
-      </p:sp>
-      <p:sp>
-        <p:nvSpPr>
-          <p:cNvPr id="10" name="Rounded Rectangle 9"/>
+            <a:br/>
+            <a:r>
+              <a:t>• CERO ASIMETRÍA INFORMATIVA:</a:t>
+            </a:r>
+            <a:br/>
+            <a:r>
+              <a:t>Observabilidad en tiempo real sobre el estado del switch interbancario nacional.</a:t>
+            </a:r>
+            <a:br/>
+            <a:br/>
+            <a:r>
+              <a:t>• INMUTABILIDAD PROBATORIA:</a:t>
+            </a:r>
+            <a:br/>
+            <a:r>
+              <a:t>Almacenamiento no repudiable de contingencias transaccionales.</a:t>
+            </a:r>
+            <a:br/>
+            <a:br/>
+            <a:r>
+              <a:t>• AUTONOMÍA REGULATORIA:</a:t>
+            </a:r>
+            <a:br/>
+            <a:r>
+              <a:t>Cumplimiento de la Circular BCRP N° 0011-2023.</a:t>
+            </a:r>
+          </a:p>
+        </p:txBody>
+      </p:sp>
+      <p:sp>
+        <p:nvSpPr>
+          <p:cNvPr id="8" name="Rounded Rectangle 7"/>
           <p:cNvSpPr/>
           <p:nvPr/>
         </p:nvSpPr>
         <p:spPr>
           <a:xfrm>
-            <a:off x="9418320" y="1645920"/>
-            <a:ext cx="2057400" cy="2926080"/>
+            <a:off x="8595360" y="1508760"/>
+            <a:ext cx="2864815" cy="4892040"/>
           </a:xfrm>
           <a:prstGeom prst="roundRect">
             <a:avLst/>
           </a:prstGeom>
           <a:solidFill>
-            <a:srgbClr val="0F192D"/>
+            <a:srgbClr val="FFFFFF"/>
           </a:solidFill>
-          <a:ln w="12700">
+          <a:ln w="25400">
             <a:solidFill>
-              <a:srgbClr val="23375A"/>
+              <a:srgbClr val="FCD34D"/>
             </a:solidFill>
           </a:ln>
         </p:spPr>
@@ -5225,176 +7123,73 @@
           </a:fontRef>
         </p:style>
         <p:txBody>
-          <a:bodyPr rtlCol="0" anchor="ctr" wrap="square"/>
+          <a:bodyPr rtlCol="0" anchor="t" wrap="square" tIns="182880" lIns="201168"/>
           <a:lstStyle/>
           <a:p>
             <a:pPr algn="ctr">
-              <a:defRPr sz="1050" b="1">
-                <a:solidFill>
-                  <a:srgbClr val="00D4FF"/>
-                </a:solidFill>
-                <a:latin typeface="Arial"/>
-              </a:defRPr>
-            </a:pPr>
-            <a:r>
-              <a:t>SEGMENTO USUARIOS</a:t>
-            </a:r>
-          </a:p>
-          <a:p>
-            <a:pPr>
-              <a:defRPr sz="950">
-                <a:solidFill>
-                  <a:srgbClr val="94A3B8"/>
-                </a:solidFill>
-                <a:latin typeface="Arial"/>
-              </a:defRPr>
-            </a:pPr>
-            <a:r>
-              <a:t>• Operadores de Sala NOC</a:t>
+              <a:spcAft>
+                <a:spcPts val="800"/>
+              </a:spcAft>
+              <a:defRPr sz="1500" b="1">
+                <a:solidFill>
+                  <a:srgbClr val="0B1F3A"/>
+                </a:solidFill>
+                <a:latin typeface="Calibri"/>
+              </a:defRPr>
+            </a:pPr>
+            <a:r>
+              <a:t>📢 CANALES Y BENEFICIARIOS</a:t>
+            </a:r>
+          </a:p>
+          <a:p>
+            <a:pPr>
+              <a:defRPr sz="1250">
+                <a:solidFill>
+                  <a:srgbClr val="334155"/>
+                </a:solidFill>
+                <a:latin typeface="Calibri"/>
+              </a:defRPr>
+            </a:pPr>
+            <a:r>
+              <a:t>CANALES DE INTERACCIÓN:</a:t>
             </a:r>
             <a:br/>
             <a:r>
-              <a:t>• Analistas de Cumplimiento BCRP</a:t>
+              <a:t>• Consola Web NOC en tiempo real</a:t>
             </a:r>
             <a:br/>
             <a:r>
-              <a:t>• Oficiales de Riesgo Bancario</a:t>
-            </a:r>
-          </a:p>
-        </p:txBody>
-      </p:sp>
-      <p:sp>
-        <p:nvSpPr>
-          <p:cNvPr id="11" name="Rounded Rectangle 10"/>
-          <p:cNvSpPr/>
-          <p:nvPr/>
-        </p:nvSpPr>
-        <p:spPr>
-          <a:xfrm>
-            <a:off x="731520" y="4663440"/>
-            <a:ext cx="4206240" cy="1371600"/>
-          </a:xfrm>
-          <a:prstGeom prst="roundRect">
-            <a:avLst/>
-          </a:prstGeom>
-          <a:solidFill>
-            <a:srgbClr val="0F192D"/>
-          </a:solidFill>
-          <a:ln w="12700">
-            <a:solidFill>
-              <a:srgbClr val="23375A"/>
-            </a:solidFill>
-          </a:ln>
-        </p:spPr>
-        <p:style>
-          <a:lnRef idx="1">
-            <a:schemeClr val="accent1"/>
-          </a:lnRef>
-          <a:fillRef idx="3">
-            <a:schemeClr val="accent1"/>
-          </a:fillRef>
-          <a:effectRef idx="2">
-            <a:schemeClr val="accent1"/>
-          </a:effectRef>
-          <a:fontRef idx="minor">
-            <a:schemeClr val="lt1"/>
-          </a:fontRef>
-        </p:style>
-        <p:txBody>
-          <a:bodyPr rtlCol="0" anchor="ctr" wrap="square"/>
-          <a:lstStyle/>
-          <a:p>
-            <a:pPr algn="ctr">
-              <a:defRPr sz="1050" b="1">
-                <a:solidFill>
-                  <a:srgbClr val="00D4FF"/>
-                </a:solidFill>
-                <a:latin typeface="Arial"/>
-              </a:defRPr>
-            </a:pPr>
-            <a:r>
-              <a:t>RECURSOS CLAVE</a:t>
-            </a:r>
-          </a:p>
-          <a:p>
-            <a:pPr>
-              <a:defRPr sz="950">
-                <a:solidFill>
-                  <a:srgbClr val="94A3B8"/>
-                </a:solidFill>
-                <a:latin typeface="Arial"/>
-              </a:defRPr>
-            </a:pPr>
-            <a:r>
-              <a:t>Backend Java 17 Spring Boot (Hexagonal) • PostgreSQL 15 Inmutable • SPA NOC Web</a:t>
-            </a:r>
-          </a:p>
-        </p:txBody>
-      </p:sp>
-      <p:sp>
-        <p:nvSpPr>
-          <p:cNvPr id="12" name="Rounded Rectangle 11"/>
-          <p:cNvSpPr/>
-          <p:nvPr/>
-        </p:nvSpPr>
-        <p:spPr>
-          <a:xfrm>
-            <a:off x="7269480" y="4663440"/>
-            <a:ext cx="4206240" cy="1371600"/>
-          </a:xfrm>
-          <a:prstGeom prst="roundRect">
-            <a:avLst/>
-          </a:prstGeom>
-          <a:solidFill>
-            <a:srgbClr val="142341"/>
-          </a:solidFill>
-          <a:ln w="19050">
-            <a:solidFill>
-              <a:srgbClr val="10B981"/>
-            </a:solidFill>
-          </a:ln>
-        </p:spPr>
-        <p:style>
-          <a:lnRef idx="1">
-            <a:schemeClr val="accent1"/>
-          </a:lnRef>
-          <a:fillRef idx="3">
-            <a:schemeClr val="accent1"/>
-          </a:fillRef>
-          <a:effectRef idx="2">
-            <a:schemeClr val="accent1"/>
-          </a:effectRef>
-          <a:fontRef idx="minor">
-            <a:schemeClr val="lt1"/>
-          </a:fontRef>
-        </p:style>
-        <p:txBody>
-          <a:bodyPr rtlCol="0" anchor="ctr" wrap="square"/>
-          <a:lstStyle/>
-          <a:p>
-            <a:pPr algn="ctr">
-              <a:defRPr sz="1050" b="1">
-                <a:solidFill>
-                  <a:srgbClr val="10B981"/>
-                </a:solidFill>
-                <a:latin typeface="Arial"/>
-              </a:defRPr>
-            </a:pPr>
-            <a:r>
-              <a:t>RETORNO DE VALOR PÚBLICO</a:t>
-            </a:r>
-          </a:p>
-          <a:p>
-            <a:pPr>
-              <a:defRPr sz="950">
-                <a:solidFill>
-                  <a:srgbClr val="94A3B8"/>
-                </a:solidFill>
-                <a:latin typeface="Arial"/>
-              </a:defRPr>
-            </a:pPr>
-            <a:r>
-              <a:t>Preservación de la confianza en el dinero digital • Mitigación de riesgos sistémicos</a:t>
+              <a:t>• APIs REST documentadas OpenAPI 3.0</a:t>
+            </a:r>
+            <a:br/>
+            <a:r>
+              <a:t>• Servidor SFTP oficial para reportes SFT</a:t>
+            </a:r>
+            <a:br/>
+            <a:br/>
+            <a:r>
+              <a:t>SEGMENTOS ATENDIDOS:</a:t>
+            </a:r>
+            <a:br/>
+            <a:r>
+              <a:t>• Operadores de Sala NOC BCRP</a:t>
+            </a:r>
+            <a:br/>
+            <a:r>
+              <a:t>• Analistas Regulatorios BCRP</a:t>
+            </a:r>
+            <a:br/>
+            <a:r>
+              <a:t>• Oficiales de Cumplimiento Bancario</a:t>
+            </a:r>
+            <a:br/>
+            <a:br/>
+            <a:r>
+              <a:t>RETORNO DE VALOR PÚBLICO:</a:t>
+            </a:r>
+            <a:br/>
+            <a:r>
+              <a:t>Estabilidad financiera y confianza ciudadana.</a:t>
             </a:r>
           </a:p>
         </p:txBody>
@@ -5432,7 +7227,7 @@
             <a:avLst/>
           </a:prstGeom>
           <a:solidFill>
-            <a:srgbClr val="070D18"/>
+            <a:srgbClr val="F8FAFC"/>
           </a:solidFill>
           <a:ln>
             <a:noFill/>
@@ -5462,132 +7257,24 @@
       </p:sp>
       <p:sp>
         <p:nvSpPr>
-          <p:cNvPr id="3" name="TextBox 2"/>
-          <p:cNvSpPr txBox="1"/>
+          <p:cNvPr id="3" name="Rectangle 2"/>
+          <p:cNvSpPr/>
           <p:nvPr/>
         </p:nvSpPr>
         <p:spPr>
           <a:xfrm>
-            <a:off x="731520" y="365760"/>
-            <a:ext cx="7315200" cy="320040"/>
+            <a:off x="731520" y="320040"/>
+            <a:ext cx="10728655" cy="987552"/>
           </a:xfrm>
           <a:prstGeom prst="rect">
             <a:avLst/>
           </a:prstGeom>
-          <a:noFill/>
-        </p:spPr>
-        <p:txBody>
-          <a:bodyPr wrap="square">
-            <a:spAutoFit/>
-          </a:bodyPr>
-          <a:lstStyle/>
-          <a:p>
-            <a:pPr>
-              <a:defRPr sz="950" b="1">
-                <a:solidFill>
-                  <a:srgbClr val="00D4FF"/>
-                </a:solidFill>
-                <a:latin typeface="Arial"/>
-              </a:defRPr>
-            </a:pPr>
-            <a:r>
-              <a:t>CRITERIO 2 DE RÚBRICA • 2.0 PUNTOS</a:t>
-            </a:r>
-          </a:p>
-        </p:txBody>
-      </p:sp>
-      <p:sp>
-        <p:nvSpPr>
-          <p:cNvPr id="4" name="TextBox 3"/>
-          <p:cNvSpPr txBox="1"/>
-          <p:nvPr/>
-        </p:nvSpPr>
-        <p:spPr>
-          <a:xfrm>
-            <a:off x="731520" y="640080"/>
-            <a:ext cx="10515600" cy="502920"/>
-          </a:xfrm>
-          <a:prstGeom prst="rect">
-            <a:avLst/>
-          </a:prstGeom>
-          <a:noFill/>
-        </p:spPr>
-        <p:txBody>
-          <a:bodyPr wrap="square">
-            <a:spAutoFit/>
-          </a:bodyPr>
-          <a:lstStyle/>
-          <a:p>
-            <a:pPr>
-              <a:defRPr sz="2200" b="1">
-                <a:solidFill>
-                  <a:srgbClr val="FFFFFF"/>
-                </a:solidFill>
-                <a:latin typeface="Arial"/>
-              </a:defRPr>
-            </a:pPr>
-            <a:r>
-              <a:t>Evaluación de las 3 Alternativas de Solución TIC</a:t>
-            </a:r>
-          </a:p>
-        </p:txBody>
-      </p:sp>
-      <p:sp>
-        <p:nvSpPr>
-          <p:cNvPr id="5" name="TextBox 4"/>
-          <p:cNvSpPr txBox="1"/>
-          <p:nvPr/>
-        </p:nvSpPr>
-        <p:spPr>
-          <a:xfrm>
-            <a:off x="731520" y="1143000"/>
-            <a:ext cx="10515600" cy="320040"/>
-          </a:xfrm>
-          <a:prstGeom prst="rect">
-            <a:avLst/>
-          </a:prstGeom>
-          <a:noFill/>
-        </p:spPr>
-        <p:txBody>
-          <a:bodyPr wrap="square">
-            <a:spAutoFit/>
-          </a:bodyPr>
-          <a:lstStyle/>
-          <a:p>
-            <a:pPr>
-              <a:defRPr sz="1100">
-                <a:solidFill>
-                  <a:srgbClr val="94A3B8"/>
-                </a:solidFill>
-                <a:latin typeface="Arial"/>
-              </a:defRPr>
-            </a:pPr>
-            <a:r>
-              <a:t>Cumplimiento estricto de la directiva: Cada alternativa cuenta con &gt;= 50% Java y 5 Pantallas</a:t>
-            </a:r>
-          </a:p>
-        </p:txBody>
-      </p:sp>
-      <p:sp>
-        <p:nvSpPr>
-          <p:cNvPr id="6" name="Rounded Rectangle 5"/>
-          <p:cNvSpPr/>
-          <p:nvPr/>
-        </p:nvSpPr>
-        <p:spPr>
-          <a:xfrm>
-            <a:off x="731520" y="1554480"/>
-            <a:ext cx="10728655" cy="502920"/>
-          </a:xfrm>
-          <a:prstGeom prst="roundRect">
-            <a:avLst/>
-          </a:prstGeom>
           <a:solidFill>
-            <a:srgbClr val="281419"/>
+            <a:srgbClr val="FFFFFF"/>
           </a:solidFill>
-          <a:ln>
+          <a:ln w="19050">
             <a:solidFill>
-              <a:srgbClr val="F43F5E"/>
+              <a:srgbClr val="CBD5E1"/>
             </a:solidFill>
           </a:ln>
         </p:spPr>
@@ -5609,41 +7296,29 @@
           <a:bodyPr rtlCol="0" anchor="ctr"/>
           <a:lstStyle/>
           <a:p>
-            <a:pPr algn="ctr">
-              <a:defRPr sz="1050" b="1">
-                <a:solidFill>
-                  <a:srgbClr val="FECDD3"/>
-                </a:solidFill>
-                <a:latin typeface="Arial"/>
-              </a:defRPr>
-            </a:pPr>
-            <a:r>
-              <a:t>REALIDAD PROBLEMÁTICA: Detección manual tardía (45 a 180 min), dispersión de canales y asimetría de información en el switch de pagos.</a:t>
-            </a:r>
-          </a:p>
-        </p:txBody>
-      </p:sp>
-      <p:sp>
-        <p:nvSpPr>
-          <p:cNvPr id="7" name="Rounded Rectangle 6"/>
+            <a:pPr algn="ctr"/>
+          </a:p>
+        </p:txBody>
+      </p:sp>
+      <p:sp>
+        <p:nvSpPr>
+          <p:cNvPr id="4" name="Rectangle 3"/>
           <p:cNvSpPr/>
           <p:nvPr/>
         </p:nvSpPr>
         <p:spPr>
           <a:xfrm>
-            <a:off x="731520" y="2194560"/>
-            <a:ext cx="3413455" cy="4114800"/>
-          </a:xfrm>
-          <a:prstGeom prst="roundRect">
+            <a:off x="731520" y="320040"/>
+            <a:ext cx="128016" cy="987552"/>
+          </a:xfrm>
+          <a:prstGeom prst="rect">
             <a:avLst/>
           </a:prstGeom>
           <a:solidFill>
-            <a:srgbClr val="0F192D"/>
+            <a:srgbClr val="0284C7"/>
           </a:solidFill>
-          <a:ln w="12700">
-            <a:solidFill>
-              <a:srgbClr val="23375A"/>
-            </a:solidFill>
+          <a:ln>
+            <a:noFill/>
           </a:ln>
         </p:spPr>
         <p:style>
@@ -5661,118 +7336,101 @@
           </a:fontRef>
         </p:style>
         <p:txBody>
-          <a:bodyPr rtlCol="0" anchor="ctr" wrap="square"/>
-          <a:lstStyle/>
-          <a:p>
-            <a:pPr algn="ctr">
-              <a:defRPr sz="1100" b="1">
-                <a:solidFill>
-                  <a:srgbClr val="FFFFFF"/>
-                </a:solidFill>
-                <a:latin typeface="Arial"/>
-              </a:defRPr>
-            </a:pPr>
-            <a:r>
-              <a:t>ALTERNATIVA 1: MONOLITO MVC</a:t>
-            </a:r>
-          </a:p>
-          <a:p>
-            <a:pPr>
-              <a:defRPr sz="900">
-                <a:solidFill>
-                  <a:srgbClr val="94A3B8"/>
-                </a:solidFill>
-                <a:latin typeface="Arial"/>
-              </a:defRPr>
-            </a:pPr>
-            <a:r>
-              <a:t>Spring Boot 3 + Thymeleaf + PostgreSQL</a:t>
-            </a:r>
-            <a:br/>
-          </a:p>
-          <a:p>
-            <a:pPr>
-              <a:defRPr sz="1000" b="1">
-                <a:solidFill>
-                  <a:srgbClr val="00D4FF"/>
-                </a:solidFill>
-                <a:latin typeface="Arial"/>
-              </a:defRPr>
-            </a:pPr>
-            <a:r>
-              <a:t>85% DESARROLLO JAVA</a:t>
-            </a:r>
-          </a:p>
-          <a:p>
-            <a:br/>
-            <a:pPr>
-              <a:defRPr sz="900">
-                <a:solidFill>
-                  <a:srgbClr val="94A3B8"/>
-                </a:solidFill>
-                <a:latin typeface="Arial"/>
-              </a:defRPr>
-            </a:pPr>
-            <a:r>
-              <a:t>5 Pantallas Diseñadas:</a:t>
-            </a:r>
-            <a:br/>
-            <a:r>
-              <a:t>1. Login AD con Spring Security</a:t>
-            </a:r>
-            <a:br/>
-            <a:r>
-              <a:t>2. Tablero de Entidades Thymeleaf</a:t>
-            </a:r>
-            <a:br/>
-            <a:r>
-              <a:t>3. Formulario con Data Binding</a:t>
-            </a:r>
-            <a:br/>
-            <a:r>
-              <a:t>4. Bitácora de Auditoría</a:t>
-            </a:r>
-            <a:br/>
-            <a:r>
-              <a:t>5. Visor de Reporte SFT</a:t>
-            </a:r>
-            <a:br/>
-          </a:p>
-          <a:p>
-            <a:pPr>
-              <a:defRPr sz="1000" b="1">
-                <a:solidFill>
-                  <a:srgbClr val="F43F5E"/>
-                </a:solidFill>
-                <a:latin typeface="Arial"/>
-              </a:defRPr>
-            </a:pPr>
-            <a:r>
-              <a:t>Descarte: Baja reactividad en sala NOC por recargas HTTP completas.</a:t>
-            </a:r>
-          </a:p>
-        </p:txBody>
-      </p:sp>
-      <p:sp>
-        <p:nvSpPr>
-          <p:cNvPr id="8" name="Rounded Rectangle 7"/>
+          <a:bodyPr rtlCol="0" anchor="ctr"/>
+          <a:lstStyle/>
+          <a:p>
+            <a:pPr algn="ctr"/>
+          </a:p>
+        </p:txBody>
+      </p:sp>
+      <p:sp>
+        <p:nvSpPr>
+          <p:cNvPr id="5" name="TextBox 4"/>
+          <p:cNvSpPr txBox="1"/>
+          <p:nvPr/>
+        </p:nvSpPr>
+        <p:spPr>
+          <a:xfrm>
+            <a:off x="1051560" y="347472"/>
+            <a:ext cx="10149840" cy="914400"/>
+          </a:xfrm>
+          <a:prstGeom prst="rect">
+            <a:avLst/>
+          </a:prstGeom>
+          <a:noFill/>
+        </p:spPr>
+        <p:txBody>
+          <a:bodyPr wrap="square" lIns="0" tIns="0" rIns="0" bIns="0" anchor="t">
+            <a:spAutoFit/>
+          </a:bodyPr>
+          <a:lstStyle/>
+          <a:p>
+            <a:pPr>
+              <a:spcAft>
+                <a:spcPts val="200"/>
+              </a:spcAft>
+              <a:defRPr sz="1150" b="1">
+                <a:solidFill>
+                  <a:srgbClr val="0284C7"/>
+                </a:solidFill>
+                <a:latin typeface="Calibri"/>
+              </a:defRPr>
+            </a:pPr>
+            <a:r>
+              <a:t>CRITERIO 2 DE RÚBRICA • 2.0 PUNTOS</a:t>
+            </a:r>
+          </a:p>
+          <a:p>
+            <a:pPr>
+              <a:spcAft>
+                <a:spcPts val="200"/>
+              </a:spcAft>
+              <a:defRPr sz="2200" b="1">
+                <a:solidFill>
+                  <a:srgbClr val="0B1F3A"/>
+                </a:solidFill>
+                <a:latin typeface="Calibri"/>
+              </a:defRPr>
+            </a:pPr>
+            <a:r>
+              <a:t>Evaluación de las 3 Alternativas de Solución TIC</a:t>
+            </a:r>
+          </a:p>
+          <a:p>
+            <a:pPr>
+              <a:defRPr sz="1200">
+                <a:solidFill>
+                  <a:srgbClr val="64748B"/>
+                </a:solidFill>
+                <a:latin typeface="Calibri"/>
+              </a:defRPr>
+            </a:pPr>
+            <a:r>
+              <a:t>Directiva Oficial: Cada alternativa cuenta con &gt;= 50% Java y no menos de 5 Pantallas</a:t>
+            </a:r>
+          </a:p>
+        </p:txBody>
+      </p:sp>
+      <p:sp>
+        <p:nvSpPr>
+          <p:cNvPr id="6" name="Rounded Rectangle 5"/>
           <p:cNvSpPr/>
           <p:nvPr/>
         </p:nvSpPr>
         <p:spPr>
           <a:xfrm>
-            <a:off x="4389120" y="2194560"/>
-            <a:ext cx="3413455" cy="4114800"/>
+            <a:off x="731520" y="1417320"/>
+            <a:ext cx="10728655" cy="502920"/>
           </a:xfrm>
           <a:prstGeom prst="roundRect">
             <a:avLst/>
           </a:prstGeom>
           <a:solidFill>
-            <a:srgbClr val="142341"/>
+            <a:srgbClr val="FFF1F2"/>
           </a:solidFill>
-          <a:ln w="25400">
+          <a:ln w="19050">
             <a:solidFill>
-              <a:srgbClr val="00D4FF"/>
+              <a:srgbClr val="E11D48"/>
             </a:solidFill>
           </a:ln>
         </p:spPr>
@@ -5791,118 +7449,43 @@
           </a:fontRef>
         </p:style>
         <p:txBody>
-          <a:bodyPr rtlCol="0" anchor="ctr" wrap="square"/>
+          <a:bodyPr rtlCol="0" anchor="ctr"/>
           <a:lstStyle/>
           <a:p>
             <a:pPr algn="ctr">
-              <a:defRPr sz="1100" b="1">
-                <a:solidFill>
-                  <a:srgbClr val="FBBF24"/>
-                </a:solidFill>
-                <a:latin typeface="Arial"/>
-              </a:defRPr>
-            </a:pPr>
-            <a:r>
-              <a:t>ALTERNATIVA 2 (SELECCIONADA)</a:t>
-            </a:r>
-          </a:p>
-          <a:p>
-            <a:pPr>
-              <a:defRPr sz="900">
-                <a:solidFill>
-                  <a:srgbClr val="94A3B8"/>
-                </a:solidFill>
-                <a:latin typeface="Arial"/>
-              </a:defRPr>
-            </a:pPr>
-            <a:r>
-              <a:t>Spring Boot 3 REST API + SPA NOC + PostgreSQL 15</a:t>
-            </a:r>
-            <a:br/>
-          </a:p>
-          <a:p>
-            <a:pPr>
-              <a:defRPr sz="1000" b="1">
-                <a:solidFill>
-                  <a:srgbClr val="00D4FF"/>
-                </a:solidFill>
-                <a:latin typeface="Arial"/>
-              </a:defRPr>
-            </a:pPr>
-            <a:r>
-              <a:t>65% DESARROLLO JAVA</a:t>
-            </a:r>
-          </a:p>
-          <a:p>
-            <a:br/>
-            <a:pPr>
-              <a:defRPr sz="900">
-                <a:solidFill>
-                  <a:srgbClr val="94A3B8"/>
-                </a:solidFill>
-                <a:latin typeface="Arial"/>
-              </a:defRPr>
-            </a:pPr>
-            <a:r>
-              <a:t>5 Pantallas Implementadas:</a:t>
-            </a:r>
-            <a:br/>
-            <a:r>
-              <a:t>1. Header corporativo AD (Sesión única)</a:t>
-            </a:r>
-            <a:br/>
-            <a:r>
-              <a:t>2. Barra telemétrica en vivo (Yape, Plim, CCE)</a:t>
-            </a:r>
-            <a:br/>
-            <a:r>
-              <a:t>3. Matriz reactiva de incidentes con filtros</a:t>
-            </a:r>
-            <a:br/>
-            <a:r>
-              <a:t>4. Modal asistido de registro de fraude</a:t>
-            </a:r>
-            <a:br/>
-            <a:r>
-              <a:t>5. Compilador normativo SFT con SHA-256</a:t>
-            </a:r>
-            <a:br/>
-          </a:p>
-          <a:p>
-            <a:pPr>
-              <a:defRPr sz="1000" b="1">
-                <a:solidFill>
-                  <a:srgbClr val="10B981"/>
-                </a:solidFill>
-                <a:latin typeface="Arial"/>
-              </a:defRPr>
-            </a:pPr>
-            <a:r>
-              <a:t>⭐ Ganadora Multicriterio: 4.97 / 5.00 Puntos</a:t>
-            </a:r>
-          </a:p>
-        </p:txBody>
-      </p:sp>
-      <p:sp>
-        <p:nvSpPr>
-          <p:cNvPr id="9" name="Rounded Rectangle 8"/>
+              <a:defRPr sz="1300" b="1">
+                <a:solidFill>
+                  <a:srgbClr val="E11D48"/>
+                </a:solidFill>
+                <a:latin typeface="Calibri"/>
+              </a:defRPr>
+            </a:pPr>
+            <a:r>
+              <a:t>REALIDAD PROBLEMÁTICA: Demora de 45 a 180 min por reportes tardíos vía correos o quejas en redes sociales.</a:t>
+            </a:r>
+          </a:p>
+        </p:txBody>
+      </p:sp>
+      <p:sp>
+        <p:nvSpPr>
+          <p:cNvPr id="7" name="Rounded Rectangle 6"/>
           <p:cNvSpPr/>
           <p:nvPr/>
         </p:nvSpPr>
         <p:spPr>
           <a:xfrm>
-            <a:off x="8046720" y="2194560"/>
-            <a:ext cx="3413455" cy="4114800"/>
+            <a:off x="731520" y="2057400"/>
+            <a:ext cx="3413455" cy="4434840"/>
           </a:xfrm>
           <a:prstGeom prst="roundRect">
             <a:avLst/>
           </a:prstGeom>
           <a:solidFill>
-            <a:srgbClr val="0F192D"/>
+            <a:srgbClr val="FFFFFF"/>
           </a:solidFill>
-          <a:ln w="12700">
+          <a:ln w="15240">
             <a:solidFill>
-              <a:srgbClr val="23375A"/>
+              <a:srgbClr val="CBD5E1"/>
             </a:solidFill>
           </a:ln>
         </p:spPr>
@@ -5921,15 +7504,304 @@
           </a:fontRef>
         </p:style>
         <p:txBody>
-          <a:bodyPr rtlCol="0" anchor="ctr" wrap="square"/>
+          <a:bodyPr rtlCol="0" anchor="t" wrap="square" tIns="164592" lIns="182880"/>
           <a:lstStyle/>
           <a:p>
             <a:pPr algn="ctr">
-              <a:defRPr sz="1100" b="1">
-                <a:solidFill>
-                  <a:srgbClr val="FFFFFF"/>
-                </a:solidFill>
-                <a:latin typeface="Arial"/>
+              <a:spcAft>
+                <a:spcPts val="200"/>
+              </a:spcAft>
+              <a:defRPr sz="1400" b="1">
+                <a:solidFill>
+                  <a:srgbClr val="0B1F3A"/>
+                </a:solidFill>
+                <a:latin typeface="Calibri"/>
+              </a:defRPr>
+            </a:pPr>
+            <a:r>
+              <a:t>ALTERNATIVA 1: MONOLITO MVC</a:t>
+            </a:r>
+          </a:p>
+          <a:p>
+            <a:pPr>
+              <a:spcAft>
+                <a:spcPts val="600"/>
+              </a:spcAft>
+              <a:defRPr sz="1150">
+                <a:solidFill>
+                  <a:srgbClr val="64748B"/>
+                </a:solidFill>
+                <a:latin typeface="Calibri"/>
+              </a:defRPr>
+            </a:pPr>
+            <a:r>
+              <a:t>Spring Boot 3 + Thymeleaf + PostgreSQL</a:t>
+            </a:r>
+          </a:p>
+          <a:p>
+            <a:pPr>
+              <a:spcAft>
+                <a:spcPts val="600"/>
+              </a:spcAft>
+              <a:defRPr sz="1300" b="1">
+                <a:solidFill>
+                  <a:srgbClr val="0284C7"/>
+                </a:solidFill>
+                <a:latin typeface="Calibri"/>
+              </a:defRPr>
+            </a:pPr>
+            <a:r>
+              <a:t>85% DESARROLLO EN JAVA</a:t>
+            </a:r>
+          </a:p>
+          <a:p>
+            <a:pPr>
+              <a:spcAft>
+                <a:spcPts val="800"/>
+              </a:spcAft>
+              <a:defRPr sz="1200">
+                <a:solidFill>
+                  <a:srgbClr val="334155"/>
+                </a:solidFill>
+                <a:latin typeface="Calibri"/>
+              </a:defRPr>
+            </a:pPr>
+            <a:r>
+              <a:t>5 PANTALLAS DISEÑADAS:</a:t>
+            </a:r>
+            <a:br/>
+            <a:r>
+              <a:t>1. Login AD con Spring Security</a:t>
+            </a:r>
+            <a:br/>
+            <a:r>
+              <a:t>2. Tablero de Entidades Thymeleaf</a:t>
+            </a:r>
+            <a:br/>
+            <a:r>
+              <a:t>3. Formulario con Data Binding</a:t>
+            </a:r>
+            <a:br/>
+            <a:r>
+              <a:t>4. Bitácora Histórica Paginada</a:t>
+            </a:r>
+            <a:br/>
+            <a:r>
+              <a:t>5. Visor de Reporte SFT</a:t>
+            </a:r>
+          </a:p>
+          <a:p>
+            <a:pPr>
+              <a:defRPr sz="1250" b="1">
+                <a:solidFill>
+                  <a:srgbClr val="E11D48"/>
+                </a:solidFill>
+                <a:latin typeface="Calibri"/>
+              </a:defRPr>
+            </a:pPr>
+            <a:r>
+              <a:t>Descarte Técnico:</a:t>
+            </a:r>
+            <a:br/>
+            <a:r>
+              <a:t>Baja reactividad para sala NOC al requerir recarga síncrona de página.</a:t>
+            </a:r>
+          </a:p>
+        </p:txBody>
+      </p:sp>
+      <p:sp>
+        <p:nvSpPr>
+          <p:cNvPr id="8" name="Rounded Rectangle 7"/>
+          <p:cNvSpPr/>
+          <p:nvPr/>
+        </p:nvSpPr>
+        <p:spPr>
+          <a:xfrm>
+            <a:off x="4389120" y="2057400"/>
+            <a:ext cx="3413455" cy="4434840"/>
+          </a:xfrm>
+          <a:prstGeom prst="roundRect">
+            <a:avLst/>
+          </a:prstGeom>
+          <a:solidFill>
+            <a:srgbClr val="F0F9FF"/>
+          </a:solidFill>
+          <a:ln w="31750">
+            <a:solidFill>
+              <a:srgbClr val="93C5FD"/>
+            </a:solidFill>
+          </a:ln>
+        </p:spPr>
+        <p:style>
+          <a:lnRef idx="1">
+            <a:schemeClr val="accent1"/>
+          </a:lnRef>
+          <a:fillRef idx="3">
+            <a:schemeClr val="accent1"/>
+          </a:fillRef>
+          <a:effectRef idx="2">
+            <a:schemeClr val="accent1"/>
+          </a:effectRef>
+          <a:fontRef idx="minor">
+            <a:schemeClr val="lt1"/>
+          </a:fontRef>
+        </p:style>
+        <p:txBody>
+          <a:bodyPr rtlCol="0" anchor="t" wrap="square" tIns="164592" lIns="182880"/>
+          <a:lstStyle/>
+          <a:p>
+            <a:pPr algn="ctr">
+              <a:spcAft>
+                <a:spcPts val="200"/>
+              </a:spcAft>
+              <a:defRPr sz="1400" b="1">
+                <a:solidFill>
+                  <a:srgbClr val="0284C7"/>
+                </a:solidFill>
+                <a:latin typeface="Calibri"/>
+              </a:defRPr>
+            </a:pPr>
+            <a:r>
+              <a:t>ALTERNATIVA 2 (SELECCIONADA)</a:t>
+            </a:r>
+          </a:p>
+          <a:p>
+            <a:pPr>
+              <a:spcAft>
+                <a:spcPts val="600"/>
+              </a:spcAft>
+              <a:defRPr sz="1150">
+                <a:solidFill>
+                  <a:srgbClr val="64748B"/>
+                </a:solidFill>
+                <a:latin typeface="Calibri"/>
+              </a:defRPr>
+            </a:pPr>
+            <a:r>
+              <a:t>Spring Boot 3 REST + SPA NOC + PostgreSQL 15</a:t>
+            </a:r>
+          </a:p>
+          <a:p>
+            <a:pPr>
+              <a:spcAft>
+                <a:spcPts val="600"/>
+              </a:spcAft>
+              <a:defRPr sz="1300" b="1">
+                <a:solidFill>
+                  <a:srgbClr val="0284C7"/>
+                </a:solidFill>
+                <a:latin typeface="Calibri"/>
+              </a:defRPr>
+            </a:pPr>
+            <a:r>
+              <a:t>65% DESARROLLO EN JAVA</a:t>
+            </a:r>
+          </a:p>
+          <a:p>
+            <a:pPr>
+              <a:spcAft>
+                <a:spcPts val="800"/>
+              </a:spcAft>
+              <a:defRPr sz="1200">
+                <a:solidFill>
+                  <a:srgbClr val="334155"/>
+                </a:solidFill>
+                <a:latin typeface="Calibri"/>
+              </a:defRPr>
+            </a:pPr>
+            <a:r>
+              <a:t>5 PANTALLAS IMPLEMENTADAS:</a:t>
+            </a:r>
+            <a:br/>
+            <a:r>
+              <a:t>1. Header AD (Sesión única corporativa)</a:t>
+            </a:r>
+            <a:br/>
+            <a:r>
+              <a:t>2. Barra telemétrica en vivo (Yape, Plim, CCE)</a:t>
+            </a:r>
+            <a:br/>
+            <a:r>
+              <a:t>3. Matriz de incidentes con filtros reactivos</a:t>
+            </a:r>
+            <a:br/>
+            <a:r>
+              <a:t>4. Modal asistido de registro de fraude</a:t>
+            </a:r>
+            <a:br/>
+            <a:r>
+              <a:t>5. Compilador normativo SFT con SHA-256</a:t>
+            </a:r>
+          </a:p>
+          <a:p>
+            <a:pPr>
+              <a:defRPr sz="1250" b="1">
+                <a:solidFill>
+                  <a:srgbClr val="059669"/>
+                </a:solidFill>
+                <a:latin typeface="Calibri"/>
+              </a:defRPr>
+            </a:pPr>
+            <a:r>
+              <a:t>⭐ Ganadora Multicriterio:</a:t>
+            </a:r>
+            <a:br/>
+            <a:r>
+              <a:t>4.97 sobre 5.00 Puntos</a:t>
+            </a:r>
+          </a:p>
+        </p:txBody>
+      </p:sp>
+      <p:sp>
+        <p:nvSpPr>
+          <p:cNvPr id="9" name="Rounded Rectangle 8"/>
+          <p:cNvSpPr/>
+          <p:nvPr/>
+        </p:nvSpPr>
+        <p:spPr>
+          <a:xfrm>
+            <a:off x="8046720" y="2057400"/>
+            <a:ext cx="3413455" cy="4434840"/>
+          </a:xfrm>
+          <a:prstGeom prst="roundRect">
+            <a:avLst/>
+          </a:prstGeom>
+          <a:solidFill>
+            <a:srgbClr val="FFFFFF"/>
+          </a:solidFill>
+          <a:ln w="15240">
+            <a:solidFill>
+              <a:srgbClr val="CBD5E1"/>
+            </a:solidFill>
+          </a:ln>
+        </p:spPr>
+        <p:style>
+          <a:lnRef idx="1">
+            <a:schemeClr val="accent1"/>
+          </a:lnRef>
+          <a:fillRef idx="3">
+            <a:schemeClr val="accent1"/>
+          </a:fillRef>
+          <a:effectRef idx="2">
+            <a:schemeClr val="accent1"/>
+          </a:effectRef>
+          <a:fontRef idx="minor">
+            <a:schemeClr val="lt1"/>
+          </a:fontRef>
+        </p:style>
+        <p:txBody>
+          <a:bodyPr rtlCol="0" anchor="t" wrap="square" tIns="164592" lIns="182880"/>
+          <a:lstStyle/>
+          <a:p>
+            <a:pPr algn="ctr">
+              <a:spcAft>
+                <a:spcPts val="200"/>
+              </a:spcAft>
+              <a:defRPr sz="1400" b="1">
+                <a:solidFill>
+                  <a:srgbClr val="0B1F3A"/>
+                </a:solidFill>
+                <a:latin typeface="Calibri"/>
               </a:defRPr>
             </a:pPr>
             <a:r>
@@ -5938,77 +7810,87 @@
           </a:p>
           <a:p>
             <a:pPr>
-              <a:defRPr sz="900">
-                <a:solidFill>
-                  <a:srgbClr val="94A3B8"/>
-                </a:solidFill>
-                <a:latin typeface="Arial"/>
+              <a:spcAft>
+                <a:spcPts val="600"/>
+              </a:spcAft>
+              <a:defRPr sz="1150">
+                <a:solidFill>
+                  <a:srgbClr val="64748B"/>
+                </a:solidFill>
+                <a:latin typeface="Calibri"/>
               </a:defRPr>
             </a:pPr>
             <a:r>
               <a:t>Spring Cloud + Apache Kafka + Java Microservices</a:t>
             </a:r>
+          </a:p>
+          <a:p>
+            <a:pPr>
+              <a:spcAft>
+                <a:spcPts val="600"/>
+              </a:spcAft>
+              <a:defRPr sz="1300" b="1">
+                <a:solidFill>
+                  <a:srgbClr val="0284C7"/>
+                </a:solidFill>
+                <a:latin typeface="Calibri"/>
+              </a:defRPr>
+            </a:pPr>
+            <a:r>
+              <a:t>75% DESARROLLO EN JAVA</a:t>
+            </a:r>
+          </a:p>
+          <a:p>
+            <a:pPr>
+              <a:spcAft>
+                <a:spcPts val="800"/>
+              </a:spcAft>
+              <a:defRPr sz="1200">
+                <a:solidFill>
+                  <a:srgbClr val="334155"/>
+                </a:solidFill>
+                <a:latin typeface="Calibri"/>
+              </a:defRPr>
+            </a:pPr>
+            <a:r>
+              <a:t>5 PANTALLAS DISEÑADAS:</a:t>
+            </a:r>
             <a:br/>
-          </a:p>
-          <a:p>
-            <a:pPr>
-              <a:defRPr sz="1000" b="1">
-                <a:solidFill>
-                  <a:srgbClr val="00D4FF"/>
-                </a:solidFill>
-                <a:latin typeface="Arial"/>
-              </a:defRPr>
-            </a:pPr>
-            <a:r>
-              <a:t>75% DESARROLLO JAVA</a:t>
-            </a:r>
-          </a:p>
-          <a:p>
+            <a:r>
+              <a:t>1. Gateway SSO OAuth2</a:t>
+            </a:r>
             <a:br/>
-            <a:pPr>
-              <a:defRPr sz="900">
-                <a:solidFill>
-                  <a:srgbClr val="94A3B8"/>
-                </a:solidFill>
-                <a:latin typeface="Arial"/>
-              </a:defRPr>
-            </a:pPr>
-            <a:r>
-              <a:t>5 Pantallas Diseñadas:</a:t>
+            <a:r>
+              <a:t>2. Monitor de Tópicos Kafka</a:t>
             </a:r>
             <a:br/>
             <a:r>
-              <a:t>1. Gateway SSO OAuth2</a:t>
+              <a:t>3. Consola de Colas DLQ</a:t>
             </a:r>
             <a:br/>
             <a:r>
-              <a:t>2. Monitor de Tópicos Kafka</a:t>
+              <a:t>4. Centro de Trazas (TraceID)</a:t>
             </a:r>
             <a:br/>
             <a:r>
-              <a:t>3. Consola de Colas DLQ</a:t>
+              <a:t>5. Panel Batch hacia SFTP</a:t>
+            </a:r>
+          </a:p>
+          <a:p>
+            <a:pPr>
+              <a:defRPr sz="1250" b="1">
+                <a:solidFill>
+                  <a:srgbClr val="E11D48"/>
+                </a:solidFill>
+                <a:latin typeface="Calibri"/>
+              </a:defRPr>
+            </a:pPr>
+            <a:r>
+              <a:t>Descarte Técnico:</a:t>
             </a:r>
             <a:br/>
             <a:r>
-              <a:t>4. Centro Forense de Trazas (TraceID)</a:t>
-            </a:r>
-            <a:br/>
-            <a:r>
-              <a:t>5. Panel Batch hacia SFTP</a:t>
-            </a:r>
-            <a:br/>
-          </a:p>
-          <a:p>
-            <a:pPr>
-              <a:defRPr sz="1000" b="1">
-                <a:solidFill>
-                  <a:srgbClr val="F43F5E"/>
-                </a:solidFill>
-                <a:latin typeface="Arial"/>
-              </a:defRPr>
-            </a:pPr>
-            <a:r>
-              <a:t>Descarte: Sobrecosto operativo excesivo para 5 entidades supervisadas.</a:t>
+              <a:t>Sobrecosto operativo y de infraestructura excesivo para 5 entidades supervisadas.</a:t>
             </a:r>
           </a:p>
         </p:txBody>
@@ -6046,7 +7928,7 @@
             <a:avLst/>
           </a:prstGeom>
           <a:solidFill>
-            <a:srgbClr val="070D18"/>
+            <a:srgbClr val="F8FAFC"/>
           </a:solidFill>
           <a:ln>
             <a:noFill/>
@@ -6076,132 +7958,24 @@
       </p:sp>
       <p:sp>
         <p:nvSpPr>
-          <p:cNvPr id="3" name="TextBox 2"/>
-          <p:cNvSpPr txBox="1"/>
+          <p:cNvPr id="3" name="Rectangle 2"/>
+          <p:cNvSpPr/>
           <p:nvPr/>
         </p:nvSpPr>
         <p:spPr>
           <a:xfrm>
-            <a:off x="731520" y="365760"/>
-            <a:ext cx="7315200" cy="320040"/>
+            <a:off x="731520" y="320040"/>
+            <a:ext cx="10728655" cy="987552"/>
           </a:xfrm>
           <a:prstGeom prst="rect">
             <a:avLst/>
           </a:prstGeom>
-          <a:noFill/>
-        </p:spPr>
-        <p:txBody>
-          <a:bodyPr wrap="square">
-            <a:spAutoFit/>
-          </a:bodyPr>
-          <a:lstStyle/>
-          <a:p>
-            <a:pPr>
-              <a:defRPr sz="950" b="1">
-                <a:solidFill>
-                  <a:srgbClr val="00D4FF"/>
-                </a:solidFill>
-                <a:latin typeface="Arial"/>
-              </a:defRPr>
-            </a:pPr>
-            <a:r>
-              <a:t>CRITERIO 3 DE RÚBRICA • 3.0 PUNTOS</a:t>
-            </a:r>
-          </a:p>
-        </p:txBody>
-      </p:sp>
-      <p:sp>
-        <p:nvSpPr>
-          <p:cNvPr id="4" name="TextBox 3"/>
-          <p:cNvSpPr txBox="1"/>
-          <p:nvPr/>
-        </p:nvSpPr>
-        <p:spPr>
-          <a:xfrm>
-            <a:off x="731520" y="640080"/>
-            <a:ext cx="10515600" cy="502920"/>
-          </a:xfrm>
-          <a:prstGeom prst="rect">
-            <a:avLst/>
-          </a:prstGeom>
-          <a:noFill/>
-        </p:spPr>
-        <p:txBody>
-          <a:bodyPr wrap="square">
-            <a:spAutoFit/>
-          </a:bodyPr>
-          <a:lstStyle/>
-          <a:p>
-            <a:pPr>
-              <a:defRPr sz="2200" b="1">
-                <a:solidFill>
-                  <a:srgbClr val="FFFFFF"/>
-                </a:solidFill>
-                <a:latin typeface="Arial"/>
-              </a:defRPr>
-            </a:pPr>
-            <a:r>
-              <a:t>Herramientas de Gestión de Proyectos: PMBOK &amp; Scrum</a:t>
-            </a:r>
-          </a:p>
-        </p:txBody>
-      </p:sp>
-      <p:sp>
-        <p:nvSpPr>
-          <p:cNvPr id="5" name="TextBox 4"/>
-          <p:cNvSpPr txBox="1"/>
-          <p:nvPr/>
-        </p:nvSpPr>
-        <p:spPr>
-          <a:xfrm>
-            <a:off x="731520" y="1143000"/>
-            <a:ext cx="10515600" cy="320040"/>
-          </a:xfrm>
-          <a:prstGeom prst="rect">
-            <a:avLst/>
-          </a:prstGeom>
-          <a:noFill/>
-        </p:spPr>
-        <p:txBody>
-          <a:bodyPr wrap="square">
-            <a:spAutoFit/>
-          </a:bodyPr>
-          <a:lstStyle/>
-          <a:p>
-            <a:pPr>
-              <a:defRPr sz="1100">
-                <a:solidFill>
-                  <a:srgbClr val="94A3B8"/>
-                </a:solidFill>
-                <a:latin typeface="Arial"/>
-              </a:defRPr>
-            </a:pPr>
-            <a:r>
-              <a:t>Uso simultáneo de Acta de Constitución (Project Charter), EDT/WBS a 3 niveles y Cronograma Gantt</a:t>
-            </a:r>
-          </a:p>
-        </p:txBody>
-      </p:sp>
-      <p:sp>
-        <p:nvSpPr>
-          <p:cNvPr id="6" name="Rounded Rectangle 5"/>
-          <p:cNvSpPr/>
-          <p:nvPr/>
-        </p:nvSpPr>
-        <p:spPr>
-          <a:xfrm>
-            <a:off x="731520" y="1645920"/>
-            <a:ext cx="3413455" cy="4572000"/>
-          </a:xfrm>
-          <a:prstGeom prst="roundRect">
-            <a:avLst/>
-          </a:prstGeom>
           <a:solidFill>
-            <a:srgbClr val="0F192D"/>
+            <a:srgbClr val="FFFFFF"/>
           </a:solidFill>
-          <a:ln w="12700">
+          <a:ln w="19050">
             <a:solidFill>
-              <a:srgbClr val="23375A"/>
+              <a:srgbClr val="CBD5E1"/>
             </a:solidFill>
           </a:ln>
         </p:spPr>
@@ -6220,83 +7994,32 @@
           </a:fontRef>
         </p:style>
         <p:txBody>
-          <a:bodyPr rtlCol="0" anchor="ctr" wrap="square"/>
-          <a:lstStyle/>
-          <a:p>
-            <a:pPr algn="ctr">
-              <a:defRPr sz="1200" b="1">
-                <a:solidFill>
-                  <a:srgbClr val="FFFFFF"/>
-                </a:solidFill>
-                <a:latin typeface="Arial"/>
-              </a:defRPr>
-            </a:pPr>
-            <a:r>
-              <a:t>1. PROJECT CHARTER BÁSICO</a:t>
-            </a:r>
-          </a:p>
-          <a:p>
-            <a:br/>
-            <a:pPr>
-              <a:defRPr sz="1000">
-                <a:solidFill>
-                  <a:srgbClr val="94A3B8"/>
-                </a:solidFill>
-                <a:latin typeface="Arial"/>
-              </a:defRPr>
-            </a:pPr>
-            <a:r>
-              <a:t>Acta formal del proyecto:</a:t>
-            </a:r>
-            <a:br/>
-            <a:br/>
-            <a:r>
-              <a:t>• Patrocinador: Ing. Yony Zamata</a:t>
-            </a:r>
-            <a:br/>
-            <a:r>
-              <a:t>• Equipo: Frank Vargas (Líder), Fernando Romero, Joel Olaya, Luis Tapia</a:t>
-            </a:r>
-            <a:br/>
-            <a:r>
-              <a:t>• Duración: 14 semanas (6 Sprints)</a:t>
-            </a:r>
-            <a:br/>
-            <a:r>
-              <a:t>• Sondeo telemétrico: Intervalos de 30s</a:t>
-            </a:r>
-            <a:br/>
-            <a:r>
-              <a:t>• Disponibilidad requerida: 99.9%</a:t>
-            </a:r>
-            <a:br/>
-            <a:r>
-              <a:t>• Cero mutación en historial (Trigger SQL)</a:t>
-            </a:r>
-          </a:p>
-        </p:txBody>
-      </p:sp>
-      <p:sp>
-        <p:nvSpPr>
-          <p:cNvPr id="7" name="Rounded Rectangle 6"/>
+          <a:bodyPr rtlCol="0" anchor="ctr"/>
+          <a:lstStyle/>
+          <a:p>
+            <a:pPr algn="ctr"/>
+          </a:p>
+        </p:txBody>
+      </p:sp>
+      <p:sp>
+        <p:nvSpPr>
+          <p:cNvPr id="4" name="Rectangle 3"/>
           <p:cNvSpPr/>
           <p:nvPr/>
         </p:nvSpPr>
         <p:spPr>
           <a:xfrm>
-            <a:off x="4389120" y="1645920"/>
-            <a:ext cx="3413455" cy="4572000"/>
-          </a:xfrm>
-          <a:prstGeom prst="roundRect">
+            <a:off x="731520" y="320040"/>
+            <a:ext cx="128016" cy="987552"/>
+          </a:xfrm>
+          <a:prstGeom prst="rect">
             <a:avLst/>
           </a:prstGeom>
           <a:solidFill>
-            <a:srgbClr val="142341"/>
+            <a:srgbClr val="0284C7"/>
           </a:solidFill>
-          <a:ln w="19050">
-            <a:solidFill>
-              <a:srgbClr val="00D4FF"/>
-            </a:solidFill>
+          <a:ln>
+            <a:noFill/>
           </a:ln>
         </p:spPr>
         <p:style>
@@ -6314,74 +8037,101 @@
           </a:fontRef>
         </p:style>
         <p:txBody>
-          <a:bodyPr rtlCol="0" anchor="ctr" wrap="square"/>
-          <a:lstStyle/>
-          <a:p>
-            <a:pPr algn="ctr">
-              <a:defRPr sz="1200" b="1">
-                <a:solidFill>
-                  <a:srgbClr val="00D4FF"/>
-                </a:solidFill>
-                <a:latin typeface="Arial"/>
-              </a:defRPr>
-            </a:pPr>
-            <a:r>
-              <a:t>2. EDT / WBS A 3 NIVELES</a:t>
-            </a:r>
-          </a:p>
-          <a:p>
-            <a:br/>
-            <a:pPr>
-              <a:defRPr sz="1000">
-                <a:solidFill>
-                  <a:srgbClr val="94A3B8"/>
-                </a:solidFill>
-                <a:latin typeface="Arial"/>
-              </a:defRPr>
-            </a:pPr>
-            <a:r>
-              <a:t>Descomposición jerárquica de entregables:</a:t>
-            </a:r>
-            <a:br/>
-            <a:br/>
-            <a:r>
-              <a:t>• 1.1 FASE NORMATIVA: Marco legal BCRP</a:t>
-            </a:r>
-            <a:br/>
-            <a:r>
-              <a:t>• 1.2 FASE ANÁLISIS: Requisitos IEEE 830 y BPMN</a:t>
-            </a:r>
-            <a:br/>
-            <a:r>
-              <a:t>• 1.3 FASE DISEÑO: Arquitectura Hexagonal y DDL</a:t>
-            </a:r>
-            <a:br/>
-            <a:r>
-              <a:t>• 1.4 FASE CONSTRUCCIÓN: Hito APF1 con 8 tests JUnit 5 y contenedor Docker Compose</a:t>
-            </a:r>
-          </a:p>
-        </p:txBody>
-      </p:sp>
-      <p:sp>
-        <p:nvSpPr>
-          <p:cNvPr id="8" name="Rounded Rectangle 7"/>
+          <a:bodyPr rtlCol="0" anchor="ctr"/>
+          <a:lstStyle/>
+          <a:p>
+            <a:pPr algn="ctr"/>
+          </a:p>
+        </p:txBody>
+      </p:sp>
+      <p:sp>
+        <p:nvSpPr>
+          <p:cNvPr id="5" name="TextBox 4"/>
+          <p:cNvSpPr txBox="1"/>
+          <p:nvPr/>
+        </p:nvSpPr>
+        <p:spPr>
+          <a:xfrm>
+            <a:off x="1051560" y="347472"/>
+            <a:ext cx="10149840" cy="914400"/>
+          </a:xfrm>
+          <a:prstGeom prst="rect">
+            <a:avLst/>
+          </a:prstGeom>
+          <a:noFill/>
+        </p:spPr>
+        <p:txBody>
+          <a:bodyPr wrap="square" lIns="0" tIns="0" rIns="0" bIns="0" anchor="t">
+            <a:spAutoFit/>
+          </a:bodyPr>
+          <a:lstStyle/>
+          <a:p>
+            <a:pPr>
+              <a:spcAft>
+                <a:spcPts val="200"/>
+              </a:spcAft>
+              <a:defRPr sz="1150" b="1">
+                <a:solidFill>
+                  <a:srgbClr val="0284C7"/>
+                </a:solidFill>
+                <a:latin typeface="Calibri"/>
+              </a:defRPr>
+            </a:pPr>
+            <a:r>
+              <a:t>CRITERIO 3 DE RÚBRICA • 3.0 PUNTOS</a:t>
+            </a:r>
+          </a:p>
+          <a:p>
+            <a:pPr>
+              <a:spcAft>
+                <a:spcPts val="200"/>
+              </a:spcAft>
+              <a:defRPr sz="2200" b="1">
+                <a:solidFill>
+                  <a:srgbClr val="0B1F3A"/>
+                </a:solidFill>
+                <a:latin typeface="Calibri"/>
+              </a:defRPr>
+            </a:pPr>
+            <a:r>
+              <a:t>Herramientas de Gestión de Proyectos: Project Charter &amp; Matriz RACI</a:t>
+            </a:r>
+          </a:p>
+          <a:p>
+            <a:pPr>
+              <a:defRPr sz="1200">
+                <a:solidFill>
+                  <a:srgbClr val="64748B"/>
+                </a:solidFill>
+                <a:latin typeface="Calibri"/>
+              </a:defRPr>
+            </a:pPr>
+            <a:r>
+              <a:t>Formalización del marco de gobernanza, patrocinio y asignación estricta de responsabilidades</a:t>
+            </a:r>
+          </a:p>
+        </p:txBody>
+      </p:sp>
+      <p:sp>
+        <p:nvSpPr>
+          <p:cNvPr id="6" name="Rounded Rectangle 5"/>
           <p:cNvSpPr/>
           <p:nvPr/>
         </p:nvSpPr>
         <p:spPr>
           <a:xfrm>
-            <a:off x="8046720" y="1645920"/>
-            <a:ext cx="3413455" cy="4572000"/>
+            <a:off x="731520" y="1508760"/>
+            <a:ext cx="5212080" cy="4892040"/>
           </a:xfrm>
           <a:prstGeom prst="roundRect">
             <a:avLst/>
           </a:prstGeom>
           <a:solidFill>
-            <a:srgbClr val="142341"/>
+            <a:srgbClr val="FFFFFF"/>
           </a:solidFill>
-          <a:ln w="19050">
+          <a:ln w="25400">
             <a:solidFill>
-              <a:srgbClr val="FBBF24"/>
+              <a:srgbClr val="93C5FD"/>
             </a:solidFill>
           </a:ln>
         </p:spPr>
@@ -6400,50 +8150,336 @@
           </a:fontRef>
         </p:style>
         <p:txBody>
-          <a:bodyPr rtlCol="0" anchor="ctr" wrap="square"/>
+          <a:bodyPr rtlCol="0" anchor="t" wrap="square" tIns="182880" lIns="228600"/>
           <a:lstStyle/>
           <a:p>
             <a:pPr algn="ctr">
-              <a:defRPr sz="1200" b="1">
-                <a:solidFill>
-                  <a:srgbClr val="FBBF24"/>
-                </a:solidFill>
-                <a:latin typeface="Arial"/>
-              </a:defRPr>
-            </a:pPr>
-            <a:r>
-              <a:t>3. CRONOGRAMA GANTT &amp; RACI</a:t>
-            </a:r>
-          </a:p>
-          <a:p>
+              <a:spcAft>
+                <a:spcPts val="800"/>
+              </a:spcAft>
+              <a:defRPr sz="1500" b="1">
+                <a:solidFill>
+                  <a:srgbClr val="0284C7"/>
+                </a:solidFill>
+                <a:latin typeface="Calibri"/>
+              </a:defRPr>
+            </a:pPr>
+            <a:r>
+              <a:t>📜 ACTA DE CONSTITUCIÓN (PROJECT CHARTER)</a:t>
+            </a:r>
+          </a:p>
+          <a:p>
+            <a:pPr>
+              <a:spcAft>
+                <a:spcPts val="600"/>
+              </a:spcAft>
+              <a:defRPr sz="1300">
+                <a:solidFill>
+                  <a:srgbClr val="0F172A"/>
+                </a:solidFill>
+                <a:latin typeface="Calibri"/>
+              </a:defRPr>
+            </a:pPr>
+            <a:r>
+              <a:t>• Patrocinador Oficial: Ing. Yony Zamata Condori (Docente UTP).</a:t>
+            </a:r>
+          </a:p>
+          <a:p>
+            <a:pPr>
+              <a:spcAft>
+                <a:spcPts val="600"/>
+              </a:spcAft>
+              <a:defRPr sz="1300">
+                <a:solidFill>
+                  <a:srgbClr val="0F172A"/>
+                </a:solidFill>
+                <a:latin typeface="Calibri"/>
+              </a:defRPr>
+            </a:pPr>
+            <a:r>
+              <a:t>• Líder Técnico del Proyecto: Frank Emiliano Vargas Huamán (U23243651).</a:t>
+            </a:r>
+          </a:p>
+          <a:p>
+            <a:pPr>
+              <a:spcAft>
+                <a:spcPts val="600"/>
+              </a:spcAft>
+              <a:defRPr sz="1300">
+                <a:solidFill>
+                  <a:srgbClr val="0F172A"/>
+                </a:solidFill>
+                <a:latin typeface="Calibri"/>
+              </a:defRPr>
+            </a:pPr>
+            <a:r>
+              <a:t>• Horizonte Temporal: 14 semanas estructuradas en 6 Sprints ágiles.</a:t>
+            </a:r>
+          </a:p>
+          <a:p>
+            <a:pPr>
+              <a:spcAft>
+                <a:spcPts val="600"/>
+              </a:spcAft>
+              <a:defRPr sz="1300">
+                <a:solidFill>
+                  <a:srgbClr val="0F172A"/>
+                </a:solidFill>
+                <a:latin typeface="Calibri"/>
+              </a:defRPr>
+            </a:pPr>
+            <a:r>
+              <a:t>• Umbral de Disponibilidad: SLA 99.9% en monitoreo de switches interbancarios.</a:t>
+            </a:r>
+          </a:p>
+          <a:p>
+            <a:pPr>
+              <a:spcAft>
+                <a:spcPts val="600"/>
+              </a:spcAft>
+              <a:defRPr sz="1300">
+                <a:solidFill>
+                  <a:srgbClr val="0F172A"/>
+                </a:solidFill>
+                <a:latin typeface="Calibri"/>
+              </a:defRPr>
+            </a:pPr>
+            <a:r>
+              <a:t>• Frecuencia de Telemetría: Sondeo asíncrono no bloqueante cada 30 segundos.</a:t>
+            </a:r>
+          </a:p>
+          <a:p>
+            <a:pPr>
+              <a:spcAft>
+                <a:spcPts val="600"/>
+              </a:spcAft>
+              <a:defRPr sz="1300">
+                <a:solidFill>
+                  <a:srgbClr val="0F172A"/>
+                </a:solidFill>
+                <a:latin typeface="Calibri"/>
+              </a:defRPr>
+            </a:pPr>
+            <a:r>
+              <a:t>• Inmutabilidad de Auditoría: Trigger SQL append-only; cero mutabilidad histórica.</a:t>
+            </a:r>
+          </a:p>
+          <a:p>
+            <a:pPr>
+              <a:spcAft>
+                <a:spcPts val="600"/>
+              </a:spcAft>
+              <a:defRPr sz="1300">
+                <a:solidFill>
+                  <a:srgbClr val="0F172A"/>
+                </a:solidFill>
+                <a:latin typeface="Calibri"/>
+              </a:defRPr>
+            </a:pPr>
+            <a:r>
+              <a:t>• Meta de Calidad Software: Cobertura &gt; 80% con JUnit 5 y validación Mockito.</a:t>
+            </a:r>
+          </a:p>
+        </p:txBody>
+      </p:sp>
+      <p:sp>
+        <p:nvSpPr>
+          <p:cNvPr id="7" name="Rounded Rectangle 6"/>
+          <p:cNvSpPr/>
+          <p:nvPr/>
+        </p:nvSpPr>
+        <p:spPr>
+          <a:xfrm>
+            <a:off x="6217920" y="1508760"/>
+            <a:ext cx="5242255" cy="4892040"/>
+          </a:xfrm>
+          <a:prstGeom prst="roundRect">
+            <a:avLst/>
+          </a:prstGeom>
+          <a:solidFill>
+            <a:srgbClr val="FFFFFF"/>
+          </a:solidFill>
+          <a:ln w="25400">
+            <a:solidFill>
+              <a:srgbClr val="FCD34D"/>
+            </a:solidFill>
+          </a:ln>
+        </p:spPr>
+        <p:style>
+          <a:lnRef idx="1">
+            <a:schemeClr val="accent1"/>
+          </a:lnRef>
+          <a:fillRef idx="3">
+            <a:schemeClr val="accent1"/>
+          </a:fillRef>
+          <a:effectRef idx="2">
+            <a:schemeClr val="accent1"/>
+          </a:effectRef>
+          <a:fontRef idx="minor">
+            <a:schemeClr val="lt1"/>
+          </a:fontRef>
+        </p:style>
+        <p:txBody>
+          <a:bodyPr rtlCol="0" anchor="t" wrap="square" tIns="182880" lIns="228600"/>
+          <a:lstStyle/>
+          <a:p>
+            <a:pPr algn="ctr">
+              <a:spcAft>
+                <a:spcPts val="800"/>
+              </a:spcAft>
+              <a:defRPr sz="1500" b="1">
+                <a:solidFill>
+                  <a:srgbClr val="B45309"/>
+                </a:solidFill>
+                <a:latin typeface="Calibri"/>
+              </a:defRPr>
+            </a:pPr>
+            <a:r>
+              <a:t>👥 MATRIZ RACI DE ROLES Y RESPONSABILIDADES</a:t>
+            </a:r>
+          </a:p>
+          <a:p>
+            <a:pPr>
+              <a:spcAft>
+                <a:spcPts val="200"/>
+              </a:spcAft>
+              <a:defRPr sz="1300" b="1">
+                <a:solidFill>
+                  <a:srgbClr val="0B1F3A"/>
+                </a:solidFill>
+                <a:latin typeface="Calibri"/>
+              </a:defRPr>
+            </a:pPr>
+            <a:r>
+              <a:t>Frank Emiliano Vargas Huamán (Líder Técnico):</a:t>
+            </a:r>
+          </a:p>
+          <a:p>
+            <a:pPr>
+              <a:spcAft>
+                <a:spcPts val="600"/>
+              </a:spcAft>
+              <a:defRPr sz="1200">
+                <a:solidFill>
+                  <a:srgbClr val="334155"/>
+                </a:solidFill>
+                <a:latin typeface="Calibri"/>
+              </a:defRPr>
+            </a:pPr>
+            <a:r>
+              <a:t>• Accountable (A) en Arquitectura Hexagonal y DDL SQL.</a:t>
+            </a:r>
             <a:br/>
-            <a:pPr>
-              <a:defRPr sz="1000">
-                <a:solidFill>
-                  <a:srgbClr val="94A3B8"/>
-                </a:solidFill>
-                <a:latin typeface="Arial"/>
-              </a:defRPr>
-            </a:pPr>
-            <a:r>
-              <a:t>Planificación ágil del esfuerzo:</a:t>
+            <a:r>
+              <a:t>• Responsible (R) en Backend Java 17, Spring Boot 3 y Docker.</a:t>
+            </a:r>
+          </a:p>
+          <a:p>
+            <a:pPr>
+              <a:spcAft>
+                <a:spcPts val="200"/>
+              </a:spcAft>
+              <a:defRPr sz="1300" b="1">
+                <a:solidFill>
+                  <a:srgbClr val="0B1F3A"/>
+                </a:solidFill>
+                <a:latin typeface="Calibri"/>
+              </a:defRPr>
+            </a:pPr>
+            <a:r>
+              <a:t>Fernando Alber Alfredo Romero Requejo:</a:t>
+            </a:r>
+          </a:p>
+          <a:p>
+            <a:pPr>
+              <a:spcAft>
+                <a:spcPts val="600"/>
+              </a:spcAft>
+              <a:defRPr sz="1200">
+                <a:solidFill>
+                  <a:srgbClr val="334155"/>
+                </a:solidFill>
+                <a:latin typeface="Calibri"/>
+              </a:defRPr>
+            </a:pPr>
+            <a:r>
+              <a:t>• Responsible (R) en Levantamiento SRS IEEE 830 y BPMN.</a:t>
             </a:r>
             <a:br/>
+            <a:r>
+              <a:t>• Consulted (C) en Casos de Uso y Reglas de Negocio.</a:t>
+            </a:r>
+          </a:p>
+          <a:p>
+            <a:pPr>
+              <a:spcAft>
+                <a:spcPts val="200"/>
+              </a:spcAft>
+              <a:defRPr sz="1300" b="1">
+                <a:solidFill>
+                  <a:srgbClr val="0B1F3A"/>
+                </a:solidFill>
+                <a:latin typeface="Calibri"/>
+              </a:defRPr>
+            </a:pPr>
+            <a:r>
+              <a:t>Joel Leonardo Olaya Vivas:</a:t>
+            </a:r>
+          </a:p>
+          <a:p>
+            <a:pPr>
+              <a:spcAft>
+                <a:spcPts val="600"/>
+              </a:spcAft>
+              <a:defRPr sz="1200">
+                <a:solidFill>
+                  <a:srgbClr val="334155"/>
+                </a:solidFill>
+                <a:latin typeface="Calibri"/>
+              </a:defRPr>
+            </a:pPr>
+            <a:r>
+              <a:t>• Responsible (R) en Suite de Pruebas Unitarias JUnit 5.</a:t>
+            </a:r>
             <a:br/>
             <a:r>
-              <a:t>• Product Backlog: 70 Story Points</a:t>
+              <a:t>• Consulted (C) en Pruebas de Carga y Validación QA.</a:t>
+            </a:r>
+          </a:p>
+          <a:p>
+            <a:pPr>
+              <a:spcAft>
+                <a:spcPts val="200"/>
+              </a:spcAft>
+              <a:defRPr sz="1300" b="1">
+                <a:solidFill>
+                  <a:srgbClr val="0B1F3A"/>
+                </a:solidFill>
+                <a:latin typeface="Calibri"/>
+              </a:defRPr>
+            </a:pPr>
+            <a:r>
+              <a:t>Luis Tapia Ignacio:</a:t>
+            </a:r>
+          </a:p>
+          <a:p>
+            <a:pPr>
+              <a:spcAft>
+                <a:spcPts val="600"/>
+              </a:spcAft>
+              <a:defRPr sz="1200">
+                <a:solidFill>
+                  <a:srgbClr val="334155"/>
+                </a:solidFill>
+                <a:latin typeface="Calibri"/>
+              </a:defRPr>
+            </a:pPr>
+            <a:r>
+              <a:t>• Responsible (R) en Modelado de Datos y Script DDL Inmutable.</a:t>
             </a:r>
             <a:br/>
             <a:r>
-              <a:t>• Sprints 1 a 3: Cimientos core, persistencia inmutable y consola NOC (Semana 4 - APF1)</a:t>
-            </a:r>
-            <a:br/>
-            <a:r>
-              <a:t>• Sprints 4 a 6: Analítica gerencial MTTR/MTTD y reportes avanzados (Etapa 02)</a:t>
-            </a:r>
-            <a:br/>
-            <a:r>
-              <a:t>• Matriz RACI: Claridad de responsabilidades</a:t>
+              <a:t>• Informed (I) en Despliegue y Pruebas en Vivo.</a:t>
             </a:r>
           </a:p>
         </p:txBody>
@@ -6481,7 +8517,7 @@
             <a:avLst/>
           </a:prstGeom>
           <a:solidFill>
-            <a:srgbClr val="070D18"/>
+            <a:srgbClr val="F8FAFC"/>
           </a:solidFill>
           <a:ln>
             <a:noFill/>
@@ -6511,156 +8547,24 @@
       </p:sp>
       <p:sp>
         <p:nvSpPr>
-          <p:cNvPr id="3" name="TextBox 2"/>
-          <p:cNvSpPr txBox="1"/>
+          <p:cNvPr id="3" name="Rectangle 2"/>
+          <p:cNvSpPr/>
           <p:nvPr/>
         </p:nvSpPr>
         <p:spPr>
           <a:xfrm>
-            <a:off x="731520" y="365760"/>
-            <a:ext cx="7315200" cy="320040"/>
+            <a:off x="731520" y="320040"/>
+            <a:ext cx="10728655" cy="987552"/>
           </a:xfrm>
           <a:prstGeom prst="rect">
             <a:avLst/>
           </a:prstGeom>
-          <a:noFill/>
-        </p:spPr>
-        <p:txBody>
-          <a:bodyPr wrap="square">
-            <a:spAutoFit/>
-          </a:bodyPr>
-          <a:lstStyle/>
-          <a:p>
-            <a:pPr>
-              <a:defRPr sz="950" b="1">
-                <a:solidFill>
-                  <a:srgbClr val="00D4FF"/>
-                </a:solidFill>
-                <a:latin typeface="Arial"/>
-              </a:defRPr>
-            </a:pPr>
-            <a:r>
-              <a:t>CRITERIO 4 DE RÚBRICA • 6.0 PUNTOS</a:t>
-            </a:r>
-          </a:p>
-        </p:txBody>
-      </p:sp>
-      <p:sp>
-        <p:nvSpPr>
-          <p:cNvPr id="4" name="TextBox 3"/>
-          <p:cNvSpPr txBox="1"/>
-          <p:nvPr/>
-        </p:nvSpPr>
-        <p:spPr>
-          <a:xfrm>
-            <a:off x="731520" y="640080"/>
-            <a:ext cx="10515600" cy="502920"/>
-          </a:xfrm>
-          <a:prstGeom prst="rect">
-            <a:avLst/>
-          </a:prstGeom>
-          <a:noFill/>
-        </p:spPr>
-        <p:txBody>
-          <a:bodyPr wrap="square">
-            <a:spAutoFit/>
-          </a:bodyPr>
-          <a:lstStyle/>
-          <a:p>
-            <a:pPr>
-              <a:defRPr sz="2200" b="1">
-                <a:solidFill>
-                  <a:srgbClr val="FFFFFF"/>
-                </a:solidFill>
-                <a:latin typeface="Arial"/>
-              </a:defRPr>
-            </a:pPr>
-            <a:r>
-              <a:t>Análisis de la Solución bajo Estándar SRS IEEE 830</a:t>
-            </a:r>
-          </a:p>
-        </p:txBody>
-      </p:sp>
-      <p:sp>
-        <p:nvSpPr>
-          <p:cNvPr id="5" name="TextBox 4"/>
-          <p:cNvSpPr txBox="1"/>
-          <p:nvPr/>
-        </p:nvSpPr>
-        <p:spPr>
-          <a:xfrm>
-            <a:off x="731520" y="1143000"/>
-            <a:ext cx="10515600" cy="320040"/>
-          </a:xfrm>
-          <a:prstGeom prst="rect">
-            <a:avLst/>
-          </a:prstGeom>
-          <a:noFill/>
-        </p:spPr>
-        <p:txBody>
-          <a:bodyPr wrap="square">
-            <a:spAutoFit/>
-          </a:bodyPr>
-          <a:lstStyle/>
-          <a:p>
-            <a:pPr>
-              <a:defRPr sz="1100">
-                <a:solidFill>
-                  <a:srgbClr val="94A3B8"/>
-                </a:solidFill>
-                <a:latin typeface="Arial"/>
-              </a:defRPr>
-            </a:pPr>
-            <a:r>
-              <a:t>Diagrama de Casos de Uso UML 2.5, 12 Requisitos Funcionales y 8 No Funcionales ISO/IEC 25010</a:t>
-            </a:r>
-          </a:p>
-        </p:txBody>
-      </p:sp>
-      <p:pic>
-        <p:nvPicPr>
-          <p:cNvPr id="6" name="Picture 5" descr="figura2_casos_de_uso.png"/>
-          <p:cNvPicPr>
-            <a:picLocks noChangeAspect="1"/>
-          </p:cNvPicPr>
-          <p:nvPr/>
-        </p:nvPicPr>
-        <p:blipFill>
-          <a:blip r:embed="rId2"/>
-          <a:stretch>
-            <a:fillRect/>
-          </a:stretch>
-        </p:blipFill>
-        <p:spPr>
-          <a:xfrm>
-            <a:off x="731520" y="1645920"/>
-            <a:ext cx="5486400" cy="2793076"/>
-          </a:xfrm>
-          <a:prstGeom prst="rect">
-            <a:avLst/>
-          </a:prstGeom>
-        </p:spPr>
-      </p:pic>
-      <p:sp>
-        <p:nvSpPr>
-          <p:cNvPr id="7" name="Rounded Rectangle 6"/>
-          <p:cNvSpPr/>
-          <p:nvPr/>
-        </p:nvSpPr>
-        <p:spPr>
-          <a:xfrm>
-            <a:off x="6492240" y="1645920"/>
-            <a:ext cx="4937760" cy="4572000"/>
-          </a:xfrm>
-          <a:prstGeom prst="roundRect">
-            <a:avLst/>
-          </a:prstGeom>
           <a:solidFill>
-            <a:srgbClr val="0F192D"/>
+            <a:srgbClr val="FFFFFF"/>
           </a:solidFill>
-          <a:ln>
+          <a:ln w="19050">
             <a:solidFill>
-              <a:srgbClr val="00D4FF"/>
+              <a:srgbClr val="CBD5E1"/>
             </a:solidFill>
           </a:ln>
         </p:spPr>
@@ -6679,154 +8583,484 @@
           </a:fontRef>
         </p:style>
         <p:txBody>
-          <a:bodyPr rtlCol="0" anchor="ctr" wrap="square"/>
+          <a:bodyPr rtlCol="0" anchor="ctr"/>
+          <a:lstStyle/>
+          <a:p>
+            <a:pPr algn="ctr"/>
+          </a:p>
+        </p:txBody>
+      </p:sp>
+      <p:sp>
+        <p:nvSpPr>
+          <p:cNvPr id="4" name="Rectangle 3"/>
+          <p:cNvSpPr/>
+          <p:nvPr/>
+        </p:nvSpPr>
+        <p:spPr>
+          <a:xfrm>
+            <a:off x="731520" y="320040"/>
+            <a:ext cx="128016" cy="987552"/>
+          </a:xfrm>
+          <a:prstGeom prst="rect">
+            <a:avLst/>
+          </a:prstGeom>
+          <a:solidFill>
+            <a:srgbClr val="0284C7"/>
+          </a:solidFill>
+          <a:ln>
+            <a:noFill/>
+          </a:ln>
+        </p:spPr>
+        <p:style>
+          <a:lnRef idx="1">
+            <a:schemeClr val="accent1"/>
+          </a:lnRef>
+          <a:fillRef idx="3">
+            <a:schemeClr val="accent1"/>
+          </a:fillRef>
+          <a:effectRef idx="2">
+            <a:schemeClr val="accent1"/>
+          </a:effectRef>
+          <a:fontRef idx="minor">
+            <a:schemeClr val="lt1"/>
+          </a:fontRef>
+        </p:style>
+        <p:txBody>
+          <a:bodyPr rtlCol="0" anchor="ctr"/>
+          <a:lstStyle/>
+          <a:p>
+            <a:pPr algn="ctr"/>
+          </a:p>
+        </p:txBody>
+      </p:sp>
+      <p:sp>
+        <p:nvSpPr>
+          <p:cNvPr id="5" name="TextBox 4"/>
+          <p:cNvSpPr txBox="1"/>
+          <p:nvPr/>
+        </p:nvSpPr>
+        <p:spPr>
+          <a:xfrm>
+            <a:off x="1051560" y="347472"/>
+            <a:ext cx="10149840" cy="914400"/>
+          </a:xfrm>
+          <a:prstGeom prst="rect">
+            <a:avLst/>
+          </a:prstGeom>
+          <a:noFill/>
+        </p:spPr>
+        <p:txBody>
+          <a:bodyPr wrap="square" lIns="0" tIns="0" rIns="0" bIns="0" anchor="t">
+            <a:spAutoFit/>
+          </a:bodyPr>
+          <a:lstStyle/>
+          <a:p>
+            <a:pPr>
+              <a:spcAft>
+                <a:spcPts val="200"/>
+              </a:spcAft>
+              <a:defRPr sz="1150" b="1">
+                <a:solidFill>
+                  <a:srgbClr val="0284C7"/>
+                </a:solidFill>
+                <a:latin typeface="Calibri"/>
+              </a:defRPr>
+            </a:pPr>
+            <a:r>
+              <a:t>CRITERIO 3 DE RÚBRICA • 3.0 PUNTOS</a:t>
+            </a:r>
+          </a:p>
+          <a:p>
+            <a:pPr>
+              <a:spcAft>
+                <a:spcPts val="200"/>
+              </a:spcAft>
+              <a:defRPr sz="2200" b="1">
+                <a:solidFill>
+                  <a:srgbClr val="0B1F3A"/>
+                </a:solidFill>
+                <a:latin typeface="Calibri"/>
+              </a:defRPr>
+            </a:pPr>
+            <a:r>
+              <a:t>EDT / WBS a 3 Niveles y Cronograma Scrum Gantt</a:t>
+            </a:r>
+          </a:p>
+          <a:p>
+            <a:pPr>
+              <a:defRPr sz="1200">
+                <a:solidFill>
+                  <a:srgbClr val="64748B"/>
+                </a:solidFill>
+                <a:latin typeface="Calibri"/>
+              </a:defRPr>
+            </a:pPr>
+            <a:r>
+              <a:t>Estructuración del Product Backlog (70 Story Points) y cumplimiento estricto del Hito APF1</a:t>
+            </a:r>
+          </a:p>
+        </p:txBody>
+      </p:sp>
+      <p:sp>
+        <p:nvSpPr>
+          <p:cNvPr id="6" name="Rounded Rectangle 5"/>
+          <p:cNvSpPr/>
+          <p:nvPr/>
+        </p:nvSpPr>
+        <p:spPr>
+          <a:xfrm>
+            <a:off x="731520" y="1508760"/>
+            <a:ext cx="5212080" cy="4892040"/>
+          </a:xfrm>
+          <a:prstGeom prst="roundRect">
+            <a:avLst/>
+          </a:prstGeom>
+          <a:solidFill>
+            <a:srgbClr val="FFFFFF"/>
+          </a:solidFill>
+          <a:ln w="25400">
+            <a:solidFill>
+              <a:srgbClr val="93C5FD"/>
+            </a:solidFill>
+          </a:ln>
+        </p:spPr>
+        <p:style>
+          <a:lnRef idx="1">
+            <a:schemeClr val="accent1"/>
+          </a:lnRef>
+          <a:fillRef idx="3">
+            <a:schemeClr val="accent1"/>
+          </a:fillRef>
+          <a:effectRef idx="2">
+            <a:schemeClr val="accent1"/>
+          </a:effectRef>
+          <a:fontRef idx="minor">
+            <a:schemeClr val="lt1"/>
+          </a:fontRef>
+        </p:style>
+        <p:txBody>
+          <a:bodyPr rtlCol="0" anchor="t" wrap="square" tIns="182880" lIns="228600"/>
           <a:lstStyle/>
           <a:p>
             <a:pPr algn="ctr">
-              <a:defRPr sz="1200" b="1">
-                <a:solidFill>
-                  <a:srgbClr val="00D4FF"/>
-                </a:solidFill>
-                <a:latin typeface="Arial"/>
-              </a:defRPr>
-            </a:pPr>
-            <a:r>
-              <a:t>ESPECIFICACIÓN FORMAL DE REQUISITOS</a:t>
-            </a:r>
-          </a:p>
-          <a:p>
+              <a:spcAft>
+                <a:spcPts val="800"/>
+              </a:spcAft>
+              <a:defRPr sz="1500" b="1">
+                <a:solidFill>
+                  <a:srgbClr val="0284C7"/>
+                </a:solidFill>
+                <a:latin typeface="Calibri"/>
+              </a:defRPr>
+            </a:pPr>
+            <a:r>
+              <a:t>🌳 EDT / WBS JERÁRQUICO A 3 NIVELES</a:t>
+            </a:r>
+          </a:p>
+          <a:p>
+            <a:pPr>
+              <a:spcAft>
+                <a:spcPts val="200"/>
+              </a:spcAft>
+              <a:defRPr sz="1300" b="1">
+                <a:solidFill>
+                  <a:srgbClr val="0B1F3A"/>
+                </a:solidFill>
+                <a:latin typeface="Calibri"/>
+              </a:defRPr>
+            </a:pPr>
+            <a:r>
+              <a:t>1.1 FASE NORMATIVA (Semanas 1-2):</a:t>
+            </a:r>
+          </a:p>
+          <a:p>
+            <a:pPr>
+              <a:spcAft>
+                <a:spcPts val="600"/>
+              </a:spcAft>
+              <a:defRPr sz="1200">
+                <a:solidFill>
+                  <a:srgbClr val="334155"/>
+                </a:solidFill>
+                <a:latin typeface="Calibri"/>
+              </a:defRPr>
+            </a:pPr>
+            <a:r>
+              <a:t>Marco legal BCRP (Leyes 26123 y 29440, Circular 0011-2023).</a:t>
+            </a:r>
+          </a:p>
+          <a:p>
+            <a:pPr>
+              <a:spcAft>
+                <a:spcPts val="200"/>
+              </a:spcAft>
+              <a:defRPr sz="1300" b="1">
+                <a:solidFill>
+                  <a:srgbClr val="0B1F3A"/>
+                </a:solidFill>
+                <a:latin typeface="Calibri"/>
+              </a:defRPr>
+            </a:pPr>
+            <a:r>
+              <a:t>1.2 FASE ANÁLISIS (Semanas 3-4):</a:t>
+            </a:r>
+          </a:p>
+          <a:p>
+            <a:pPr>
+              <a:spcAft>
+                <a:spcPts val="600"/>
+              </a:spcAft>
+              <a:defRPr sz="1200">
+                <a:solidFill>
+                  <a:srgbClr val="334155"/>
+                </a:solidFill>
+                <a:latin typeface="Calibri"/>
+              </a:defRPr>
+            </a:pPr>
+            <a:r>
+              <a:t>SRS IEEE 830, Diagrama Casos de Uso UML 2.5 y Procesos BPMN 2.0.</a:t>
+            </a:r>
+          </a:p>
+          <a:p>
+            <a:pPr>
+              <a:spcAft>
+                <a:spcPts val="200"/>
+              </a:spcAft>
+              <a:defRPr sz="1300" b="1">
+                <a:solidFill>
+                  <a:srgbClr val="0B1F3A"/>
+                </a:solidFill>
+                <a:latin typeface="Calibri"/>
+              </a:defRPr>
+            </a:pPr>
+            <a:r>
+              <a:t>1.3 FASE DISEÑO (Semanas 3-4):</a:t>
+            </a:r>
+          </a:p>
+          <a:p>
+            <a:pPr>
+              <a:spcAft>
+                <a:spcPts val="600"/>
+              </a:spcAft>
+              <a:defRPr sz="1200">
+                <a:solidFill>
+                  <a:srgbClr val="334155"/>
+                </a:solidFill>
+                <a:latin typeface="Calibri"/>
+              </a:defRPr>
+            </a:pPr>
+            <a:r>
+              <a:t>Arquitectura Hexagonal (Puertos/Adaptadores) y DDL inmutable.</a:t>
+            </a:r>
+          </a:p>
+          <a:p>
+            <a:pPr>
+              <a:spcAft>
+                <a:spcPts val="200"/>
+              </a:spcAft>
+              <a:defRPr sz="1300" b="1">
+                <a:solidFill>
+                  <a:srgbClr val="0B1F3A"/>
+                </a:solidFill>
+                <a:latin typeface="Calibri"/>
+              </a:defRPr>
+            </a:pPr>
+            <a:r>
+              <a:t>1.4 FASE CONSTRUCCIÓN (Hito APF1 - Semana 4):</a:t>
+            </a:r>
+          </a:p>
+          <a:p>
+            <a:pPr>
+              <a:spcAft>
+                <a:spcPts val="600"/>
+              </a:spcAft>
+              <a:defRPr sz="1200">
+                <a:solidFill>
+                  <a:srgbClr val="334155"/>
+                </a:solidFill>
+                <a:latin typeface="Calibri"/>
+              </a:defRPr>
+            </a:pPr>
+            <a:r>
+              <a:t>Backend Java 17, Spring Boot 3 REST, Consola NOC y 8 tests JUnit.</a:t>
+            </a:r>
+          </a:p>
+        </p:txBody>
+      </p:sp>
+      <p:sp>
+        <p:nvSpPr>
+          <p:cNvPr id="7" name="Rounded Rectangle 6"/>
+          <p:cNvSpPr/>
+          <p:nvPr/>
+        </p:nvSpPr>
+        <p:spPr>
+          <a:xfrm>
+            <a:off x="6217920" y="1508760"/>
+            <a:ext cx="5242255" cy="4892040"/>
+          </a:xfrm>
+          <a:prstGeom prst="roundRect">
+            <a:avLst/>
+          </a:prstGeom>
+          <a:solidFill>
+            <a:srgbClr val="FFFFFF"/>
+          </a:solidFill>
+          <a:ln w="25400">
+            <a:solidFill>
+              <a:srgbClr val="6EE7B7"/>
+            </a:solidFill>
+          </a:ln>
+        </p:spPr>
+        <p:style>
+          <a:lnRef idx="1">
+            <a:schemeClr val="accent1"/>
+          </a:lnRef>
+          <a:fillRef idx="3">
+            <a:schemeClr val="accent1"/>
+          </a:fillRef>
+          <a:effectRef idx="2">
+            <a:schemeClr val="accent1"/>
+          </a:effectRef>
+          <a:fontRef idx="minor">
+            <a:schemeClr val="lt1"/>
+          </a:fontRef>
+        </p:style>
+        <p:txBody>
+          <a:bodyPr rtlCol="0" anchor="t" wrap="square" tIns="182880" lIns="228600"/>
+          <a:lstStyle/>
+          <a:p>
+            <a:pPr algn="ctr">
+              <a:spcAft>
+                <a:spcPts val="800"/>
+              </a:spcAft>
+              <a:defRPr sz="1500" b="1">
+                <a:solidFill>
+                  <a:srgbClr val="059669"/>
+                </a:solidFill>
+                <a:latin typeface="Calibri"/>
+              </a:defRPr>
+            </a:pPr>
+            <a:r>
+              <a:t>📅 PLANIFICACIÓN SCRUM &amp; STORY POINTS</a:t>
+            </a:r>
+          </a:p>
+          <a:p>
+            <a:pPr>
+              <a:spcAft>
+                <a:spcPts val="200"/>
+              </a:spcAft>
+              <a:defRPr sz="1300" b="1">
+                <a:solidFill>
+                  <a:srgbClr val="0F172A"/>
+                </a:solidFill>
+                <a:latin typeface="Calibri"/>
+              </a:defRPr>
+            </a:pPr>
+            <a:r>
+              <a:t>• Product Backlog Total:</a:t>
+            </a:r>
+          </a:p>
+          <a:p>
+            <a:pPr>
+              <a:spcAft>
+                <a:spcPts val="600"/>
+              </a:spcAft>
+              <a:defRPr sz="1200">
+                <a:solidFill>
+                  <a:srgbClr val="334155"/>
+                </a:solidFill>
+                <a:latin typeface="Calibri"/>
+              </a:defRPr>
+            </a:pPr>
+            <a:r>
+              <a:t>70 Story Points estimados con Planning Poker.</a:t>
+            </a:r>
+          </a:p>
+          <a:p>
+            <a:pPr>
+              <a:spcAft>
+                <a:spcPts val="200"/>
+              </a:spcAft>
+              <a:defRPr sz="1300" b="1">
+                <a:solidFill>
+                  <a:srgbClr val="0F172A"/>
+                </a:solidFill>
+                <a:latin typeface="Calibri"/>
+              </a:defRPr>
+            </a:pPr>
+            <a:r>
+              <a:t>• Sprints 1 a 3 (Hito APF1 - Semanas 1 a 4):</a:t>
+            </a:r>
+          </a:p>
+          <a:p>
+            <a:pPr>
+              <a:spcAft>
+                <a:spcPts val="600"/>
+              </a:spcAft>
+              <a:defRPr sz="1200">
+                <a:solidFill>
+                  <a:srgbClr val="334155"/>
+                </a:solidFill>
+                <a:latin typeface="Calibri"/>
+              </a:defRPr>
+            </a:pPr>
+            <a:r>
+              <a:t>100% CULMINADO (38 SP entregados).</a:t>
+            </a:r>
             <a:br/>
-            <a:pPr>
-              <a:defRPr sz="950" b="1">
-                <a:solidFill>
-                  <a:srgbClr val="FBBF24"/>
-                </a:solidFill>
-                <a:latin typeface="Arial"/>
-              </a:defRPr>
-            </a:pPr>
-            <a:r>
-              <a:t>4 ACTORES DEL SISTEMA:</a:t>
-            </a:r>
-          </a:p>
-          <a:p>
-            <a:pPr>
-              <a:defRPr sz="900">
-                <a:solidFill>
-                  <a:srgbClr val="94A3B8"/>
-                </a:solidFill>
-                <a:latin typeface="Arial"/>
-              </a:defRPr>
-            </a:pPr>
-            <a:r>
-              <a:t>Operador NOC • Administrador TI • Supervisor BCRP • Worker de Telemetría.</a:t>
-            </a:r>
-          </a:p>
-          <a:p>
+            <a:r>
+              <a:t>- Sprint 1: Persistencia inmutable y modelos de dominio.</a:t>
+            </a:r>
             <a:br/>
-            <a:pPr>
-              <a:defRPr sz="950" b="1">
-                <a:solidFill>
-                  <a:srgbClr val="FBBF24"/>
-                </a:solidFill>
-                <a:latin typeface="Arial"/>
-              </a:defRPr>
-            </a:pPr>
-            <a:r>
-              <a:t>RF-01 (REQUERIMIENTO CLAVE DEL CASO):</a:t>
-            </a:r>
-          </a:p>
-          <a:p>
-            <a:pPr>
-              <a:defRPr sz="900">
-                <a:solidFill>
-                  <a:srgbClr val="94A3B8"/>
-                </a:solidFill>
-                <a:latin typeface="Arial"/>
-              </a:defRPr>
-            </a:pPr>
-            <a:r>
-              <a:t>Un solo login centralizado contra Directorio Activo (AD/LDAP).</a:t>
-            </a:r>
-          </a:p>
-          <a:p>
+            <a:r>
+              <a:t>- Sprint 2: Core telemétrico y worker de sondeo 30s.</a:t>
+            </a:r>
             <a:br/>
-            <a:pPr>
-              <a:defRPr sz="950" b="1">
-                <a:solidFill>
-                  <a:srgbClr val="FBBF24"/>
-                </a:solidFill>
-                <a:latin typeface="Arial"/>
-              </a:defRPr>
-            </a:pPr>
-            <a:r>
-              <a:t>RF-03 Y RF-04 (DETECCIÓN AUTOMÁTICA):</a:t>
-            </a:r>
-          </a:p>
-          <a:p>
-            <a:pPr>
-              <a:defRPr sz="900">
-                <a:solidFill>
-                  <a:srgbClr val="94A3B8"/>
-                </a:solidFill>
-                <a:latin typeface="Arial"/>
-              </a:defRPr>
-            </a:pPr>
-            <a:r>
-              <a:t>Sondeo cada 30 segundos y auto-categorización de fallas HTTP 5xx / timeouts.</a:t>
-            </a:r>
-          </a:p>
-          <a:p>
+            <a:r>
+              <a:t>- Sprint 3: Consola Web NOC en tiempo real y reporte SFT.</a:t>
+            </a:r>
+          </a:p>
+          <a:p>
+            <a:pPr>
+              <a:spcAft>
+                <a:spcPts val="200"/>
+              </a:spcAft>
+              <a:defRPr sz="1300" b="1">
+                <a:solidFill>
+                  <a:srgbClr val="0F172A"/>
+                </a:solidFill>
+                <a:latin typeface="Calibri"/>
+              </a:defRPr>
+            </a:pPr>
+            <a:r>
+              <a:t>• Sprints 4 a 6 (Etapa 02 - Semanas 5 a 14):</a:t>
+            </a:r>
+          </a:p>
+          <a:p>
+            <a:pPr>
+              <a:spcAft>
+                <a:spcPts val="600"/>
+              </a:spcAft>
+              <a:defRPr sz="1200">
+                <a:solidFill>
+                  <a:srgbClr val="334155"/>
+                </a:solidFill>
+                <a:latin typeface="Calibri"/>
+              </a:defRPr>
+            </a:pPr>
+            <a:r>
+              <a:t>32 SP planificados para avance final.</a:t>
+            </a:r>
             <a:br/>
-            <a:pPr>
-              <a:defRPr sz="950" b="1">
-                <a:solidFill>
-                  <a:srgbClr val="FBBF24"/>
-                </a:solidFill>
-                <a:latin typeface="Arial"/>
-              </a:defRPr>
-            </a:pPr>
-            <a:r>
-              <a:t>RF-06 Y RF-08 (ESTADOS Y REGULACIÓN):</a:t>
-            </a:r>
-          </a:p>
-          <a:p>
-            <a:pPr>
-              <a:defRPr sz="900">
-                <a:solidFill>
-                  <a:srgbClr val="94A3B8"/>
-                </a:solidFill>
-                <a:latin typeface="Arial"/>
-              </a:defRPr>
-            </a:pPr>
-            <a:r>
-              <a:t>Máquina de estados estricta y compilación de archivo SFT BCRP con hash SHA-256.</a:t>
-            </a:r>
-          </a:p>
-          <a:p>
+            <a:r>
+              <a:t>- Sprint 4: Motor de analítica predictiva MTTR/MTTD.</a:t>
+            </a:r>
             <a:br/>
-            <a:pPr>
-              <a:defRPr sz="950" b="1">
-                <a:solidFill>
-                  <a:srgbClr val="FBBF24"/>
-                </a:solidFill>
-                <a:latin typeface="Arial"/>
-              </a:defRPr>
-            </a:pPr>
-            <a:r>
-              <a:t>RNF ISO/IEC 25010:</a:t>
-            </a:r>
-          </a:p>
-          <a:p>
-            <a:pPr>
-              <a:defRPr sz="900">
-                <a:solidFill>
-                  <a:srgbClr val="94A3B8"/>
-                </a:solidFill>
-                <a:latin typeface="Arial"/>
-              </a:defRPr>
-            </a:pPr>
-            <a:r>
-              <a:t>Latencia REST &lt; 500ms • Cifrado TLS 1.3 / LDAPS • Inmutabilidad probatoria en BD.</a:t>
+            <a:r>
+              <a:t>- Sprint 5: Módulo de descargo bancario y notificaciones.</a:t>
+            </a:r>
+            <a:br/>
+            <a:r>
+              <a:t>- Sprint 6: Auditoría de seguridad OWASP y cierre de proyecto.</a:t>
             </a:r>
           </a:p>
         </p:txBody>
@@ -6864,7 +9098,7 @@
             <a:avLst/>
           </a:prstGeom>
           <a:solidFill>
-            <a:srgbClr val="070D18"/>
+            <a:srgbClr val="F8FAFC"/>
           </a:solidFill>
           <a:ln>
             <a:noFill/>
@@ -6894,156 +9128,24 @@
       </p:sp>
       <p:sp>
         <p:nvSpPr>
-          <p:cNvPr id="3" name="TextBox 2"/>
-          <p:cNvSpPr txBox="1"/>
+          <p:cNvPr id="3" name="Rectangle 2"/>
+          <p:cNvSpPr/>
           <p:nvPr/>
         </p:nvSpPr>
         <p:spPr>
           <a:xfrm>
-            <a:off x="731520" y="365760"/>
-            <a:ext cx="7315200" cy="320040"/>
+            <a:off x="731520" y="320040"/>
+            <a:ext cx="10728655" cy="987552"/>
           </a:xfrm>
           <a:prstGeom prst="rect">
             <a:avLst/>
           </a:prstGeom>
-          <a:noFill/>
-        </p:spPr>
-        <p:txBody>
-          <a:bodyPr wrap="square">
-            <a:spAutoFit/>
-          </a:bodyPr>
-          <a:lstStyle/>
-          <a:p>
-            <a:pPr>
-              <a:defRPr sz="950" b="1">
-                <a:solidFill>
-                  <a:srgbClr val="00D4FF"/>
-                </a:solidFill>
-                <a:latin typeface="Arial"/>
-              </a:defRPr>
-            </a:pPr>
-            <a:r>
-              <a:t>CRITERIO 5 DE RÚBRICA • 4.0 PUNTOS</a:t>
-            </a:r>
-          </a:p>
-        </p:txBody>
-      </p:sp>
-      <p:sp>
-        <p:nvSpPr>
-          <p:cNvPr id="4" name="TextBox 3"/>
-          <p:cNvSpPr txBox="1"/>
-          <p:nvPr/>
-        </p:nvSpPr>
-        <p:spPr>
-          <a:xfrm>
-            <a:off x="731520" y="640080"/>
-            <a:ext cx="10515600" cy="502920"/>
-          </a:xfrm>
-          <a:prstGeom prst="rect">
-            <a:avLst/>
-          </a:prstGeom>
-          <a:noFill/>
-        </p:spPr>
-        <p:txBody>
-          <a:bodyPr wrap="square">
-            <a:spAutoFit/>
-          </a:bodyPr>
-          <a:lstStyle/>
-          <a:p>
-            <a:pPr>
-              <a:defRPr sz="2200" b="1">
-                <a:solidFill>
-                  <a:srgbClr val="FFFFFF"/>
-                </a:solidFill>
-                <a:latin typeface="Arial"/>
-              </a:defRPr>
-            </a:pPr>
-            <a:r>
-              <a:t>Diseño de Procesos de Negocio en Notación BPMN 2.0</a:t>
-            </a:r>
-          </a:p>
-        </p:txBody>
-      </p:sp>
-      <p:sp>
-        <p:nvSpPr>
-          <p:cNvPr id="5" name="TextBox 4"/>
-          <p:cNvSpPr txBox="1"/>
-          <p:nvPr/>
-        </p:nvSpPr>
-        <p:spPr>
-          <a:xfrm>
-            <a:off x="731520" y="1143000"/>
-            <a:ext cx="10515600" cy="320040"/>
-          </a:xfrm>
-          <a:prstGeom prst="rect">
-            <a:avLst/>
-          </a:prstGeom>
-          <a:noFill/>
-        </p:spPr>
-        <p:txBody>
-          <a:bodyPr wrap="square">
-            <a:spAutoFit/>
-          </a:bodyPr>
-          <a:lstStyle/>
-          <a:p>
-            <a:pPr>
-              <a:defRPr sz="1100">
-                <a:solidFill>
-                  <a:srgbClr val="94A3B8"/>
-                </a:solidFill>
-                <a:latin typeface="Arial"/>
-              </a:defRPr>
-            </a:pPr>
-            <a:r>
-              <a:t>Optimización de Flujo: De un proceso manual reactivo a detección autónoma en submilisegundos</a:t>
-            </a:r>
-          </a:p>
-        </p:txBody>
-      </p:sp>
-      <p:pic>
-        <p:nvPicPr>
-          <p:cNvPr id="6" name="Picture 5" descr="figura1_bpmn_flujo_proceso.png"/>
-          <p:cNvPicPr>
-            <a:picLocks noChangeAspect="1"/>
-          </p:cNvPicPr>
-          <p:nvPr/>
-        </p:nvPicPr>
-        <p:blipFill>
-          <a:blip r:embed="rId2"/>
-          <a:stretch>
-            <a:fillRect/>
-          </a:stretch>
-        </p:blipFill>
-        <p:spPr>
-          <a:xfrm>
-            <a:off x="731520" y="1645920"/>
-            <a:ext cx="5943600" cy="4303986"/>
-          </a:xfrm>
-          <a:prstGeom prst="rect">
-            <a:avLst/>
-          </a:prstGeom>
-        </p:spPr>
-      </p:pic>
-      <p:sp>
-        <p:nvSpPr>
-          <p:cNvPr id="7" name="Rounded Rectangle 6"/>
-          <p:cNvSpPr/>
-          <p:nvPr/>
-        </p:nvSpPr>
-        <p:spPr>
-          <a:xfrm>
-            <a:off x="6949440" y="1645920"/>
-            <a:ext cx="4480560" cy="4572000"/>
-          </a:xfrm>
-          <a:prstGeom prst="roundRect">
-            <a:avLst/>
-          </a:prstGeom>
           <a:solidFill>
-            <a:srgbClr val="0F192D"/>
+            <a:srgbClr val="FFFFFF"/>
           </a:solidFill>
-          <a:ln>
+          <a:ln w="19050">
             <a:solidFill>
-              <a:srgbClr val="10B981"/>
+              <a:srgbClr val="CBD5E1"/>
             </a:solidFill>
           </a:ln>
         </p:spPr>
@@ -7062,93 +9164,454 @@
           </a:fontRef>
         </p:style>
         <p:txBody>
-          <a:bodyPr rtlCol="0" anchor="ctr" wrap="square"/>
+          <a:bodyPr rtlCol="0" anchor="ctr"/>
+          <a:lstStyle/>
+          <a:p>
+            <a:pPr algn="ctr"/>
+          </a:p>
+        </p:txBody>
+      </p:sp>
+      <p:sp>
+        <p:nvSpPr>
+          <p:cNvPr id="4" name="Rectangle 3"/>
+          <p:cNvSpPr/>
+          <p:nvPr/>
+        </p:nvSpPr>
+        <p:spPr>
+          <a:xfrm>
+            <a:off x="731520" y="320040"/>
+            <a:ext cx="128016" cy="987552"/>
+          </a:xfrm>
+          <a:prstGeom prst="rect">
+            <a:avLst/>
+          </a:prstGeom>
+          <a:solidFill>
+            <a:srgbClr val="0284C7"/>
+          </a:solidFill>
+          <a:ln>
+            <a:noFill/>
+          </a:ln>
+        </p:spPr>
+        <p:style>
+          <a:lnRef idx="1">
+            <a:schemeClr val="accent1"/>
+          </a:lnRef>
+          <a:fillRef idx="3">
+            <a:schemeClr val="accent1"/>
+          </a:fillRef>
+          <a:effectRef idx="2">
+            <a:schemeClr val="accent1"/>
+          </a:effectRef>
+          <a:fontRef idx="minor">
+            <a:schemeClr val="lt1"/>
+          </a:fontRef>
+        </p:style>
+        <p:txBody>
+          <a:bodyPr rtlCol="0" anchor="ctr"/>
+          <a:lstStyle/>
+          <a:p>
+            <a:pPr algn="ctr"/>
+          </a:p>
+        </p:txBody>
+      </p:sp>
+      <p:sp>
+        <p:nvSpPr>
+          <p:cNvPr id="5" name="TextBox 4"/>
+          <p:cNvSpPr txBox="1"/>
+          <p:nvPr/>
+        </p:nvSpPr>
+        <p:spPr>
+          <a:xfrm>
+            <a:off x="1051560" y="347472"/>
+            <a:ext cx="10149840" cy="914400"/>
+          </a:xfrm>
+          <a:prstGeom prst="rect">
+            <a:avLst/>
+          </a:prstGeom>
+          <a:noFill/>
+        </p:spPr>
+        <p:txBody>
+          <a:bodyPr wrap="square" lIns="0" tIns="0" rIns="0" bIns="0" anchor="t">
+            <a:spAutoFit/>
+          </a:bodyPr>
+          <a:lstStyle/>
+          <a:p>
+            <a:pPr>
+              <a:spcAft>
+                <a:spcPts val="200"/>
+              </a:spcAft>
+              <a:defRPr sz="1150" b="1">
+                <a:solidFill>
+                  <a:srgbClr val="0284C7"/>
+                </a:solidFill>
+                <a:latin typeface="Calibri"/>
+              </a:defRPr>
+            </a:pPr>
+            <a:r>
+              <a:t>CRITERIO 4 DE RÚBRICA • 6.0 PUNTOS</a:t>
+            </a:r>
+          </a:p>
+          <a:p>
+            <a:pPr>
+              <a:spcAft>
+                <a:spcPts val="200"/>
+              </a:spcAft>
+              <a:defRPr sz="2200" b="1">
+                <a:solidFill>
+                  <a:srgbClr val="0B1F3A"/>
+                </a:solidFill>
+                <a:latin typeface="Calibri"/>
+              </a:defRPr>
+            </a:pPr>
+            <a:r>
+              <a:t>Especificación de Requisitos de Software (SRS IEEE 830)</a:t>
+            </a:r>
+          </a:p>
+          <a:p>
+            <a:pPr>
+              <a:defRPr sz="1200">
+                <a:solidFill>
+                  <a:srgbClr val="64748B"/>
+                </a:solidFill>
+                <a:latin typeface="Calibri"/>
+              </a:defRPr>
+            </a:pPr>
+            <a:r>
+              <a:t>Formalización de 12 Requisitos Funcionales y 8 Requisitos No Funcionales ISO/IEC 25010</a:t>
+            </a:r>
+          </a:p>
+        </p:txBody>
+      </p:sp>
+      <p:sp>
+        <p:nvSpPr>
+          <p:cNvPr id="6" name="Rounded Rectangle 5"/>
+          <p:cNvSpPr/>
+          <p:nvPr/>
+        </p:nvSpPr>
+        <p:spPr>
+          <a:xfrm>
+            <a:off x="731520" y="1508760"/>
+            <a:ext cx="2542032" cy="4892040"/>
+          </a:xfrm>
+          <a:prstGeom prst="roundRect">
+            <a:avLst/>
+          </a:prstGeom>
+          <a:solidFill>
+            <a:srgbClr val="FFFFFF"/>
+          </a:solidFill>
+          <a:ln w="27940">
+            <a:solidFill>
+              <a:srgbClr val="93C5FD"/>
+            </a:solidFill>
+          </a:ln>
+        </p:spPr>
+        <p:style>
+          <a:lnRef idx="1">
+            <a:schemeClr val="accent1"/>
+          </a:lnRef>
+          <a:fillRef idx="3">
+            <a:schemeClr val="accent1"/>
+          </a:fillRef>
+          <a:effectRef idx="2">
+            <a:schemeClr val="accent1"/>
+          </a:effectRef>
+          <a:fontRef idx="minor">
+            <a:schemeClr val="lt1"/>
+          </a:fontRef>
+        </p:style>
+        <p:txBody>
+          <a:bodyPr rtlCol="0" anchor="t" wrap="square" tIns="182880" lIns="182880"/>
           <a:lstStyle/>
           <a:p>
             <a:pPr algn="ctr">
-              <a:defRPr sz="1200" b="1">
-                <a:solidFill>
-                  <a:srgbClr val="10B981"/>
-                </a:solidFill>
-                <a:latin typeface="Arial"/>
-              </a:defRPr>
-            </a:pPr>
-            <a:r>
-              <a:t>COMPARATIVA DE PROCESOS BPMN 2.0</a:t>
-            </a:r>
-          </a:p>
-          <a:p>
+              <a:spcAft>
+                <a:spcPts val="1000"/>
+              </a:spcAft>
+              <a:defRPr sz="1400" b="1">
+                <a:solidFill>
+                  <a:srgbClr val="0B1F3A"/>
+                </a:solidFill>
+                <a:latin typeface="Calibri"/>
+              </a:defRPr>
+            </a:pPr>
+            <a:r>
+              <a:t>👥 4 ACTORES FORMALES</a:t>
+            </a:r>
+          </a:p>
+          <a:p>
+            <a:pPr>
+              <a:defRPr sz="1250">
+                <a:solidFill>
+                  <a:srgbClr val="334155"/>
+                </a:solidFill>
+                <a:latin typeface="Calibri"/>
+              </a:defRPr>
+            </a:pPr>
+            <a:r>
+              <a:t>• Operador NOC (Entidad Financiera)</a:t>
+            </a:r>
             <a:br/>
-            <a:pPr>
-              <a:defRPr sz="1050" b="1">
-                <a:solidFill>
-                  <a:srgbClr val="00D4FF"/>
-                </a:solidFill>
-                <a:latin typeface="Arial"/>
-              </a:defRPr>
-            </a:pPr>
-            <a:r>
-              <a:t>PROCESO TO-BE (PROPUESTO):</a:t>
-            </a:r>
-          </a:p>
-          <a:p>
-            <a:pPr>
-              <a:defRPr sz="950">
-                <a:solidFill>
-                  <a:srgbClr val="94A3B8"/>
-                </a:solidFill>
-                <a:latin typeface="Arial"/>
-              </a:defRPr>
-            </a:pPr>
-            <a:r>
-              <a:t>1. Sondeo Asíncrono Paralelo (30s) sin bloquear hilos.</a:t>
+            <a:r>
+              <a:t>• Worker Telemetría (Daemon 30s)</a:t>
             </a:r>
             <a:br/>
             <a:r>
-              <a:t>2. Regla RN-01 Anti-Duplicados: Si ya hay ticket abierto, omite creación.</a:t>
+              <a:t>• Supervisor BCRP (Mesa de Pagos)</a:t>
             </a:r>
             <a:br/>
             <a:r>
-              <a:t>3. Si es nueva caída: Registro atómico con correlativo oficial.</a:t>
+              <a:t>• Administrador TI (Auditoría)</a:t>
             </a:r>
             <a:br/>
-            <a:r>
-              <a:t>4. Actualización instantánea de semáforo rojo y notificación.</a:t>
-            </a:r>
-          </a:p>
-          <a:p>
             <a:br/>
-            <a:pPr>
-              <a:defRPr sz="1050" b="1">
-                <a:solidFill>
-                  <a:srgbClr val="F43F5E"/>
-                </a:solidFill>
-                <a:latin typeface="Arial"/>
-              </a:defRPr>
-            </a:pPr>
-            <a:r>
-              <a:t>PROCESO AS-IS (ACTUAL):</a:t>
-            </a:r>
-          </a:p>
-          <a:p>
-            <a:pPr>
-              <a:defRPr sz="950">
-                <a:solidFill>
-                  <a:srgbClr val="94A3B8"/>
-                </a:solidFill>
-                <a:latin typeface="Arial"/>
-              </a:defRPr>
-            </a:pPr>
-            <a:r>
-              <a:t>• Demoras de 45 a 180 minutos para que el BCRP se entere.</a:t>
+            <a:r>
+              <a:t>Interacción sin fricciones mediante control de acceso RBAC estricto.</a:t>
+            </a:r>
+          </a:p>
+        </p:txBody>
+      </p:sp>
+      <p:sp>
+        <p:nvSpPr>
+          <p:cNvPr id="7" name="Rounded Rectangle 6"/>
+          <p:cNvSpPr/>
+          <p:nvPr/>
+        </p:nvSpPr>
+        <p:spPr>
+          <a:xfrm>
+            <a:off x="3456432" y="1508760"/>
+            <a:ext cx="2542032" cy="4892040"/>
+          </a:xfrm>
+          <a:prstGeom prst="roundRect">
+            <a:avLst/>
+          </a:prstGeom>
+          <a:solidFill>
+            <a:srgbClr val="FFFFFF"/>
+          </a:solidFill>
+          <a:ln w="27940">
+            <a:solidFill>
+              <a:srgbClr val="FCD34D"/>
+            </a:solidFill>
+          </a:ln>
+        </p:spPr>
+        <p:style>
+          <a:lnRef idx="1">
+            <a:schemeClr val="accent1"/>
+          </a:lnRef>
+          <a:fillRef idx="3">
+            <a:schemeClr val="accent1"/>
+          </a:fillRef>
+          <a:effectRef idx="2">
+            <a:schemeClr val="accent1"/>
+          </a:effectRef>
+          <a:fontRef idx="minor">
+            <a:schemeClr val="lt1"/>
+          </a:fontRef>
+        </p:style>
+        <p:txBody>
+          <a:bodyPr rtlCol="0" anchor="t" wrap="square" tIns="182880" lIns="182880"/>
+          <a:lstStyle/>
+          <a:p>
+            <a:pPr algn="ctr">
+              <a:spcAft>
+                <a:spcPts val="1000"/>
+              </a:spcAft>
+              <a:defRPr sz="1400" b="1">
+                <a:solidFill>
+                  <a:srgbClr val="0B1F3A"/>
+                </a:solidFill>
+                <a:latin typeface="Calibri"/>
+              </a:defRPr>
+            </a:pPr>
+            <a:r>
+              <a:t>🔑 REQUISITO CLAVE: RF-01</a:t>
+            </a:r>
+          </a:p>
+          <a:p>
+            <a:pPr>
+              <a:defRPr sz="1250">
+                <a:solidFill>
+                  <a:srgbClr val="334155"/>
+                </a:solidFill>
+                <a:latin typeface="Calibri"/>
+              </a:defRPr>
+            </a:pPr>
+            <a:r>
+              <a:t>• Autenticación Única Centralizada:</a:t>
             </a:r>
             <a:br/>
             <a:r>
-              <a:t>• Reportes heterogéneos y dispersión en correos o llamadas.</a:t>
+              <a:t>El caso de estudio exige un solo login corporativo contra Directorio Activo (AD/LDAP).</a:t>
             </a:r>
             <a:br/>
-            <a:r>
-              <a:t>• Asimetría de información y riesgo sistémico financiero.</a:t>
+            <a:br/>
+            <a:r>
+              <a:t>Cero credenciales locales dispersas.</a:t>
+            </a:r>
+          </a:p>
+        </p:txBody>
+      </p:sp>
+      <p:sp>
+        <p:nvSpPr>
+          <p:cNvPr id="8" name="Rounded Rectangle 7"/>
+          <p:cNvSpPr/>
+          <p:nvPr/>
+        </p:nvSpPr>
+        <p:spPr>
+          <a:xfrm>
+            <a:off x="6181344" y="1508760"/>
+            <a:ext cx="2542032" cy="4892040"/>
+          </a:xfrm>
+          <a:prstGeom prst="roundRect">
+            <a:avLst/>
+          </a:prstGeom>
+          <a:solidFill>
+            <a:srgbClr val="FFFFFF"/>
+          </a:solidFill>
+          <a:ln w="27940">
+            <a:solidFill>
+              <a:srgbClr val="CBD5E1"/>
+            </a:solidFill>
+          </a:ln>
+        </p:spPr>
+        <p:style>
+          <a:lnRef idx="1">
+            <a:schemeClr val="accent1"/>
+          </a:lnRef>
+          <a:fillRef idx="3">
+            <a:schemeClr val="accent1"/>
+          </a:fillRef>
+          <a:effectRef idx="2">
+            <a:schemeClr val="accent1"/>
+          </a:effectRef>
+          <a:fontRef idx="minor">
+            <a:schemeClr val="lt1"/>
+          </a:fontRef>
+        </p:style>
+        <p:txBody>
+          <a:bodyPr rtlCol="0" anchor="t" wrap="square" tIns="182880" lIns="182880"/>
+          <a:lstStyle/>
+          <a:p>
+            <a:pPr algn="ctr">
+              <a:spcAft>
+                <a:spcPts val="1000"/>
+              </a:spcAft>
+              <a:defRPr sz="1400" b="1">
+                <a:solidFill>
+                  <a:srgbClr val="0B1F3A"/>
+                </a:solidFill>
+                <a:latin typeface="Calibri"/>
+              </a:defRPr>
+            </a:pPr>
+            <a:r>
+              <a:t>⚙️ REQUISITOS CORE RF-02 A RF-08</a:t>
+            </a:r>
+          </a:p>
+          <a:p>
+            <a:pPr>
+              <a:defRPr sz="1250">
+                <a:solidFill>
+                  <a:srgbClr val="334155"/>
+                </a:solidFill>
+                <a:latin typeface="Calibri"/>
+              </a:defRPr>
+            </a:pPr>
+            <a:r>
+              <a:t>• RF-03: Polling asíncrono cada 30 segundos.</a:t>
+            </a:r>
+            <a:br/>
+            <a:r>
+              <a:t>• RF-04: Auto-categorización HTTP 5xx.</a:t>
+            </a:r>
+            <a:br/>
+            <a:r>
+              <a:t>• RF-06: Máquina de estados formal.</a:t>
+            </a:r>
+            <a:br/>
+            <a:r>
+              <a:t>• RF-08: Compilador SFT con hash SHA-256.</a:t>
+            </a:r>
+          </a:p>
+        </p:txBody>
+      </p:sp>
+      <p:sp>
+        <p:nvSpPr>
+          <p:cNvPr id="9" name="Rounded Rectangle 8"/>
+          <p:cNvSpPr/>
+          <p:nvPr/>
+        </p:nvSpPr>
+        <p:spPr>
+          <a:xfrm>
+            <a:off x="8906256" y="1508760"/>
+            <a:ext cx="2542032" cy="4892040"/>
+          </a:xfrm>
+          <a:prstGeom prst="roundRect">
+            <a:avLst/>
+          </a:prstGeom>
+          <a:solidFill>
+            <a:srgbClr val="FFFFFF"/>
+          </a:solidFill>
+          <a:ln w="27940">
+            <a:solidFill>
+              <a:srgbClr val="6EE7B7"/>
+            </a:solidFill>
+          </a:ln>
+        </p:spPr>
+        <p:style>
+          <a:lnRef idx="1">
+            <a:schemeClr val="accent1"/>
+          </a:lnRef>
+          <a:fillRef idx="3">
+            <a:schemeClr val="accent1"/>
+          </a:fillRef>
+          <a:effectRef idx="2">
+            <a:schemeClr val="accent1"/>
+          </a:effectRef>
+          <a:fontRef idx="minor">
+            <a:schemeClr val="lt1"/>
+          </a:fontRef>
+        </p:style>
+        <p:txBody>
+          <a:bodyPr rtlCol="0" anchor="t" wrap="square" tIns="182880" lIns="182880"/>
+          <a:lstStyle/>
+          <a:p>
+            <a:pPr algn="ctr">
+              <a:spcAft>
+                <a:spcPts val="1000"/>
+              </a:spcAft>
+              <a:defRPr sz="1400" b="1">
+                <a:solidFill>
+                  <a:srgbClr val="0B1F3A"/>
+                </a:solidFill>
+                <a:latin typeface="Calibri"/>
+              </a:defRPr>
+            </a:pPr>
+            <a:r>
+              <a:t>🛡️ RNF BAJO ISO/IEC 25010</a:t>
+            </a:r>
+          </a:p>
+          <a:p>
+            <a:pPr>
+              <a:defRPr sz="1250">
+                <a:solidFill>
+                  <a:srgbClr val="334155"/>
+                </a:solidFill>
+                <a:latin typeface="Calibri"/>
+              </a:defRPr>
+            </a:pPr>
+            <a:r>
+              <a:t>• Rendimiento: Latencia API &lt; 500ms.</a:t>
+            </a:r>
+            <a:br/>
+            <a:r>
+              <a:t>• Seguridad: Cifrado TLS 1.3 / LDAPS.</a:t>
+            </a:r>
+            <a:br/>
+            <a:r>
+              <a:t>• Fiabilidad: SLA 99.9% de disponibilidad.</a:t>
+            </a:r>
+            <a:br/>
+            <a:r>
+              <a:t>• Integridad: Inmutabilidad total en BD.</a:t>
             </a:r>
           </a:p>
         </p:txBody>
@@ -7186,7 +9649,7 @@
             <a:avLst/>
           </a:prstGeom>
           <a:solidFill>
-            <a:srgbClr val="070D18"/>
+            <a:srgbClr val="F8FAFC"/>
           </a:solidFill>
           <a:ln>
             <a:noFill/>
@@ -7216,14 +9679,102 @@
       </p:sp>
       <p:sp>
         <p:nvSpPr>
-          <p:cNvPr id="3" name="TextBox 2"/>
+          <p:cNvPr id="3" name="Rectangle 2"/>
+          <p:cNvSpPr/>
+          <p:nvPr/>
+        </p:nvSpPr>
+        <p:spPr>
+          <a:xfrm>
+            <a:off x="731520" y="320040"/>
+            <a:ext cx="10728655" cy="987552"/>
+          </a:xfrm>
+          <a:prstGeom prst="rect">
+            <a:avLst/>
+          </a:prstGeom>
+          <a:solidFill>
+            <a:srgbClr val="FFFFFF"/>
+          </a:solidFill>
+          <a:ln w="19050">
+            <a:solidFill>
+              <a:srgbClr val="CBD5E1"/>
+            </a:solidFill>
+          </a:ln>
+        </p:spPr>
+        <p:style>
+          <a:lnRef idx="1">
+            <a:schemeClr val="accent1"/>
+          </a:lnRef>
+          <a:fillRef idx="3">
+            <a:schemeClr val="accent1"/>
+          </a:fillRef>
+          <a:effectRef idx="2">
+            <a:schemeClr val="accent1"/>
+          </a:effectRef>
+          <a:fontRef idx="minor">
+            <a:schemeClr val="lt1"/>
+          </a:fontRef>
+        </p:style>
+        <p:txBody>
+          <a:bodyPr rtlCol="0" anchor="ctr"/>
+          <a:lstStyle/>
+          <a:p>
+            <a:pPr algn="ctr"/>
+          </a:p>
+        </p:txBody>
+      </p:sp>
+      <p:sp>
+        <p:nvSpPr>
+          <p:cNvPr id="4" name="Rectangle 3"/>
+          <p:cNvSpPr/>
+          <p:nvPr/>
+        </p:nvSpPr>
+        <p:spPr>
+          <a:xfrm>
+            <a:off x="731520" y="320040"/>
+            <a:ext cx="128016" cy="987552"/>
+          </a:xfrm>
+          <a:prstGeom prst="rect">
+            <a:avLst/>
+          </a:prstGeom>
+          <a:solidFill>
+            <a:srgbClr val="0284C7"/>
+          </a:solidFill>
+          <a:ln>
+            <a:noFill/>
+          </a:ln>
+        </p:spPr>
+        <p:style>
+          <a:lnRef idx="1">
+            <a:schemeClr val="accent1"/>
+          </a:lnRef>
+          <a:fillRef idx="3">
+            <a:schemeClr val="accent1"/>
+          </a:fillRef>
+          <a:effectRef idx="2">
+            <a:schemeClr val="accent1"/>
+          </a:effectRef>
+          <a:fontRef idx="minor">
+            <a:schemeClr val="lt1"/>
+          </a:fontRef>
+        </p:style>
+        <p:txBody>
+          <a:bodyPr rtlCol="0" anchor="ctr"/>
+          <a:lstStyle/>
+          <a:p>
+            <a:pPr algn="ctr"/>
+          </a:p>
+        </p:txBody>
+      </p:sp>
+      <p:sp>
+        <p:nvSpPr>
+          <p:cNvPr id="5" name="TextBox 4"/>
           <p:cNvSpPr txBox="1"/>
           <p:nvPr/>
         </p:nvSpPr>
         <p:spPr>
           <a:xfrm>
-            <a:off x="731520" y="365760"/>
-            <a:ext cx="7315200" cy="320040"/>
+            <a:off x="1051560" y="347472"/>
+            <a:ext cx="10149840" cy="914400"/>
           </a:xfrm>
           <a:prstGeom prst="rect">
             <a:avLst/>
@@ -7231,100 +9782,105 @@
           <a:noFill/>
         </p:spPr>
         <p:txBody>
-          <a:bodyPr wrap="square">
+          <a:bodyPr wrap="square" lIns="0" tIns="0" rIns="0" bIns="0" anchor="t">
             <a:spAutoFit/>
           </a:bodyPr>
           <a:lstStyle/>
           <a:p>
             <a:pPr>
-              <a:defRPr sz="950" b="1">
-                <a:solidFill>
-                  <a:srgbClr val="00D4FF"/>
-                </a:solidFill>
-                <a:latin typeface="Arial"/>
-              </a:defRPr>
-            </a:pPr>
-            <a:r>
-              <a:t>CRITERIO 5 DE RÚBRICA • 4.0 PUNTOS</a:t>
-            </a:r>
-          </a:p>
-        </p:txBody>
-      </p:sp>
-      <p:sp>
-        <p:nvSpPr>
-          <p:cNvPr id="4" name="TextBox 3"/>
-          <p:cNvSpPr txBox="1"/>
+              <a:spcAft>
+                <a:spcPts val="200"/>
+              </a:spcAft>
+              <a:defRPr sz="1150" b="1">
+                <a:solidFill>
+                  <a:srgbClr val="0284C7"/>
+                </a:solidFill>
+                <a:latin typeface="Calibri"/>
+              </a:defRPr>
+            </a:pPr>
+            <a:r>
+              <a:t>CRITERIO 4 DE RÚBRICA • 6.0 PUNTOS</a:t>
+            </a:r>
+          </a:p>
+          <a:p>
+            <a:pPr>
+              <a:spcAft>
+                <a:spcPts val="200"/>
+              </a:spcAft>
+              <a:defRPr sz="2200" b="1">
+                <a:solidFill>
+                  <a:srgbClr val="0B1F3A"/>
+                </a:solidFill>
+                <a:latin typeface="Calibri"/>
+              </a:defRPr>
+            </a:pPr>
+            <a:r>
+              <a:t>Diagrama de Casos de Uso del Sistema (UML 2.5)</a:t>
+            </a:r>
+          </a:p>
+          <a:p>
+            <a:pPr>
+              <a:defRPr sz="1200">
+                <a:solidFill>
+                  <a:srgbClr val="64748B"/>
+                </a:solidFill>
+                <a:latin typeface="Calibri"/>
+              </a:defRPr>
+            </a:pPr>
+            <a:r>
+              <a:t>Modelado visual de la interacción entre los 4 actores y los casos de uso normativos del sistema</a:t>
+            </a:r>
+          </a:p>
+        </p:txBody>
+      </p:sp>
+      <p:sp>
+        <p:nvSpPr>
+          <p:cNvPr id="6" name="Rounded Rectangle 5"/>
+          <p:cNvSpPr/>
           <p:nvPr/>
         </p:nvSpPr>
         <p:spPr>
           <a:xfrm>
-            <a:off x="731520" y="640080"/>
-            <a:ext cx="10515600" cy="502920"/>
-          </a:xfrm>
-          <a:prstGeom prst="rect">
+            <a:off x="731520" y="1417320"/>
+            <a:ext cx="10728655" cy="4160520"/>
+          </a:xfrm>
+          <a:prstGeom prst="roundRect">
             <a:avLst/>
           </a:prstGeom>
-          <a:noFill/>
-        </p:spPr>
-        <p:txBody>
-          <a:bodyPr wrap="square">
-            <a:spAutoFit/>
-          </a:bodyPr>
-          <a:lstStyle/>
-          <a:p>
-            <a:pPr>
-              <a:defRPr sz="2200" b="1">
-                <a:solidFill>
-                  <a:srgbClr val="FFFFFF"/>
-                </a:solidFill>
-                <a:latin typeface="Arial"/>
-              </a:defRPr>
-            </a:pPr>
-            <a:r>
-              <a:t>Arquitectura Hexagonal en Java 17 y PostgreSQL Inmutable</a:t>
-            </a:r>
-          </a:p>
-        </p:txBody>
-      </p:sp>
-      <p:sp>
-        <p:nvSpPr>
-          <p:cNvPr id="5" name="TextBox 4"/>
-          <p:cNvSpPr txBox="1"/>
-          <p:nvPr/>
-        </p:nvSpPr>
-        <p:spPr>
-          <a:xfrm>
-            <a:off x="731520" y="1143000"/>
-            <a:ext cx="10515600" cy="320040"/>
-          </a:xfrm>
-          <a:prstGeom prst="rect">
-            <a:avLst/>
-          </a:prstGeom>
-          <a:noFill/>
-        </p:spPr>
-        <p:txBody>
-          <a:bodyPr wrap="square">
-            <a:spAutoFit/>
-          </a:bodyPr>
-          <a:lstStyle/>
-          <a:p>
-            <a:pPr>
-              <a:defRPr sz="1100">
-                <a:solidFill>
-                  <a:srgbClr val="94A3B8"/>
-                </a:solidFill>
-                <a:latin typeface="Arial"/>
-              </a:defRPr>
-            </a:pPr>
-            <a:r>
-              <a:t>Clean Architecture con principios SOLID e inmutabilidad garantizada a nivel de motor SQL</a:t>
-            </a:r>
+          <a:solidFill>
+            <a:srgbClr val="0F172A"/>
+          </a:solidFill>
+          <a:ln w="22860">
+            <a:solidFill>
+              <a:srgbClr val="38BDF8"/>
+            </a:solidFill>
+          </a:ln>
+        </p:spPr>
+        <p:style>
+          <a:lnRef idx="1">
+            <a:schemeClr val="accent1"/>
+          </a:lnRef>
+          <a:fillRef idx="3">
+            <a:schemeClr val="accent1"/>
+          </a:fillRef>
+          <a:effectRef idx="2">
+            <a:schemeClr val="accent1"/>
+          </a:effectRef>
+          <a:fontRef idx="minor">
+            <a:schemeClr val="lt1"/>
+          </a:fontRef>
+        </p:style>
+        <p:txBody>
+          <a:bodyPr rtlCol="0" anchor="ctr"/>
+          <a:lstStyle/>
+          <a:p>
+            <a:pPr algn="ctr"/>
           </a:p>
         </p:txBody>
       </p:sp>
       <p:pic>
         <p:nvPicPr>
-          <p:cNvPr id="6" name="Picture 5" descr="figura6_arquitectura_hexagonal.png"/>
+          <p:cNvPr id="7" name="Picture 6" descr="figura2_casos_de_uso.png"/>
           <p:cNvPicPr>
             <a:picLocks noChangeAspect="1"/>
           </p:cNvPicPr>
@@ -7338,8 +9894,8 @@
         </p:blipFill>
         <p:spPr>
           <a:xfrm>
-            <a:off x="731520" y="1645920"/>
-            <a:ext cx="5669280" cy="2473868"/>
+            <a:off x="2066543" y="1490472"/>
+            <a:ext cx="8046720" cy="3704046"/>
           </a:xfrm>
           <a:prstGeom prst="rect">
             <a:avLst/>
@@ -7348,24 +9904,24 @@
       </p:pic>
       <p:sp>
         <p:nvSpPr>
-          <p:cNvPr id="7" name="Rounded Rectangle 6"/>
+          <p:cNvPr id="8" name="Rounded Rectangle 7"/>
           <p:cNvSpPr/>
           <p:nvPr/>
         </p:nvSpPr>
         <p:spPr>
           <a:xfrm>
-            <a:off x="6675120" y="1645920"/>
-            <a:ext cx="4754880" cy="4572000"/>
+            <a:off x="731520" y="5715000"/>
+            <a:ext cx="3447288" cy="777240"/>
           </a:xfrm>
           <a:prstGeom prst="roundRect">
             <a:avLst/>
           </a:prstGeom>
           <a:solidFill>
-            <a:srgbClr val="0F192D"/>
+            <a:srgbClr val="FFFFFF"/>
           </a:solidFill>
-          <a:ln>
+          <a:ln w="25400">
             <a:solidFill>
-              <a:srgbClr val="00D4FF"/>
+              <a:srgbClr val="93C5FD"/>
             </a:solidFill>
           </a:ln>
         </p:spPr>
@@ -7384,127 +9940,168 @@
           </a:fontRef>
         </p:style>
         <p:txBody>
-          <a:bodyPr rtlCol="0" anchor="ctr" wrap="square"/>
+          <a:bodyPr rtlCol="0" anchor="t" wrap="square" tIns="91440" lIns="164592"/>
           <a:lstStyle/>
           <a:p>
             <a:pPr algn="ctr">
-              <a:defRPr sz="1200" b="1">
-                <a:solidFill>
-                  <a:srgbClr val="00D4FF"/>
-                </a:solidFill>
-                <a:latin typeface="Arial"/>
-              </a:defRPr>
-            </a:pPr>
-            <a:r>
-              <a:t>PILARES DE INGENIERÍA DE SOFTWARE</a:t>
-            </a:r>
-          </a:p>
-          <a:p>
-            <a:br/>
-            <a:pPr>
-              <a:defRPr sz="950" b="1">
-                <a:solidFill>
-                  <a:srgbClr val="FBBF24"/>
-                </a:solidFill>
-                <a:latin typeface="Arial"/>
-              </a:defRPr>
-            </a:pPr>
-            <a:r>
-              <a:t>ARQUITECTURA HEXAGONAL (PORTS &amp; ADAPTERS):</a:t>
-            </a:r>
-          </a:p>
-          <a:p>
-            <a:pPr>
-              <a:defRPr sz="900">
-                <a:solidFill>
-                  <a:srgbClr val="94A3B8"/>
-                </a:solidFill>
-                <a:latin typeface="Arial"/>
-              </a:defRPr>
-            </a:pPr>
-            <a:r>
-              <a:t>Dominio Java 17 puro (Incidente, Entidad) aislado de frameworks. Puerto IIncidenteService desacoplando adaptadores Web REST, Worker y JPA.</a:t>
-            </a:r>
-          </a:p>
-          <a:p>
-            <a:br/>
-            <a:pPr>
-              <a:defRPr sz="950" b="1">
-                <a:solidFill>
-                  <a:srgbClr val="FBBF24"/>
-                </a:solidFill>
-                <a:latin typeface="Arial"/>
-              </a:defRPr>
-            </a:pPr>
-            <a:r>
-              <a:t>POSTGRESQL 15 INMUTABLE (APPEND-ONLY):</a:t>
-            </a:r>
-          </a:p>
-          <a:p>
-            <a:pPr>
-              <a:defRPr sz="900">
-                <a:solidFill>
-                  <a:srgbClr val="94A3B8"/>
-                </a:solidFill>
-                <a:latin typeface="Arial"/>
-              </a:defRPr>
-            </a:pPr>
-            <a:r>
-              <a:t>Trigger trg_prohibir_mutacion_historial que lanza RAISE EXCEPTION ante cualquier UPDATE o DELETE. La auditoría histórica es matemáticamente inalterable.</a:t>
-            </a:r>
-          </a:p>
-          <a:p>
-            <a:br/>
-            <a:pPr>
-              <a:defRPr sz="950" b="1">
-                <a:solidFill>
-                  <a:srgbClr val="FBBF24"/>
-                </a:solidFill>
-                <a:latin typeface="Arial"/>
-              </a:defRPr>
-            </a:pPr>
-            <a:r>
-              <a:t>ÍNDICE PARCIAL ANTI-CARRERAS:</a:t>
-            </a:r>
-          </a:p>
-          <a:p>
-            <a:pPr>
-              <a:defRPr sz="900">
-                <a:solidFill>
-                  <a:srgbClr val="94A3B8"/>
-                </a:solidFill>
-                <a:latin typeface="Arial"/>
-              </a:defRPr>
-            </a:pPr>
-            <a:r>
-              <a:t>CREATE UNIQUE INDEX idx_incidente_abierto_unico ON incidentes(entidad_id) WHERE estado IN ('ABIERTO', 'EN_INVESTIGACION'); Evita colisiones concurrentes.</a:t>
-            </a:r>
-          </a:p>
-          <a:p>
-            <a:br/>
-            <a:pPr>
-              <a:defRPr sz="950" b="1">
-                <a:solidFill>
-                  <a:srgbClr val="FBBF24"/>
-                </a:solidFill>
-                <a:latin typeface="Arial"/>
-              </a:defRPr>
-            </a:pPr>
-            <a:r>
-              <a:t>INTEGRIDAD CRIPTOGRÁFICA SHA-256:</a:t>
-            </a:r>
-          </a:p>
-          <a:p>
-            <a:pPr>
-              <a:defRPr sz="900">
-                <a:solidFill>
-                  <a:srgbClr val="94A3B8"/>
-                </a:solidFill>
-                <a:latin typeface="Arial"/>
-              </a:defRPr>
-            </a:pPr>
-            <a:r>
-              <a:t>Generación de digest de 64 caracteres en el bloque 03 del archivo SFT para garantizar no repudio regulatorio.</a:t>
+              <a:defRPr sz="1250" b="1">
+                <a:solidFill>
+                  <a:srgbClr val="0B1F3A"/>
+                </a:solidFill>
+                <a:latin typeface="Calibri"/>
+              </a:defRPr>
+            </a:pPr>
+            <a:r>
+              <a:t>4 ACTORES ROBUSTOS</a:t>
+            </a:r>
+          </a:p>
+          <a:p>
+            <a:pPr>
+              <a:defRPr sz="1150">
+                <a:solidFill>
+                  <a:srgbClr val="334155"/>
+                </a:solidFill>
+                <a:latin typeface="Calibri"/>
+              </a:defRPr>
+            </a:pPr>
+            <a:r>
+              <a:t>Operador NOC, Worker Telemetría, Supervisor BCRP y Administrador TI.</a:t>
+            </a:r>
+          </a:p>
+        </p:txBody>
+      </p:sp>
+      <p:sp>
+        <p:nvSpPr>
+          <p:cNvPr id="9" name="Rounded Rectangle 8"/>
+          <p:cNvSpPr/>
+          <p:nvPr/>
+        </p:nvSpPr>
+        <p:spPr>
+          <a:xfrm>
+            <a:off x="4361688" y="5715000"/>
+            <a:ext cx="3447288" cy="777240"/>
+          </a:xfrm>
+          <a:prstGeom prst="roundRect">
+            <a:avLst/>
+          </a:prstGeom>
+          <a:solidFill>
+            <a:srgbClr val="FFFFFF"/>
+          </a:solidFill>
+          <a:ln w="25400">
+            <a:solidFill>
+              <a:srgbClr val="FCD34D"/>
+            </a:solidFill>
+          </a:ln>
+        </p:spPr>
+        <p:style>
+          <a:lnRef idx="1">
+            <a:schemeClr val="accent1"/>
+          </a:lnRef>
+          <a:fillRef idx="3">
+            <a:schemeClr val="accent1"/>
+          </a:fillRef>
+          <a:effectRef idx="2">
+            <a:schemeClr val="accent1"/>
+          </a:effectRef>
+          <a:fontRef idx="minor">
+            <a:schemeClr val="lt1"/>
+          </a:fontRef>
+        </p:style>
+        <p:txBody>
+          <a:bodyPr rtlCol="0" anchor="t" wrap="square" tIns="91440" lIns="164592"/>
+          <a:lstStyle/>
+          <a:p>
+            <a:pPr algn="ctr">
+              <a:defRPr sz="1250" b="1">
+                <a:solidFill>
+                  <a:srgbClr val="0B1F3A"/>
+                </a:solidFill>
+                <a:latin typeface="Calibri"/>
+              </a:defRPr>
+            </a:pPr>
+            <a:r>
+              <a:t>LÍMITES DEL SISTEMA</a:t>
+            </a:r>
+          </a:p>
+          <a:p>
+            <a:pPr>
+              <a:defRPr sz="1150">
+                <a:solidFill>
+                  <a:srgbClr val="334155"/>
+                </a:solidFill>
+                <a:latin typeface="Calibri"/>
+              </a:defRPr>
+            </a:pPr>
+            <a:r>
+              <a:t>Aislamiento estricto de las entidades supervisadas vs el core del BCRP.</a:t>
+            </a:r>
+          </a:p>
+        </p:txBody>
+      </p:sp>
+      <p:sp>
+        <p:nvSpPr>
+          <p:cNvPr id="10" name="Rounded Rectangle 9"/>
+          <p:cNvSpPr/>
+          <p:nvPr/>
+        </p:nvSpPr>
+        <p:spPr>
+          <a:xfrm>
+            <a:off x="7991856" y="5715000"/>
+            <a:ext cx="3447288" cy="777240"/>
+          </a:xfrm>
+          <a:prstGeom prst="roundRect">
+            <a:avLst/>
+          </a:prstGeom>
+          <a:solidFill>
+            <a:srgbClr val="FFFFFF"/>
+          </a:solidFill>
+          <a:ln w="25400">
+            <a:solidFill>
+              <a:srgbClr val="6EE7B7"/>
+            </a:solidFill>
+          </a:ln>
+        </p:spPr>
+        <p:style>
+          <a:lnRef idx="1">
+            <a:schemeClr val="accent1"/>
+          </a:lnRef>
+          <a:fillRef idx="3">
+            <a:schemeClr val="accent1"/>
+          </a:fillRef>
+          <a:effectRef idx="2">
+            <a:schemeClr val="accent1"/>
+          </a:effectRef>
+          <a:fontRef idx="minor">
+            <a:schemeClr val="lt1"/>
+          </a:fontRef>
+        </p:style>
+        <p:txBody>
+          <a:bodyPr rtlCol="0" anchor="t" wrap="square" tIns="91440" lIns="164592"/>
+          <a:lstStyle/>
+          <a:p>
+            <a:pPr algn="ctr">
+              <a:defRPr sz="1250" b="1">
+                <a:solidFill>
+                  <a:srgbClr val="0B1F3A"/>
+                </a:solidFill>
+                <a:latin typeface="Calibri"/>
+              </a:defRPr>
+            </a:pPr>
+            <a:r>
+              <a:t>TRAZABILIDAD 100%</a:t>
+            </a:r>
+          </a:p>
+          <a:p>
+            <a:pPr>
+              <a:defRPr sz="1150">
+                <a:solidFill>
+                  <a:srgbClr val="334155"/>
+                </a:solidFill>
+                <a:latin typeface="Calibri"/>
+              </a:defRPr>
+            </a:pPr>
+            <a:r>
+              <a:t>Cada caso de uso mapea directamente con los 12 RFs del estándar IEEE 830.</a:t>
             </a:r>
           </a:p>
         </p:txBody>
@@ -7542,7 +10139,7 @@
             <a:avLst/>
           </a:prstGeom>
           <a:solidFill>
-            <a:srgbClr val="070D18"/>
+            <a:srgbClr val="F8FAFC"/>
           </a:solidFill>
           <a:ln>
             <a:noFill/>
@@ -7572,14 +10169,102 @@
       </p:sp>
       <p:sp>
         <p:nvSpPr>
-          <p:cNvPr id="3" name="TextBox 2"/>
+          <p:cNvPr id="3" name="Rectangle 2"/>
+          <p:cNvSpPr/>
+          <p:nvPr/>
+        </p:nvSpPr>
+        <p:spPr>
+          <a:xfrm>
+            <a:off x="731520" y="320040"/>
+            <a:ext cx="10728655" cy="987552"/>
+          </a:xfrm>
+          <a:prstGeom prst="rect">
+            <a:avLst/>
+          </a:prstGeom>
+          <a:solidFill>
+            <a:srgbClr val="FFFFFF"/>
+          </a:solidFill>
+          <a:ln w="19050">
+            <a:solidFill>
+              <a:srgbClr val="CBD5E1"/>
+            </a:solidFill>
+          </a:ln>
+        </p:spPr>
+        <p:style>
+          <a:lnRef idx="1">
+            <a:schemeClr val="accent1"/>
+          </a:lnRef>
+          <a:fillRef idx="3">
+            <a:schemeClr val="accent1"/>
+          </a:fillRef>
+          <a:effectRef idx="2">
+            <a:schemeClr val="accent1"/>
+          </a:effectRef>
+          <a:fontRef idx="minor">
+            <a:schemeClr val="lt1"/>
+          </a:fontRef>
+        </p:style>
+        <p:txBody>
+          <a:bodyPr rtlCol="0" anchor="ctr"/>
+          <a:lstStyle/>
+          <a:p>
+            <a:pPr algn="ctr"/>
+          </a:p>
+        </p:txBody>
+      </p:sp>
+      <p:sp>
+        <p:nvSpPr>
+          <p:cNvPr id="4" name="Rectangle 3"/>
+          <p:cNvSpPr/>
+          <p:nvPr/>
+        </p:nvSpPr>
+        <p:spPr>
+          <a:xfrm>
+            <a:off x="731520" y="320040"/>
+            <a:ext cx="128016" cy="987552"/>
+          </a:xfrm>
+          <a:prstGeom prst="rect">
+            <a:avLst/>
+          </a:prstGeom>
+          <a:solidFill>
+            <a:srgbClr val="0284C7"/>
+          </a:solidFill>
+          <a:ln>
+            <a:noFill/>
+          </a:ln>
+        </p:spPr>
+        <p:style>
+          <a:lnRef idx="1">
+            <a:schemeClr val="accent1"/>
+          </a:lnRef>
+          <a:fillRef idx="3">
+            <a:schemeClr val="accent1"/>
+          </a:fillRef>
+          <a:effectRef idx="2">
+            <a:schemeClr val="accent1"/>
+          </a:effectRef>
+          <a:fontRef idx="minor">
+            <a:schemeClr val="lt1"/>
+          </a:fontRef>
+        </p:style>
+        <p:txBody>
+          <a:bodyPr rtlCol="0" anchor="ctr"/>
+          <a:lstStyle/>
+          <a:p>
+            <a:pPr algn="ctr"/>
+          </a:p>
+        </p:txBody>
+      </p:sp>
+      <p:sp>
+        <p:nvSpPr>
+          <p:cNvPr id="5" name="TextBox 4"/>
           <p:cNvSpPr txBox="1"/>
           <p:nvPr/>
         </p:nvSpPr>
         <p:spPr>
           <a:xfrm>
-            <a:off x="731520" y="365760"/>
-            <a:ext cx="7315200" cy="320040"/>
+            <a:off x="1051560" y="347472"/>
+            <a:ext cx="10149840" cy="914400"/>
           </a:xfrm>
           <a:prstGeom prst="rect">
             <a:avLst/>
@@ -7587,100 +10272,105 @@
           <a:noFill/>
         </p:spPr>
         <p:txBody>
-          <a:bodyPr wrap="square">
+          <a:bodyPr wrap="square" lIns="0" tIns="0" rIns="0" bIns="0" anchor="t">
             <a:spAutoFit/>
           </a:bodyPr>
           <a:lstStyle/>
           <a:p>
             <a:pPr>
-              <a:defRPr sz="950" b="1">
-                <a:solidFill>
-                  <a:srgbClr val="00D4FF"/>
-                </a:solidFill>
-                <a:latin typeface="Arial"/>
-              </a:defRPr>
-            </a:pPr>
-            <a:r>
-              <a:t>CRITERIO 6 DE RÚBRICA • 2.0 PUNTOS</a:t>
-            </a:r>
-          </a:p>
-        </p:txBody>
-      </p:sp>
-      <p:sp>
-        <p:nvSpPr>
-          <p:cNvPr id="4" name="TextBox 3"/>
-          <p:cNvSpPr txBox="1"/>
+              <a:spcAft>
+                <a:spcPts val="200"/>
+              </a:spcAft>
+              <a:defRPr sz="1150" b="1">
+                <a:solidFill>
+                  <a:srgbClr val="0284C7"/>
+                </a:solidFill>
+                <a:latin typeface="Calibri"/>
+              </a:defRPr>
+            </a:pPr>
+            <a:r>
+              <a:t>CRITERIO 5 DE RÚBRICA • 4.0 PUNTOS</a:t>
+            </a:r>
+          </a:p>
+          <a:p>
+            <a:pPr>
+              <a:spcAft>
+                <a:spcPts val="200"/>
+              </a:spcAft>
+              <a:defRPr sz="2200" b="1">
+                <a:solidFill>
+                  <a:srgbClr val="0B1F3A"/>
+                </a:solidFill>
+                <a:latin typeface="Calibri"/>
+              </a:defRPr>
+            </a:pPr>
+            <a:r>
+              <a:t>Modelado de Procesos de Negocio en Notación BPMN 2.0</a:t>
+            </a:r>
+          </a:p>
+          <a:p>
+            <a:pPr>
+              <a:defRPr sz="1200">
+                <a:solidFill>
+                  <a:srgbClr val="64748B"/>
+                </a:solidFill>
+                <a:latin typeface="Calibri"/>
+              </a:defRPr>
+            </a:pPr>
+            <a:r>
+              <a:t>Optimización de Flujo: De un proceso manual reactivo (180 min) a detección autónoma en &lt; 30 segundos</a:t>
+            </a:r>
+          </a:p>
+        </p:txBody>
+      </p:sp>
+      <p:sp>
+        <p:nvSpPr>
+          <p:cNvPr id="6" name="Rounded Rectangle 5"/>
+          <p:cNvSpPr/>
           <p:nvPr/>
         </p:nvSpPr>
         <p:spPr>
           <a:xfrm>
-            <a:off x="731520" y="640080"/>
-            <a:ext cx="10515600" cy="502920"/>
-          </a:xfrm>
-          <a:prstGeom prst="rect">
+            <a:off x="731520" y="1417320"/>
+            <a:ext cx="10728655" cy="4160520"/>
+          </a:xfrm>
+          <a:prstGeom prst="roundRect">
             <a:avLst/>
           </a:prstGeom>
-          <a:noFill/>
-        </p:spPr>
-        <p:txBody>
-          <a:bodyPr wrap="square">
-            <a:spAutoFit/>
-          </a:bodyPr>
-          <a:lstStyle/>
-          <a:p>
-            <a:pPr>
-              <a:defRPr sz="2200" b="1">
-                <a:solidFill>
-                  <a:srgbClr val="FFFFFF"/>
-                </a:solidFill>
-                <a:latin typeface="Arial"/>
-              </a:defRPr>
-            </a:pPr>
-            <a:r>
-              <a:t>Demostración Práctica en Vivo (Live Demo Consola NOC)</a:t>
-            </a:r>
-          </a:p>
-        </p:txBody>
-      </p:sp>
-      <p:sp>
-        <p:nvSpPr>
-          <p:cNvPr id="5" name="TextBox 4"/>
-          <p:cNvSpPr txBox="1"/>
-          <p:nvPr/>
-        </p:nvSpPr>
-        <p:spPr>
-          <a:xfrm>
-            <a:off x="731520" y="1143000"/>
-            <a:ext cx="10515600" cy="320040"/>
-          </a:xfrm>
-          <a:prstGeom prst="rect">
-            <a:avLst/>
-          </a:prstGeom>
-          <a:noFill/>
-        </p:spPr>
-        <p:txBody>
-          <a:bodyPr wrap="square">
-            <a:spAutoFit/>
-          </a:bodyPr>
-          <a:lstStyle/>
-          <a:p>
-            <a:pPr>
-              <a:defRPr sz="1100">
-                <a:solidFill>
-                  <a:srgbClr val="94A3B8"/>
-                </a:solidFill>
-                <a:latin typeface="Arial"/>
-              </a:defRPr>
-            </a:pPr>
-            <a:r>
-              <a:t>Comprobación en tiempo real de los requerimientos funcionales del caso de estudio BCRP</a:t>
-            </a:r>
+          <a:solidFill>
+            <a:srgbClr val="0F172A"/>
+          </a:solidFill>
+          <a:ln w="22860">
+            <a:solidFill>
+              <a:srgbClr val="34D399"/>
+            </a:solidFill>
+          </a:ln>
+        </p:spPr>
+        <p:style>
+          <a:lnRef idx="1">
+            <a:schemeClr val="accent1"/>
+          </a:lnRef>
+          <a:fillRef idx="3">
+            <a:schemeClr val="accent1"/>
+          </a:fillRef>
+          <a:effectRef idx="2">
+            <a:schemeClr val="accent1"/>
+          </a:effectRef>
+          <a:fontRef idx="minor">
+            <a:schemeClr val="lt1"/>
+          </a:fontRef>
+        </p:style>
+        <p:txBody>
+          <a:bodyPr rtlCol="0" anchor="ctr"/>
+          <a:lstStyle/>
+          <a:p>
+            <a:pPr algn="ctr"/>
           </a:p>
         </p:txBody>
       </p:sp>
       <p:pic>
         <p:nvPicPr>
-          <p:cNvPr id="6" name="Picture 5" descr="figura7_dashboard_noc_web.png"/>
+          <p:cNvPr id="7" name="Picture 6" descr="figura1_bpmn_flujo_proceso.png"/>
           <p:cNvPicPr>
             <a:picLocks noChangeAspect="1"/>
           </p:cNvPicPr>
@@ -7694,8 +10384,8 @@
         </p:blipFill>
         <p:spPr>
           <a:xfrm>
-            <a:off x="731520" y="1645920"/>
-            <a:ext cx="5852160" cy="3291840"/>
+            <a:off x="3346704" y="1508760"/>
+            <a:ext cx="5492930" cy="3977639"/>
           </a:xfrm>
           <a:prstGeom prst="rect">
             <a:avLst/>
@@ -7704,24 +10394,24 @@
       </p:pic>
       <p:sp>
         <p:nvSpPr>
-          <p:cNvPr id="7" name="Rounded Rectangle 6"/>
+          <p:cNvPr id="8" name="Rounded Rectangle 7"/>
           <p:cNvSpPr/>
           <p:nvPr/>
         </p:nvSpPr>
         <p:spPr>
           <a:xfrm>
-            <a:off x="6858000" y="1645920"/>
-            <a:ext cx="4572000" cy="4572000"/>
+            <a:off x="731520" y="5715000"/>
+            <a:ext cx="3447288" cy="777240"/>
           </a:xfrm>
           <a:prstGeom prst="roundRect">
             <a:avLst/>
           </a:prstGeom>
           <a:solidFill>
-            <a:srgbClr val="0F192D"/>
+            <a:srgbClr val="FFFFFF"/>
           </a:solidFill>
-          <a:ln>
+          <a:ln w="25400">
             <a:solidFill>
-              <a:srgbClr val="10B981"/>
+              <a:srgbClr val="93C5FD"/>
             </a:solidFill>
           </a:ln>
         </p:spPr>
@@ -7740,181 +10430,168 @@
           </a:fontRef>
         </p:style>
         <p:txBody>
-          <a:bodyPr rtlCol="0" anchor="ctr" wrap="square"/>
+          <a:bodyPr rtlCol="0" anchor="t" wrap="square" tIns="91440" lIns="164592"/>
           <a:lstStyle/>
           <a:p>
             <a:pPr algn="ctr">
-              <a:defRPr sz="1100" b="1">
-                <a:solidFill>
-                  <a:srgbClr val="10B981"/>
-                </a:solidFill>
-                <a:latin typeface="Arial"/>
-              </a:defRPr>
-            </a:pPr>
-            <a:r>
-              <a:t>SECUENCIA DE LA DEMOSTRACIÓN (5 PASOS)</a:t>
-            </a:r>
-          </a:p>
-          <a:p>
-            <a:br/>
-            <a:pPr>
-              <a:defRPr sz="950" b="1">
-                <a:solidFill>
-                  <a:srgbClr val="FFFFFF"/>
-                </a:solidFill>
-                <a:latin typeface="Arial"/>
-              </a:defRPr>
-            </a:pPr>
-            <a:r>
-              <a:t>1. SESIÓN AD CORPORATIVA:</a:t>
-            </a:r>
-          </a:p>
-          <a:p>
-            <a:pPr>
-              <a:defRPr sz="850">
-                <a:solidFill>
-                  <a:srgbClr val="94A3B8"/>
-                </a:solidFill>
-                <a:latin typeface="Arial"/>
-              </a:defRPr>
-            </a:pPr>
-            <a:r>
-              <a:t>Validar login único AD\frank.vargas@bcrp.local (Rol NOC_LEAD).</a:t>
-            </a:r>
-          </a:p>
-          <a:p>
-            <a:br/>
-            <a:pPr>
-              <a:defRPr sz="950" b="1">
-                <a:solidFill>
-                  <a:srgbClr val="FFFFFF"/>
-                </a:solidFill>
-                <a:latin typeface="Arial"/>
-              </a:defRPr>
-            </a:pPr>
-            <a:r>
-              <a:t>2. SEMÁFOROS Y LATENCIA EN VIVO:</a:t>
-            </a:r>
-          </a:p>
-          <a:p>
-            <a:pPr>
-              <a:defRPr sz="850">
-                <a:solidFill>
-                  <a:srgbClr val="94A3B8"/>
-                </a:solidFill>
-                <a:latin typeface="Arial"/>
-              </a:defRPr>
-            </a:pPr>
-            <a:r>
-              <a:t>Yape (142ms), Plim (189ms), Tunki (210ms), CCE (95ms).</a:t>
-            </a:r>
-          </a:p>
-          <a:p>
-            <a:br/>
-            <a:pPr>
-              <a:defRPr sz="950" b="1">
-                <a:solidFill>
-                  <a:srgbClr val="FFFFFF"/>
-                </a:solidFill>
-                <a:latin typeface="Arial"/>
-              </a:defRPr>
-            </a:pPr>
-            <a:r>
-              <a:t>3. SIMULAR CAÍDA 503:</a:t>
-            </a:r>
-          </a:p>
-          <a:p>
-            <a:pPr>
-              <a:defRPr sz="850">
-                <a:solidFill>
-                  <a:srgbClr val="94A3B8"/>
-                </a:solidFill>
-                <a:latin typeface="Arial"/>
-              </a:defRPr>
-            </a:pPr>
-            <a:r>
-              <a:t>Clic en botón -&gt; Semáforo ROJO en vivo -&gt; Auto-generación de ticket INC-00004.</a:t>
-            </a:r>
-          </a:p>
-          <a:p>
-            <a:br/>
-            <a:pPr>
-              <a:defRPr sz="950" b="1">
-                <a:solidFill>
-                  <a:srgbClr val="FFFFFF"/>
-                </a:solidFill>
-                <a:latin typeface="Arial"/>
-              </a:defRPr>
-            </a:pPr>
-            <a:r>
-              <a:t>4. REGISTRO MANUAL DE FRAUDE:</a:t>
-            </a:r>
-          </a:p>
-          <a:p>
-            <a:pPr>
-              <a:defRPr sz="850">
-                <a:solidFill>
-                  <a:srgbClr val="94A3B8"/>
-                </a:solidFill>
-                <a:latin typeface="Arial"/>
-              </a:defRPr>
-            </a:pPr>
-            <a:r>
-              <a:t>Creación asistida de brecha de seguridad con bitácora inmutable.</a:t>
-            </a:r>
-          </a:p>
-          <a:p>
-            <a:br/>
-            <a:pPr>
-              <a:defRPr sz="950" b="1">
-                <a:solidFill>
-                  <a:srgbClr val="FFFFFF"/>
-                </a:solidFill>
-                <a:latin typeface="Arial"/>
-              </a:defRPr>
-            </a:pPr>
-            <a:r>
-              <a:t>5. COMPILAR REPORTE SFT BCRP:</a:t>
-            </a:r>
-          </a:p>
-          <a:p>
-            <a:pPr>
-              <a:defRPr sz="850">
-                <a:solidFill>
-                  <a:srgbClr val="94A3B8"/>
-                </a:solidFill>
-                <a:latin typeface="Arial"/>
-              </a:defRPr>
-            </a:pPr>
-            <a:r>
-              <a:t>Generación de archivo plano delimitado por pipes con hash SHA-256.</a:t>
-            </a:r>
-          </a:p>
-          <a:p>
-            <a:br/>
-            <a:pPr>
-              <a:defRPr sz="950" b="1">
-                <a:solidFill>
-                  <a:srgbClr val="00D4FF"/>
-                </a:solidFill>
-                <a:latin typeface="Arial"/>
-              </a:defRPr>
-            </a:pPr>
-            <a:r>
-              <a:t>SUITE BACKEND APROBADA:</a:t>
-            </a:r>
-          </a:p>
-          <a:p>
-            <a:pPr>
-              <a:defRPr sz="850">
-                <a:solidFill>
-                  <a:srgbClr val="94A3B8"/>
-                </a:solidFill>
-                <a:latin typeface="Arial"/>
-              </a:defRPr>
-            </a:pPr>
-            <a:r>
-              <a:t>8 pruebas unitarias con JUnit 5 y Mockito aprobadas con Maven.</a:t>
+              <a:defRPr sz="1250" b="1">
+                <a:solidFill>
+                  <a:srgbClr val="0B1F3A"/>
+                </a:solidFill>
+                <a:latin typeface="Calibri"/>
+              </a:defRPr>
+            </a:pPr>
+            <a:r>
+              <a:t>SONDEO ASÍNCRONO (30s)</a:t>
+            </a:r>
+          </a:p>
+          <a:p>
+            <a:pPr>
+              <a:defRPr sz="1150">
+                <a:solidFill>
+                  <a:srgbClr val="334155"/>
+                </a:solidFill>
+                <a:latin typeface="Calibri"/>
+              </a:defRPr>
+            </a:pPr>
+            <a:r>
+              <a:t>Worker paralelo consulta endpoints sin bloquear el thread principal.</a:t>
+            </a:r>
+          </a:p>
+        </p:txBody>
+      </p:sp>
+      <p:sp>
+        <p:nvSpPr>
+          <p:cNvPr id="9" name="Rounded Rectangle 8"/>
+          <p:cNvSpPr/>
+          <p:nvPr/>
+        </p:nvSpPr>
+        <p:spPr>
+          <a:xfrm>
+            <a:off x="4361688" y="5715000"/>
+            <a:ext cx="3447288" cy="777240"/>
+          </a:xfrm>
+          <a:prstGeom prst="roundRect">
+            <a:avLst/>
+          </a:prstGeom>
+          <a:solidFill>
+            <a:srgbClr val="FFFFFF"/>
+          </a:solidFill>
+          <a:ln w="25400">
+            <a:solidFill>
+              <a:srgbClr val="FCD34D"/>
+            </a:solidFill>
+          </a:ln>
+        </p:spPr>
+        <p:style>
+          <a:lnRef idx="1">
+            <a:schemeClr val="accent1"/>
+          </a:lnRef>
+          <a:fillRef idx="3">
+            <a:schemeClr val="accent1"/>
+          </a:fillRef>
+          <a:effectRef idx="2">
+            <a:schemeClr val="accent1"/>
+          </a:effectRef>
+          <a:fontRef idx="minor">
+            <a:schemeClr val="lt1"/>
+          </a:fontRef>
+        </p:style>
+        <p:txBody>
+          <a:bodyPr rtlCol="0" anchor="t" wrap="square" tIns="91440" lIns="164592"/>
+          <a:lstStyle/>
+          <a:p>
+            <a:pPr algn="ctr">
+              <a:defRPr sz="1250" b="1">
+                <a:solidFill>
+                  <a:srgbClr val="0B1F3A"/>
+                </a:solidFill>
+                <a:latin typeface="Calibri"/>
+              </a:defRPr>
+            </a:pPr>
+            <a:r>
+              <a:t>REGLA RN-01 ANTI-DUPLICADOS</a:t>
+            </a:r>
+          </a:p>
+          <a:p>
+            <a:pPr>
+              <a:defRPr sz="1150">
+                <a:solidFill>
+                  <a:srgbClr val="334155"/>
+                </a:solidFill>
+                <a:latin typeface="Calibri"/>
+              </a:defRPr>
+            </a:pPr>
+            <a:r>
+              <a:t>Si ya existe incidente abierto, acumula telemetría sin generar alertas falsas.</a:t>
+            </a:r>
+          </a:p>
+        </p:txBody>
+      </p:sp>
+      <p:sp>
+        <p:nvSpPr>
+          <p:cNvPr id="10" name="Rounded Rectangle 9"/>
+          <p:cNvSpPr/>
+          <p:nvPr/>
+        </p:nvSpPr>
+        <p:spPr>
+          <a:xfrm>
+            <a:off x="7991856" y="5715000"/>
+            <a:ext cx="3447288" cy="777240"/>
+          </a:xfrm>
+          <a:prstGeom prst="roundRect">
+            <a:avLst/>
+          </a:prstGeom>
+          <a:solidFill>
+            <a:srgbClr val="FFFFFF"/>
+          </a:solidFill>
+          <a:ln w="25400">
+            <a:solidFill>
+              <a:srgbClr val="6EE7B7"/>
+            </a:solidFill>
+          </a:ln>
+        </p:spPr>
+        <p:style>
+          <a:lnRef idx="1">
+            <a:schemeClr val="accent1"/>
+          </a:lnRef>
+          <a:fillRef idx="3">
+            <a:schemeClr val="accent1"/>
+          </a:fillRef>
+          <a:effectRef idx="2">
+            <a:schemeClr val="accent1"/>
+          </a:effectRef>
+          <a:fontRef idx="minor">
+            <a:schemeClr val="lt1"/>
+          </a:fontRef>
+        </p:style>
+        <p:txBody>
+          <a:bodyPr rtlCol="0" anchor="t" wrap="square" tIns="91440" lIns="164592"/>
+          <a:lstStyle/>
+          <a:p>
+            <a:pPr algn="ctr">
+              <a:defRPr sz="1250" b="1">
+                <a:solidFill>
+                  <a:srgbClr val="0B1F3A"/>
+                </a:solidFill>
+                <a:latin typeface="Calibri"/>
+              </a:defRPr>
+            </a:pPr>
+            <a:r>
+              <a:t>ERRADICACIÓN DE ASIMETRÍA</a:t>
+            </a:r>
+          </a:p>
+          <a:p>
+            <a:pPr>
+              <a:defRPr sz="1150">
+                <a:solidFill>
+                  <a:srgbClr val="334155"/>
+                </a:solidFill>
+                <a:latin typeface="Calibri"/>
+              </a:defRPr>
+            </a:pPr>
+            <a:r>
+              <a:t>Se eliminan las llamadas y demoras de 3 horas; alerta inmediata en consola NOC.</a:t>
             </a:r>
           </a:p>
         </p:txBody>
